--- a/Teaching/Compile Time Errrors/sessions/type_system_intro.pptx
+++ b/Teaching/Compile Time Errrors/sessions/type_system_intro.pptx
@@ -4,19 +4,19 @@
   <p:sldMasterIdLst>
     <p:sldMasterId id="2147483648" r:id="rId1"/>
   </p:sldMasterIdLst>
+  <p:notesMasterIdLst>
+    <p:notesMasterId r:id="rId9"/>
+  </p:notesMasterIdLst>
   <p:sldIdLst>
     <p:sldId id="256" r:id="rId2"/>
     <p:sldId id="257" r:id="rId3"/>
     <p:sldId id="258" r:id="rId4"/>
-    <p:sldId id="262" r:id="rId13"/>
-    <p:sldId id="259" r:id="rId5"/>
-    <p:sldId id="260" r:id="rId6"/>
-    <p:sldId id="261" r:id="rId7"/>
+    <p:sldId id="262" r:id="rId5"/>
+    <p:sldId id="259" r:id="rId6"/>
+    <p:sldId id="260" r:id="rId7"/>
+    <p:sldId id="261" r:id="rId8"/>
   </p:sldIdLst>
-  <p:notesMasterIdLst>
-    <p:notesMasterId r:id="rId8"/>
-  </p:notesMasterIdLst>
-  <p:sldSz cx="9144000" cy="5143500"/>
+  <p:sldSz cx="9144000" cy="5143500" type="screen16x9"/>
   <p:notesSz cx="5143500" cy="9144000"/>
   <p:defaultTextStyle>
     <a:lvl1pPr marL="0" algn="l" defTabSz="914400" rtl="0" eaLnBrk="1" latinLnBrk="0" hangingPunct="1">
@@ -110,6 +110,11 @@
       </a:defRPr>
     </a:lvl9pPr>
   </p:defaultTextStyle>
+  <p:extLst>
+    <p:ext uri="{EFAFB233-063F-42B5-8137-9DF3F51BA10A}">
+      <p15:sldGuideLst xmlns:p15="http://schemas.microsoft.com/office/powerpoint/2012/main"/>
+    </p:ext>
+  </p:extLst>
 </p:presentation>
 </file>
 
@@ -135,234 +140,10 @@
           <a:chExt cx="0" cy="0"/>
         </a:xfrm>
       </p:grpSpPr>
-      <p:sp>
-        <p:nvSpPr>
-          <p:cNvPr id="2" name="Header Placeholder 1"/>
-          <p:cNvSpPr>
-            <a:spLocks noGrp="1"/>
-          </p:cNvSpPr>
-          <p:nvPr>
-            <p:ph type="hdr" sz="quarter"/>
-          </p:nvPr>
-        </p:nvSpPr>
-        <p:spPr>
-          <a:xfrm>
-            <a:off x="0" y="0"/>
-            <a:ext cx="2971800" cy="458788"/>
-          </a:xfrm>
-          <a:prstGeom prst="rect">
-            <a:avLst/>
-          </a:prstGeom>
-        </p:spPr>
-        <p:txBody>
-          <a:bodyPr vert="horz" lIns="91440" tIns="45720" rIns="91440" bIns="45720" rtlCol="0"/>
-          <a:lstStyle>
-            <a:lvl1pPr algn="l">
-              <a:defRPr sz="1200"/>
-            </a:lvl1pPr>
-          </a:lstStyle>
-          <a:p>
-            <a:endParaRPr lang="en-US"/>
-          </a:p>
-        </p:txBody>
-      </p:sp>
-      <p:sp>
-        <p:nvSpPr>
-          <p:cNvPr id="3" name="Date Placeholder 2"/>
-          <p:cNvSpPr>
-            <a:spLocks noGrp="1"/>
-          </p:cNvSpPr>
-          <p:nvPr>
-            <p:ph type="dt" idx="1"/>
-          </p:nvPr>
-        </p:nvSpPr>
-        <p:spPr>
-          <a:xfrm>
-            <a:off x="3884613" y="0"/>
-            <a:ext cx="2971800" cy="458788"/>
-          </a:xfrm>
-          <a:prstGeom prst="rect">
-            <a:avLst/>
-          </a:prstGeom>
-        </p:spPr>
-        <p:txBody>
-          <a:bodyPr vert="horz" lIns="91440" tIns="45720" rIns="91440" bIns="45720" rtlCol="0"/>
-          <a:lstStyle>
-            <a:lvl1pPr algn="r">
-              <a:defRPr sz="1200"/>
-            </a:lvl1pPr>
-          </a:lstStyle>
-          <a:p>
-            <a:fld id="{5282F153-3F37-0F45-9E97-73ACFA13230C}" type="datetimeFigureOut">
-              <a:rPr lang="en-US"/>
-              <a:t>7/23/19</a:t>
-            </a:fld>
-            <a:endParaRPr lang="en-US"/>
-          </a:p>
-        </p:txBody>
-      </p:sp>
-      <p:sp>
-        <p:nvSpPr>
-          <p:cNvPr id="4" name="Slide Image Placeholder 3"/>
-          <p:cNvSpPr>
-            <a:spLocks noGrp="1" noRot="1" noChangeAspect="1"/>
-          </p:cNvSpPr>
-          <p:nvPr>
-            <p:ph type="sldImg" idx="2"/>
-          </p:nvPr>
-        </p:nvSpPr>
-        <p:spPr>
-          <a:xfrm>
-            <a:off x="685800" y="1143000"/>
-            <a:ext cx="5486400" cy="3086100"/>
-          </a:xfrm>
-          <a:prstGeom prst="rect">
-            <a:avLst/>
-          </a:prstGeom>
-          <a:noFill/>
-          <a:ln w="12700">
-            <a:solidFill>
-              <a:prstClr val="black"/>
-            </a:solidFill>
-          </a:ln>
-        </p:spPr>
-        <p:txBody>
-          <a:bodyPr vert="horz" lIns="91440" tIns="45720" rIns="91440" bIns="45720" rtlCol="0" anchor="ctr"/>
-          <a:lstStyle/>
-          <a:p>
-            <a:endParaRPr lang="en-US"/>
-          </a:p>
-        </p:txBody>
-      </p:sp>
-      <p:sp>
-        <p:nvSpPr>
-          <p:cNvPr id="5" name="Notes Placeholder 4"/>
-          <p:cNvSpPr>
-            <a:spLocks noGrp="1"/>
-          </p:cNvSpPr>
-          <p:nvPr>
-            <p:ph type="body" sz="quarter" idx="3"/>
-          </p:nvPr>
-        </p:nvSpPr>
-        <p:spPr>
-          <a:xfrm>
-            <a:off x="685800" y="4400550"/>
-            <a:ext cx="5486400" cy="3600450"/>
-          </a:xfrm>
-          <a:prstGeom prst="rect">
-            <a:avLst/>
-          </a:prstGeom>
-        </p:spPr>
-        <p:txBody>
-          <a:bodyPr vert="horz" lIns="91440" tIns="45720" rIns="91440" bIns="45720" rtlCol="0"/>
-          <a:lstStyle/>
-          <a:p>
-            <a:pPr lvl="0"/>
-            <a:r>
-              <a:rPr lang="en-US"/>
-              <a:t>Click to edit Master text styles</a:t>
-            </a:r>
-          </a:p>
-          <a:p>
-            <a:pPr lvl="1"/>
-            <a:r>
-              <a:rPr lang="en-US"/>
-              <a:t>Second level</a:t>
-            </a:r>
-          </a:p>
-          <a:p>
-            <a:pPr lvl="2"/>
-            <a:r>
-              <a:rPr lang="en-US"/>
-              <a:t>Third level</a:t>
-            </a:r>
-          </a:p>
-          <a:p>
-            <a:pPr lvl="3"/>
-            <a:r>
-              <a:rPr lang="en-US"/>
-              <a:t>Fourth level</a:t>
-            </a:r>
-          </a:p>
-          <a:p>
-            <a:pPr lvl="4"/>
-            <a:r>
-              <a:rPr lang="en-US"/>
-              <a:t>Fifth level</a:t>
-            </a:r>
-          </a:p>
-        </p:txBody>
-      </p:sp>
-      <p:sp>
-        <p:nvSpPr>
-          <p:cNvPr id="6" name="Footer Placeholder 5"/>
-          <p:cNvSpPr>
-            <a:spLocks noGrp="1"/>
-          </p:cNvSpPr>
-          <p:nvPr>
-            <p:ph type="ftr" sz="quarter" idx="4"/>
-          </p:nvPr>
-        </p:nvSpPr>
-        <p:spPr>
-          <a:xfrm>
-            <a:off x="0" y="8685213"/>
-            <a:ext cx="2971800" cy="458787"/>
-          </a:xfrm>
-          <a:prstGeom prst="rect">
-            <a:avLst/>
-          </a:prstGeom>
-        </p:spPr>
-        <p:txBody>
-          <a:bodyPr vert="horz" lIns="91440" tIns="45720" rIns="91440" bIns="45720" rtlCol="0" anchor="b"/>
-          <a:lstStyle>
-            <a:lvl1pPr algn="l">
-              <a:defRPr sz="1200"/>
-            </a:lvl1pPr>
-          </a:lstStyle>
-          <a:p>
-            <a:endParaRPr lang="en-US"/>
-          </a:p>
-        </p:txBody>
-      </p:sp>
-      <p:sp>
-        <p:nvSpPr>
-          <p:cNvPr id="7" name="Slide Number Placeholder 6"/>
-          <p:cNvSpPr>
-            <a:spLocks noGrp="1"/>
-          </p:cNvSpPr>
-          <p:nvPr>
-            <p:ph type="sldNum" sz="quarter" idx="5"/>
-          </p:nvPr>
-        </p:nvSpPr>
-        <p:spPr>
-          <a:xfrm>
-            <a:off x="3884613" y="8685213"/>
-            <a:ext cx="2971800" cy="458787"/>
-          </a:xfrm>
-          <a:prstGeom prst="rect">
-            <a:avLst/>
-          </a:prstGeom>
-        </p:spPr>
-        <p:txBody>
-          <a:bodyPr vert="horz" lIns="91440" tIns="45720" rIns="91440" bIns="45720" rtlCol="0" anchor="b"/>
-          <a:lstStyle>
-            <a:lvl1pPr algn="r">
-              <a:defRPr sz="1200"/>
-            </a:lvl1pPr>
-          </a:lstStyle>
-          <a:p>
-            <a:fld id="{CE5E9CC1-C706-0F49-92D6-E571CC5EEA8F}" type="slidenum">
-              <a:rPr lang="en-US"/>
-              <a:t>‹#›</a:t>
-            </a:fld>
-            <a:endParaRPr lang="en-US"/>
-          </a:p>
-        </p:txBody>
-      </p:sp>
     </p:spTree>
     <p:extLst>
       <p:ext uri="{BB962C8B-B14F-4D97-AF65-F5344CB8AC3E}">
-        <p14:creationId xmlns:p14="http://schemas.microsoft.com/office/powerpoint/2010/main" val="1024086991"/>
+        <p14:creationId xmlns:p14="http://schemas.microsoft.com/office/powerpoint/2010/main" val="3941533238"/>
       </p:ext>
     </p:extLst>
   </p:cSld>
@@ -506,10 +287,6 @@
           <a:bodyPr/>
           <a:lstStyle/>
           <a:p>
-            <a:r>
-              <a:rPr lang="en-US" dirty="0"/>
-              <a:t/>
-            </a:r>
             <a:endParaRPr lang="en-US" dirty="0"/>
           </a:p>
         </p:txBody>
@@ -594,10 +371,6 @@
           <a:bodyPr/>
           <a:lstStyle/>
           <a:p>
-            <a:r>
-              <a:rPr lang="en-US" dirty="0"/>
-              <a:t/>
-            </a:r>
             <a:endParaRPr lang="en-US" dirty="0"/>
           </a:p>
         </p:txBody>
@@ -682,10 +455,6 @@
           <a:bodyPr/>
           <a:lstStyle/>
           <a:p>
-            <a:r>
-              <a:rPr lang="en-US" dirty="0"/>
-              <a:t/>
-            </a:r>
             <a:endParaRPr lang="en-US" dirty="0"/>
           </a:p>
         </p:txBody>
@@ -770,10 +539,6 @@
           <a:bodyPr/>
           <a:lstStyle/>
           <a:p>
-            <a:r>
-              <a:rPr lang="en-US" dirty="0"/>
-              <a:t/>
-            </a:r>
             <a:endParaRPr lang="en-US" dirty="0"/>
           </a:p>
         </p:txBody>
@@ -795,7 +560,7 @@
           <a:p>
             <a:fld id="{F7021451-1387-4CA6-816F-3879F97B5CBC}" type="slidenum">
               <a:rPr lang="en-US"/>
-              <a:t>4</a:t>
+              <a:t>5</a:t>
             </a:fld>
             <a:endParaRPr lang="en-US"/>
           </a:p>
@@ -858,10 +623,6 @@
           <a:bodyPr/>
           <a:lstStyle/>
           <a:p>
-            <a:r>
-              <a:rPr lang="en-US" dirty="0"/>
-              <a:t/>
-            </a:r>
             <a:endParaRPr lang="en-US" dirty="0"/>
           </a:p>
         </p:txBody>
@@ -883,7 +644,7 @@
           <a:p>
             <a:fld id="{F7021451-1387-4CA6-816F-3879F97B5CBC}" type="slidenum">
               <a:rPr lang="en-US"/>
-              <a:t>5</a:t>
+              <a:t>6</a:t>
             </a:fld>
             <a:endParaRPr lang="en-US"/>
           </a:p>
@@ -946,10 +707,6 @@
           <a:bodyPr/>
           <a:lstStyle/>
           <a:p>
-            <a:r>
-              <a:rPr lang="en-US" dirty="0"/>
-              <a:t/>
-            </a:r>
             <a:endParaRPr lang="en-US" dirty="0"/>
           </a:p>
         </p:txBody>
@@ -971,7 +728,7 @@
           <a:p>
             <a:fld id="{F7021451-1387-4CA6-816F-3879F97B5CBC}" type="slidenum">
               <a:rPr lang="en-US"/>
-              <a:t>6</a:t>
+              <a:t>7</a:t>
             </a:fld>
             <a:endParaRPr lang="en-US"/>
           </a:p>
@@ -1023,6 +780,11 @@
 <file path=ppt/slideMasters/slideMaster1.xml><?xml version="1.0" encoding="utf-8"?>
 <p:sldMaster xmlns:a="http://schemas.openxmlformats.org/drawingml/2006/main" xmlns:r="http://schemas.openxmlformats.org/officeDocument/2006/relationships" xmlns:p="http://schemas.openxmlformats.org/presentationml/2006/main">
   <p:cSld>
+    <p:bg>
+      <p:bgRef idx="1001">
+        <a:schemeClr val="bg1"/>
+      </p:bgRef>
+    </p:bg>
     <p:spTree>
       <p:nvGrpSpPr>
         <p:cNvPr id="1" name=""/>
@@ -1305,6 +1067,7 @@
         <a:solidFill>
           <a:srgbClr val="1A1D23"/>
         </a:solidFill>
+        <a:effectLst/>
       </p:bgPr>
     </p:bg>
     <p:spTree>
@@ -1342,7 +1105,7 @@
           <a:bodyPr wrap="square" lIns="0" tIns="0" rIns="0" bIns="0" rtlCol="0" anchor="ctr"/>
           <a:lstStyle/>
           <a:p>
-            <a:pPr indent="0" marL="0">
+            <a:pPr marL="0" indent="0">
               <a:lnSpc>
                 <a:spcPct val="105000"/>
               </a:lnSpc>
@@ -1362,7 +1125,7 @@
             <a:endParaRPr lang="en-US" sz="4000" dirty="0"/>
           </a:p>
           <a:p>
-            <a:pPr indent="0" marL="0">
+            <a:pPr marL="0" indent="0">
               <a:lnSpc>
                 <a:spcPct val="105000"/>
               </a:lnSpc>
@@ -1404,7 +1167,7 @@
           <a:bodyPr wrap="square" lIns="0" tIns="0" rIns="0" bIns="0" rtlCol="0" anchor="ctr"/>
           <a:lstStyle/>
           <a:p>
-            <a:pPr indent="0" marL="0">
+            <a:pPr marL="0" indent="0">
               <a:buNone/>
             </a:pPr>
             <a:r>
@@ -1443,7 +1206,7 @@
           <a:bodyPr wrap="square" lIns="0" tIns="0" rIns="0" bIns="0" rtlCol="0" anchor="ctr"/>
           <a:lstStyle/>
           <a:p>
-            <a:pPr indent="0" marL="0">
+            <a:pPr marL="0" indent="0">
               <a:buNone/>
             </a:pPr>
             <a:r>
@@ -1480,6 +1243,13 @@
           </a:solidFill>
           <a:ln/>
         </p:spPr>
+        <p:txBody>
+          <a:bodyPr/>
+          <a:lstStyle/>
+          <a:p>
+            <a:endParaRPr lang="en-US"/>
+          </a:p>
+        </p:txBody>
       </p:sp>
       <p:sp>
         <p:nvSpPr>
@@ -1492,7 +1262,7 @@
             <a:off x="777240" y="3657600"/>
             <a:ext cx="411480" cy="411480"/>
           </a:xfrm>
-          <a:prstGeom prst="oval">
+          <a:prstGeom prst="line">
             <a:avLst/>
           </a:prstGeom>
           <a:solidFill>
@@ -1500,262 +1270,17 @@
           </a:solidFill>
           <a:ln/>
         </p:spPr>
+        <p:txBody>
+          <a:bodyPr/>
+          <a:lstStyle/>
+          <a:p>
+            <a:endParaRPr lang="en-US"/>
+          </a:p>
+        </p:txBody>
       </p:sp>
       <p:pic>
         <p:nvPicPr>
           <p:cNvPr id="7" name="Image 0" descr="preencoded.png"/>
-          <p:cNvPicPr>
-            <a:picLocks noChangeAspect="1"/>
-          </p:cNvPicPr>
-          <p:nvPr/>
-        </p:nvPicPr>
-        <p:blipFill>
-          <a:blip r:embed="rId1"/>
-          <a:stretch>
-            <a:fillRect/>
-          </a:stretch>
-        </p:blipFill>
-        <p:spPr>
-          <a:xfrm>
-            <a:off x="859536" y="3739896"/>
-            <a:ext cx="246888" cy="246888"/>
-          </a:xfrm>
-          <a:prstGeom prst="rect">
-            <a:avLst/>
-          </a:prstGeom>
-        </p:spPr>
-      </p:pic>
-      <p:sp>
-        <p:nvSpPr>
-          <p:cNvPr id="8" name="Text 5"/>
-          <p:cNvSpPr/>
-          <p:nvPr/>
-        </p:nvSpPr>
-        <p:spPr>
-          <a:xfrm>
-            <a:off x="1280160" y="3611880"/>
-            <a:ext cx="1051560" cy="731520"/>
-          </a:xfrm>
-          <a:prstGeom prst="rect">
-            <a:avLst/>
-          </a:prstGeom>
-          <a:noFill/>
-          <a:ln/>
-        </p:spPr>
-        <p:txBody>
-          <a:bodyPr wrap="square" lIns="0" tIns="0" rIns="0" bIns="0" rtlCol="0" anchor="ctr"/>
-          <a:lstStyle/>
-          <a:p>
-            <a:pPr indent="0" marL="0">
-              <a:lnSpc>
-                <a:spcPct val="120000"/>
-              </a:lnSpc>
-              <a:buNone/>
-            </a:pPr>
-            <a:r>
-              <a:rPr lang="en-US" sz="900" dirty="0">
-                <a:solidFill>
-                  <a:srgbClr val="94A3B8"/>
-                </a:solidFill>
-                <a:latin typeface="Calibri" pitchFamily="34" charset="0"/>
-                <a:ea typeface="Calibri" pitchFamily="34" charset="-122"/>
-                <a:cs typeface="Calibri" pitchFamily="34" charset="-120"/>
-              </a:rPr>
-              <a:t>Type system as</a:t>
-            </a:r>
-            <a:endParaRPr lang="en-US" sz="900" dirty="0"/>
-          </a:p>
-          <a:p>
-            <a:pPr indent="0" marL="0">
-              <a:lnSpc>
-                <a:spcPct val="120000"/>
-              </a:lnSpc>
-              <a:buNone/>
-            </a:pPr>
-            <a:r>
-              <a:rPr lang="en-US" sz="900" dirty="0">
-                <a:solidFill>
-                  <a:srgbClr val="94A3B8"/>
-                </a:solidFill>
-                <a:latin typeface="Calibri" pitchFamily="34" charset="0"/>
-                <a:ea typeface="Calibri" pitchFamily="34" charset="-122"/>
-                <a:cs typeface="Calibri" pitchFamily="34" charset="-120"/>
-              </a:rPr>
-              <a:t>constraint checker</a:t>
-            </a:r>
-            <a:endParaRPr lang="en-US" sz="900" dirty="0"/>
-          </a:p>
-        </p:txBody>
-      </p:sp>
-      <p:sp>
-        <p:nvSpPr>
-          <p:cNvPr id="9" name="Shape 6"/>
-          <p:cNvSpPr/>
-          <p:nvPr/>
-        </p:nvSpPr>
-        <p:spPr>
-          <a:xfrm>
-            <a:off x="2715768" y="3474720"/>
-            <a:ext cx="1828800" cy="1005840"/>
-          </a:xfrm>
-          <a:prstGeom prst="rect">
-            <a:avLst/>
-          </a:prstGeom>
-          <a:solidFill>
-            <a:srgbClr val="22262E"/>
-          </a:solidFill>
-          <a:ln/>
-        </p:spPr>
-      </p:sp>
-      <p:sp>
-        <p:nvSpPr>
-          <p:cNvPr id="10" name="Shape 7"/>
-          <p:cNvSpPr/>
-          <p:nvPr/>
-        </p:nvSpPr>
-        <p:spPr>
-          <a:xfrm>
-            <a:off x="2852928" y="3657600"/>
-            <a:ext cx="411480" cy="411480"/>
-          </a:xfrm>
-          <a:prstGeom prst="oval">
-            <a:avLst/>
-          </a:prstGeom>
-          <a:solidFill>
-            <a:srgbClr val="333A48"/>
-          </a:solidFill>
-          <a:ln/>
-        </p:spPr>
-      </p:sp>
-      <p:pic>
-        <p:nvPicPr>
-          <p:cNvPr id="11" name="Image 1" descr="preencoded.png"/>
-          <p:cNvPicPr>
-            <a:picLocks noChangeAspect="1"/>
-          </p:cNvPicPr>
-          <p:nvPr/>
-        </p:nvPicPr>
-        <p:blipFill>
-          <a:blip r:embed="rId2"/>
-          <a:stretch>
-            <a:fillRect/>
-          </a:stretch>
-        </p:blipFill>
-        <p:spPr>
-          <a:xfrm>
-            <a:off x="2935224" y="3739896"/>
-            <a:ext cx="246888" cy="246888"/>
-          </a:xfrm>
-          <a:prstGeom prst="rect">
-            <a:avLst/>
-          </a:prstGeom>
-        </p:spPr>
-      </p:pic>
-      <p:sp>
-        <p:nvSpPr>
-          <p:cNvPr id="12" name="Text 8"/>
-          <p:cNvSpPr/>
-          <p:nvPr/>
-        </p:nvSpPr>
-        <p:spPr>
-          <a:xfrm>
-            <a:off x="3355848" y="3611880"/>
-            <a:ext cx="1051560" cy="731520"/>
-          </a:xfrm>
-          <a:prstGeom prst="rect">
-            <a:avLst/>
-          </a:prstGeom>
-          <a:noFill/>
-          <a:ln/>
-        </p:spPr>
-        <p:txBody>
-          <a:bodyPr wrap="square" lIns="0" tIns="0" rIns="0" bIns="0" rtlCol="0" anchor="ctr"/>
-          <a:lstStyle/>
-          <a:p>
-            <a:pPr indent="0" marL="0">
-              <a:lnSpc>
-                <a:spcPct val="120000"/>
-              </a:lnSpc>
-              <a:buNone/>
-            </a:pPr>
-            <a:r>
-              <a:rPr lang="en-US" sz="900" dirty="0">
-                <a:solidFill>
-                  <a:srgbClr val="94A3B8"/>
-                </a:solidFill>
-                <a:latin typeface="Calibri" pitchFamily="34" charset="0"/>
-                <a:ea typeface="Calibri" pitchFamily="34" charset="-122"/>
-                <a:cs typeface="Calibri" pitchFamily="34" charset="-120"/>
-              </a:rPr>
-              <a:t>Compile-time</a:t>
-            </a:r>
-            <a:endParaRPr lang="en-US" sz="900" dirty="0"/>
-          </a:p>
-          <a:p>
-            <a:pPr indent="0" marL="0">
-              <a:lnSpc>
-                <a:spcPct val="120000"/>
-              </a:lnSpc>
-              <a:buNone/>
-            </a:pPr>
-            <a:r>
-              <a:rPr lang="en-US" sz="900" dirty="0">
-                <a:solidFill>
-                  <a:srgbClr val="94A3B8"/>
-                </a:solidFill>
-                <a:latin typeface="Calibri" pitchFamily="34" charset="0"/>
-                <a:ea typeface="Calibri" pitchFamily="34" charset="-122"/>
-                <a:cs typeface="Calibri" pitchFamily="34" charset="-120"/>
-              </a:rPr>
-              <a:t>error detection</a:t>
-            </a:r>
-            <a:endParaRPr lang="en-US" sz="900" dirty="0"/>
-          </a:p>
-        </p:txBody>
-      </p:sp>
-      <p:sp>
-        <p:nvSpPr>
-          <p:cNvPr id="13" name="Shape 9"/>
-          <p:cNvSpPr/>
-          <p:nvPr/>
-        </p:nvSpPr>
-        <p:spPr>
-          <a:xfrm>
-            <a:off x="4791456" y="3474720"/>
-            <a:ext cx="1828800" cy="1005840"/>
-          </a:xfrm>
-          <a:prstGeom prst="rect">
-            <a:avLst/>
-          </a:prstGeom>
-          <a:solidFill>
-            <a:srgbClr val="22262E"/>
-          </a:solidFill>
-          <a:ln/>
-        </p:spPr>
-      </p:sp>
-      <p:sp>
-        <p:nvSpPr>
-          <p:cNvPr id="14" name="Shape 10"/>
-          <p:cNvSpPr/>
-          <p:nvPr/>
-        </p:nvSpPr>
-        <p:spPr>
-          <a:xfrm>
-            <a:off x="4928616" y="3657600"/>
-            <a:ext cx="411480" cy="411480"/>
-          </a:xfrm>
-          <a:prstGeom prst="oval">
-            <a:avLst/>
-          </a:prstGeom>
-          <a:solidFill>
-            <a:srgbClr val="333A48"/>
-          </a:solidFill>
-          <a:ln/>
-        </p:spPr>
-      </p:sp>
-      <p:pic>
-        <p:nvPicPr>
-          <p:cNvPr id="15" name="Image 2" descr="preencoded.png"/>
           <p:cNvPicPr>
             <a:picLocks noChangeAspect="1"/>
           </p:cNvPicPr>
@@ -1769,7 +1294,7 @@
         </p:blipFill>
         <p:spPr>
           <a:xfrm>
-            <a:off x="5010912" y="3739896"/>
+            <a:off x="859536" y="3739896"/>
             <a:ext cx="246888" cy="246888"/>
           </a:xfrm>
           <a:prstGeom prst="rect">
@@ -1779,13 +1304,13 @@
       </p:pic>
       <p:sp>
         <p:nvSpPr>
-          <p:cNvPr id="16" name="Text 11"/>
-          <p:cNvSpPr/>
-          <p:nvPr/>
-        </p:nvSpPr>
-        <p:spPr>
-          <a:xfrm>
-            <a:off x="5431536" y="3611880"/>
+          <p:cNvPr id="8" name="Text 5"/>
+          <p:cNvSpPr/>
+          <p:nvPr/>
+        </p:nvSpPr>
+        <p:spPr>
+          <a:xfrm>
+            <a:off x="1280160" y="3611880"/>
             <a:ext cx="1051560" cy="731520"/>
           </a:xfrm>
           <a:prstGeom prst="rect">
@@ -1798,7 +1323,7 @@
           <a:bodyPr wrap="square" lIns="0" tIns="0" rIns="0" bIns="0" rtlCol="0" anchor="ctr"/>
           <a:lstStyle/>
           <a:p>
-            <a:pPr indent="0" marL="0">
+            <a:pPr marL="0" indent="0">
               <a:lnSpc>
                 <a:spcPct val="120000"/>
               </a:lnSpc>
@@ -1813,12 +1338,12 @@
                 <a:ea typeface="Calibri" pitchFamily="34" charset="-122"/>
                 <a:cs typeface="Calibri" pitchFamily="34" charset="-120"/>
               </a:rPr>
-              <a:t>Encode semantics</a:t>
+              <a:t>Type system as</a:t>
             </a:r>
             <a:endParaRPr lang="en-US" sz="900" dirty="0"/>
           </a:p>
           <a:p>
-            <a:pPr indent="0" marL="0">
+            <a:pPr marL="0" indent="0">
               <a:lnSpc>
                 <a:spcPct val="120000"/>
               </a:lnSpc>
@@ -1833,7 +1358,7 @@
                 <a:ea typeface="Calibri" pitchFamily="34" charset="-122"/>
                 <a:cs typeface="Calibri" pitchFamily="34" charset="-120"/>
               </a:rPr>
-              <a:t>in types</a:t>
+              <a:t>constraint checker</a:t>
             </a:r>
             <a:endParaRPr lang="en-US" sz="900" dirty="0"/>
           </a:p>
@@ -1841,13 +1366,13 @@
       </p:sp>
       <p:sp>
         <p:nvSpPr>
-          <p:cNvPr id="17" name="Shape 12"/>
-          <p:cNvSpPr/>
-          <p:nvPr/>
-        </p:nvSpPr>
-        <p:spPr>
-          <a:xfrm>
-            <a:off x="6867144" y="3474720"/>
+          <p:cNvPr id="9" name="Shape 6"/>
+          <p:cNvSpPr/>
+          <p:nvPr/>
+        </p:nvSpPr>
+        <p:spPr>
+          <a:xfrm>
+            <a:off x="2715768" y="3474720"/>
             <a:ext cx="1828800" cy="1005840"/>
           </a:xfrm>
           <a:prstGeom prst="rect">
@@ -1858,19 +1383,26 @@
           </a:solidFill>
           <a:ln/>
         </p:spPr>
-      </p:sp>
-      <p:sp>
-        <p:nvSpPr>
-          <p:cNvPr id="18" name="Shape 13"/>
-          <p:cNvSpPr/>
-          <p:nvPr/>
-        </p:nvSpPr>
-        <p:spPr>
-          <a:xfrm>
-            <a:off x="7004304" y="3657600"/>
+        <p:txBody>
+          <a:bodyPr/>
+          <a:lstStyle/>
+          <a:p>
+            <a:endParaRPr lang="en-US"/>
+          </a:p>
+        </p:txBody>
+      </p:sp>
+      <p:sp>
+        <p:nvSpPr>
+          <p:cNvPr id="10" name="Shape 7"/>
+          <p:cNvSpPr/>
+          <p:nvPr/>
+        </p:nvSpPr>
+        <p:spPr>
+          <a:xfrm>
+            <a:off x="2852928" y="3657600"/>
             <a:ext cx="411480" cy="411480"/>
           </a:xfrm>
-          <a:prstGeom prst="oval">
+          <a:prstGeom prst="line">
             <a:avLst/>
           </a:prstGeom>
           <a:solidFill>
@@ -1878,10 +1410,17 @@
           </a:solidFill>
           <a:ln/>
         </p:spPr>
+        <p:txBody>
+          <a:bodyPr/>
+          <a:lstStyle/>
+          <a:p>
+            <a:endParaRPr lang="en-US"/>
+          </a:p>
+        </p:txBody>
       </p:sp>
       <p:pic>
         <p:nvPicPr>
-          <p:cNvPr id="19" name="Image 3" descr="preencoded.png"/>
+          <p:cNvPr id="11" name="Image 1" descr="preencoded.png"/>
           <p:cNvPicPr>
             <a:picLocks noChangeAspect="1"/>
           </p:cNvPicPr>
@@ -1895,7 +1434,7 @@
         </p:blipFill>
         <p:spPr>
           <a:xfrm>
-            <a:off x="7086600" y="3739896"/>
+            <a:off x="2935224" y="3739896"/>
             <a:ext cx="246888" cy="246888"/>
           </a:xfrm>
           <a:prstGeom prst="rect">
@@ -1905,13 +1444,13 @@
       </p:pic>
       <p:sp>
         <p:nvSpPr>
-          <p:cNvPr id="20" name="Text 14"/>
-          <p:cNvSpPr/>
-          <p:nvPr/>
-        </p:nvSpPr>
-        <p:spPr>
-          <a:xfrm>
-            <a:off x="7507224" y="3611880"/>
+          <p:cNvPr id="12" name="Text 8"/>
+          <p:cNvSpPr/>
+          <p:nvPr/>
+        </p:nvSpPr>
+        <p:spPr>
+          <a:xfrm>
+            <a:off x="3355848" y="3611880"/>
             <a:ext cx="1051560" cy="731520"/>
           </a:xfrm>
           <a:prstGeom prst="rect">
@@ -1924,7 +1463,7 @@
           <a:bodyPr wrap="square" lIns="0" tIns="0" rIns="0" bIns="0" rtlCol="0" anchor="ctr"/>
           <a:lstStyle/>
           <a:p>
-            <a:pPr indent="0" marL="0">
+            <a:pPr marL="0" indent="0">
               <a:lnSpc>
                 <a:spcPct val="120000"/>
               </a:lnSpc>
@@ -1939,12 +1478,12 @@
                 <a:ea typeface="Calibri" pitchFamily="34" charset="-122"/>
                 <a:cs typeface="Calibri" pitchFamily="34" charset="-120"/>
               </a:rPr>
-              <a:t>const as</a:t>
+              <a:t>Compile-time</a:t>
             </a:r>
             <a:endParaRPr lang="en-US" sz="900" dirty="0"/>
           </a:p>
           <a:p>
-            <a:pPr indent="0" marL="0">
+            <a:pPr marL="0" indent="0">
               <a:lnSpc>
                 <a:spcPct val="120000"/>
               </a:lnSpc>
@@ -1959,6 +1498,286 @@
                 <a:ea typeface="Calibri" pitchFamily="34" charset="-122"/>
                 <a:cs typeface="Calibri" pitchFamily="34" charset="-120"/>
               </a:rPr>
+              <a:t>error detection</a:t>
+            </a:r>
+            <a:endParaRPr lang="en-US" sz="900" dirty="0"/>
+          </a:p>
+        </p:txBody>
+      </p:sp>
+      <p:sp>
+        <p:nvSpPr>
+          <p:cNvPr id="13" name="Shape 9"/>
+          <p:cNvSpPr/>
+          <p:nvPr/>
+        </p:nvSpPr>
+        <p:spPr>
+          <a:xfrm>
+            <a:off x="4791456" y="3474720"/>
+            <a:ext cx="1828800" cy="1005840"/>
+          </a:xfrm>
+          <a:prstGeom prst="rect">
+            <a:avLst/>
+          </a:prstGeom>
+          <a:solidFill>
+            <a:srgbClr val="22262E"/>
+          </a:solidFill>
+          <a:ln/>
+        </p:spPr>
+        <p:txBody>
+          <a:bodyPr/>
+          <a:lstStyle/>
+          <a:p>
+            <a:endParaRPr lang="en-US"/>
+          </a:p>
+        </p:txBody>
+      </p:sp>
+      <p:sp>
+        <p:nvSpPr>
+          <p:cNvPr id="14" name="Shape 10"/>
+          <p:cNvSpPr/>
+          <p:nvPr/>
+        </p:nvSpPr>
+        <p:spPr>
+          <a:xfrm>
+            <a:off x="4928616" y="3657600"/>
+            <a:ext cx="411480" cy="411480"/>
+          </a:xfrm>
+          <a:prstGeom prst="line">
+            <a:avLst/>
+          </a:prstGeom>
+          <a:solidFill>
+            <a:srgbClr val="333A48"/>
+          </a:solidFill>
+          <a:ln/>
+        </p:spPr>
+        <p:txBody>
+          <a:bodyPr/>
+          <a:lstStyle/>
+          <a:p>
+            <a:endParaRPr lang="en-US"/>
+          </a:p>
+        </p:txBody>
+      </p:sp>
+      <p:pic>
+        <p:nvPicPr>
+          <p:cNvPr id="15" name="Image 2" descr="preencoded.png"/>
+          <p:cNvPicPr>
+            <a:picLocks noChangeAspect="1"/>
+          </p:cNvPicPr>
+          <p:nvPr/>
+        </p:nvPicPr>
+        <p:blipFill>
+          <a:blip r:embed="rId5"/>
+          <a:stretch>
+            <a:fillRect/>
+          </a:stretch>
+        </p:blipFill>
+        <p:spPr>
+          <a:xfrm>
+            <a:off x="5010912" y="3739896"/>
+            <a:ext cx="246888" cy="246888"/>
+          </a:xfrm>
+          <a:prstGeom prst="rect">
+            <a:avLst/>
+          </a:prstGeom>
+        </p:spPr>
+      </p:pic>
+      <p:sp>
+        <p:nvSpPr>
+          <p:cNvPr id="16" name="Text 11"/>
+          <p:cNvSpPr/>
+          <p:nvPr/>
+        </p:nvSpPr>
+        <p:spPr>
+          <a:xfrm>
+            <a:off x="5431536" y="3611880"/>
+            <a:ext cx="1051560" cy="731520"/>
+          </a:xfrm>
+          <a:prstGeom prst="rect">
+            <a:avLst/>
+          </a:prstGeom>
+          <a:noFill/>
+          <a:ln/>
+        </p:spPr>
+        <p:txBody>
+          <a:bodyPr wrap="square" lIns="0" tIns="0" rIns="0" bIns="0" rtlCol="0" anchor="ctr"/>
+          <a:lstStyle/>
+          <a:p>
+            <a:pPr marL="0" indent="0">
+              <a:lnSpc>
+                <a:spcPct val="120000"/>
+              </a:lnSpc>
+              <a:buNone/>
+            </a:pPr>
+            <a:r>
+              <a:rPr lang="en-US" sz="900" dirty="0">
+                <a:solidFill>
+                  <a:srgbClr val="94A3B8"/>
+                </a:solidFill>
+                <a:latin typeface="Calibri" pitchFamily="34" charset="0"/>
+                <a:ea typeface="Calibri" pitchFamily="34" charset="-122"/>
+                <a:cs typeface="Calibri" pitchFamily="34" charset="-120"/>
+              </a:rPr>
+              <a:t>Encode semantics</a:t>
+            </a:r>
+            <a:endParaRPr lang="en-US" sz="900" dirty="0"/>
+          </a:p>
+          <a:p>
+            <a:pPr marL="0" indent="0">
+              <a:lnSpc>
+                <a:spcPct val="120000"/>
+              </a:lnSpc>
+              <a:buNone/>
+            </a:pPr>
+            <a:r>
+              <a:rPr lang="en-US" sz="900" dirty="0">
+                <a:solidFill>
+                  <a:srgbClr val="94A3B8"/>
+                </a:solidFill>
+                <a:latin typeface="Calibri" pitchFamily="34" charset="0"/>
+                <a:ea typeface="Calibri" pitchFamily="34" charset="-122"/>
+                <a:cs typeface="Calibri" pitchFamily="34" charset="-120"/>
+              </a:rPr>
+              <a:t>in types</a:t>
+            </a:r>
+            <a:endParaRPr lang="en-US" sz="900" dirty="0"/>
+          </a:p>
+        </p:txBody>
+      </p:sp>
+      <p:sp>
+        <p:nvSpPr>
+          <p:cNvPr id="17" name="Shape 12"/>
+          <p:cNvSpPr/>
+          <p:nvPr/>
+        </p:nvSpPr>
+        <p:spPr>
+          <a:xfrm>
+            <a:off x="6867144" y="3474720"/>
+            <a:ext cx="1828800" cy="1005840"/>
+          </a:xfrm>
+          <a:prstGeom prst="rect">
+            <a:avLst/>
+          </a:prstGeom>
+          <a:solidFill>
+            <a:srgbClr val="22262E"/>
+          </a:solidFill>
+          <a:ln/>
+        </p:spPr>
+        <p:txBody>
+          <a:bodyPr/>
+          <a:lstStyle/>
+          <a:p>
+            <a:endParaRPr lang="en-US"/>
+          </a:p>
+        </p:txBody>
+      </p:sp>
+      <p:sp>
+        <p:nvSpPr>
+          <p:cNvPr id="18" name="Shape 13"/>
+          <p:cNvSpPr/>
+          <p:nvPr/>
+        </p:nvSpPr>
+        <p:spPr>
+          <a:xfrm>
+            <a:off x="7004304" y="3657600"/>
+            <a:ext cx="411480" cy="411480"/>
+          </a:xfrm>
+          <a:prstGeom prst="line">
+            <a:avLst/>
+          </a:prstGeom>
+          <a:solidFill>
+            <a:srgbClr val="333A48"/>
+          </a:solidFill>
+          <a:ln/>
+        </p:spPr>
+        <p:txBody>
+          <a:bodyPr/>
+          <a:lstStyle/>
+          <a:p>
+            <a:endParaRPr lang="en-US"/>
+          </a:p>
+        </p:txBody>
+      </p:sp>
+      <p:pic>
+        <p:nvPicPr>
+          <p:cNvPr id="19" name="Image 3" descr="preencoded.png"/>
+          <p:cNvPicPr>
+            <a:picLocks noChangeAspect="1"/>
+          </p:cNvPicPr>
+          <p:nvPr/>
+        </p:nvPicPr>
+        <p:blipFill>
+          <a:blip r:embed="rId6"/>
+          <a:stretch>
+            <a:fillRect/>
+          </a:stretch>
+        </p:blipFill>
+        <p:spPr>
+          <a:xfrm>
+            <a:off x="7086600" y="3739896"/>
+            <a:ext cx="246888" cy="246888"/>
+          </a:xfrm>
+          <a:prstGeom prst="rect">
+            <a:avLst/>
+          </a:prstGeom>
+        </p:spPr>
+      </p:pic>
+      <p:sp>
+        <p:nvSpPr>
+          <p:cNvPr id="20" name="Text 14"/>
+          <p:cNvSpPr/>
+          <p:nvPr/>
+        </p:nvSpPr>
+        <p:spPr>
+          <a:xfrm>
+            <a:off x="7507224" y="3611880"/>
+            <a:ext cx="1051560" cy="731520"/>
+          </a:xfrm>
+          <a:prstGeom prst="rect">
+            <a:avLst/>
+          </a:prstGeom>
+          <a:noFill/>
+          <a:ln/>
+        </p:spPr>
+        <p:txBody>
+          <a:bodyPr wrap="square" lIns="0" tIns="0" rIns="0" bIns="0" rtlCol="0" anchor="ctr"/>
+          <a:lstStyle/>
+          <a:p>
+            <a:pPr marL="0" indent="0">
+              <a:lnSpc>
+                <a:spcPct val="120000"/>
+              </a:lnSpc>
+              <a:buNone/>
+            </a:pPr>
+            <a:r>
+              <a:rPr lang="en-US" sz="900" dirty="0">
+                <a:solidFill>
+                  <a:srgbClr val="94A3B8"/>
+                </a:solidFill>
+                <a:latin typeface="Calibri" pitchFamily="34" charset="0"/>
+                <a:ea typeface="Calibri" pitchFamily="34" charset="-122"/>
+                <a:cs typeface="Calibri" pitchFamily="34" charset="-120"/>
+              </a:rPr>
+              <a:t>const as</a:t>
+            </a:r>
+            <a:endParaRPr lang="en-US" sz="900" dirty="0"/>
+          </a:p>
+          <a:p>
+            <a:pPr marL="0" indent="0">
+              <a:lnSpc>
+                <a:spcPct val="120000"/>
+              </a:lnSpc>
+              <a:buNone/>
+            </a:pPr>
+            <a:r>
+              <a:rPr lang="en-US" sz="900" dirty="0">
+                <a:solidFill>
+                  <a:srgbClr val="94A3B8"/>
+                </a:solidFill>
+                <a:latin typeface="Calibri" pitchFamily="34" charset="0"/>
+                <a:ea typeface="Calibri" pitchFamily="34" charset="-122"/>
+                <a:cs typeface="Calibri" pitchFamily="34" charset="-120"/>
+              </a:rPr>
               <a:t>read-only contract</a:t>
             </a:r>
             <a:endParaRPr lang="en-US" sz="900" dirty="0"/>
@@ -1986,7 +1805,7 @@
           <a:bodyPr wrap="square" rtlCol="0" anchor="ctr"/>
           <a:lstStyle/>
           <a:p>
-            <a:pPr algn="r" indent="0" marL="0">
+            <a:pPr marL="0" indent="0" algn="r">
               <a:buNone/>
             </a:pPr>
             <a:r>
@@ -2020,6 +1839,7 @@
         <a:solidFill>
           <a:srgbClr val="1A1D23"/>
         </a:solidFill>
+        <a:effectLst/>
       </p:bgPr>
     </p:bg>
     <p:spTree>
@@ -2057,7 +1877,7 @@
           <a:bodyPr wrap="square" lIns="0" tIns="0" rIns="0" bIns="0" rtlCol="0" anchor="ctr"/>
           <a:lstStyle/>
           <a:p>
-            <a:pPr indent="0" marL="0">
+            <a:pPr marL="0" indent="0">
               <a:buNone/>
             </a:pPr>
             <a:r>
@@ -2096,7 +1916,7 @@
           <a:bodyPr wrap="square" lIns="0" tIns="0" rIns="0" bIns="0" rtlCol="0" anchor="ctr"/>
           <a:lstStyle/>
           <a:p>
-            <a:pPr indent="0" marL="0">
+            <a:pPr marL="0" indent="0">
               <a:buNone/>
             </a:pPr>
             <a:r>
@@ -2135,7 +1955,7 @@
           <a:bodyPr wrap="square" lIns="0" tIns="0" rIns="0" bIns="0" rtlCol="0" anchor="t"/>
           <a:lstStyle/>
           <a:p>
-            <a:pPr indent="0" marL="0">
+            <a:pPr marL="0" indent="0">
               <a:buNone/>
             </a:pPr>
             <a:r>
@@ -2152,13 +1972,13 @@
             <a:endParaRPr lang="en-US" sz="1400" dirty="0"/>
           </a:p>
           <a:p>
-            <a:pPr indent="0" marL="0">
+            <a:pPr marL="0" indent="0">
               <a:buNone/>
             </a:pPr>
             <a:endParaRPr lang="en-US" sz="1400" dirty="0"/>
           </a:p>
           <a:p>
-            <a:pPr indent="0" marL="0">
+            <a:pPr marL="0" indent="0">
               <a:buNone/>
             </a:pPr>
             <a:r>
@@ -2175,13 +1995,13 @@
             <a:endParaRPr lang="en-US" sz="1400" dirty="0"/>
           </a:p>
           <a:p>
-            <a:pPr indent="0" marL="0">
+            <a:pPr marL="0" indent="0">
               <a:buNone/>
             </a:pPr>
             <a:endParaRPr lang="en-US" sz="1400" dirty="0"/>
           </a:p>
           <a:p>
-            <a:pPr indent="0" marL="0">
+            <a:pPr marL="0" indent="0">
               <a:buNone/>
             </a:pPr>
             <a:r>
@@ -2198,13 +2018,13 @@
             <a:endParaRPr lang="en-US" sz="1400" dirty="0"/>
           </a:p>
           <a:p>
-            <a:pPr indent="0" marL="0">
+            <a:pPr marL="0" indent="0">
               <a:buNone/>
             </a:pPr>
             <a:endParaRPr lang="en-US" sz="1400" dirty="0"/>
           </a:p>
           <a:p>
-            <a:pPr indent="0" marL="0">
+            <a:pPr marL="0" indent="0">
               <a:buNone/>
             </a:pPr>
             <a:r>
@@ -2241,6 +2061,13 @@
           </a:solidFill>
           <a:ln/>
         </p:spPr>
+        <p:txBody>
+          <a:bodyPr/>
+          <a:lstStyle/>
+          <a:p>
+            <a:endParaRPr lang="en-US"/>
+          </a:p>
+        </p:txBody>
       </p:sp>
       <p:sp>
         <p:nvSpPr>
@@ -2263,7 +2090,7 @@
           <a:bodyPr wrap="square" lIns="0" tIns="0" rIns="0" bIns="0" rtlCol="0" anchor="ctr"/>
           <a:lstStyle/>
           <a:p>
-            <a:pPr indent="0" marL="0">
+            <a:pPr marL="0" indent="0">
               <a:buNone/>
             </a:pPr>
             <a:r>
@@ -2275,34 +2102,17 @@
                 <a:ea typeface="Calibri" pitchFamily="34" charset="-122"/>
                 <a:cs typeface="Calibri" pitchFamily="34" charset="-120"/>
               </a:rPr>
-              <a:t xml:space="preserve">No runtime cost. </a:t>
-            </a:r>
-            <a:pPr indent="0" marL="0">
-              <a:buNone/>
-            </a:pPr>
-            <a:r>
-              <a:rPr lang="en-US" sz="1100" b="1" dirty="0">
-                <a:solidFill>
-                  <a:srgbClr val="34D399"/>
+              <a:t>No runtime cost. No discipline required. </a:t>
+            </a:r>
+            <a:r>
+              <a:rPr lang="en-US" sz="1100" dirty="0">
+                <a:solidFill>
+                  <a:srgbClr val="94A3B8"/>
                 </a:solidFill>
                 <a:latin typeface="Calibri" pitchFamily="34" charset="0"/>
                 <a:ea typeface="Calibri" pitchFamily="34" charset="-122"/>
                 <a:cs typeface="Calibri" pitchFamily="34" charset="-120"/>
               </a:rPr>
-              <a:t xml:space="preserve">No discipline required. </a:t>
-            </a:r>
-            <a:pPr indent="0" marL="0">
-              <a:buNone/>
-            </a:pPr>
-            <a:r>
-              <a:rPr lang="en-US" sz="1100" dirty="0">
-                <a:solidFill>
-                  <a:srgbClr val="94A3B8"/>
-                </a:solidFill>
-                <a:latin typeface="Calibri" pitchFamily="34" charset="0"/>
-                <a:ea typeface="Calibri" pitchFamily="34" charset="-122"/>
-                <a:cs typeface="Calibri" pitchFamily="34" charset="-120"/>
-              </a:rPr>
               <a:t>The compiler does the work.</a:t>
             </a:r>
             <a:endParaRPr lang="en-US" sz="1100" dirty="0"/>
@@ -2330,7 +2140,7 @@
           <a:bodyPr wrap="square" rtlCol="0" anchor="ctr"/>
           <a:lstStyle/>
           <a:p>
-            <a:pPr algn="r" indent="0" marL="0">
+            <a:pPr marL="0" indent="0" algn="r">
               <a:buNone/>
             </a:pPr>
             <a:r>
@@ -2364,6 +2174,7 @@
         <a:solidFill>
           <a:srgbClr val="1A1D23"/>
         </a:solidFill>
+        <a:effectLst/>
       </p:bgPr>
     </p:bg>
     <p:spTree>
@@ -2401,7 +2212,7 @@
           <a:bodyPr wrap="square" lIns="0" tIns="0" rIns="0" bIns="0" rtlCol="0" anchor="ctr"/>
           <a:lstStyle/>
           <a:p>
-            <a:pPr indent="0" marL="0">
+            <a:pPr marL="0" indent="0">
               <a:buNone/>
             </a:pPr>
             <a:r>
@@ -2440,7 +2251,7 @@
           <a:bodyPr wrap="square" lIns="0" tIns="0" rIns="0" bIns="0" rtlCol="0" anchor="ctr"/>
           <a:lstStyle/>
           <a:p>
-            <a:pPr indent="0" marL="0">
+            <a:pPr marL="0" indent="0">
               <a:buNone/>
             </a:pPr>
             <a:r>
@@ -2477,6 +2288,13 @@
           </a:solidFill>
           <a:ln/>
         </p:spPr>
+        <p:txBody>
+          <a:bodyPr/>
+          <a:lstStyle/>
+          <a:p>
+            <a:endParaRPr lang="en-US"/>
+          </a:p>
+        </p:txBody>
       </p:sp>
       <p:sp>
         <p:nvSpPr>
@@ -2499,7 +2317,7 @@
           <a:bodyPr wrap="square" lIns="0" tIns="0" rIns="0" bIns="0" rtlCol="0" anchor="t"/>
           <a:lstStyle/>
           <a:p>
-            <a:pPr indent="0" marL="0">
+            <a:pPr marL="0" indent="0">
               <a:spcAft>
                 <a:spcPts val="200"/>
               </a:spcAft>
@@ -2519,7 +2337,7 @@
             <a:endParaRPr lang="en-US" sz="1000" dirty="0"/>
           </a:p>
           <a:p>
-            <a:pPr indent="0" marL="0">
+            <a:pPr marL="0" indent="0">
               <a:spcAft>
                 <a:spcPts val="200"/>
               </a:spcAft>
@@ -2559,6 +2377,13 @@
           </a:solidFill>
           <a:ln/>
         </p:spPr>
+        <p:txBody>
+          <a:bodyPr/>
+          <a:lstStyle/>
+          <a:p>
+            <a:endParaRPr lang="en-US"/>
+          </a:p>
+        </p:txBody>
       </p:sp>
       <p:sp>
         <p:nvSpPr>
@@ -2581,7 +2406,7 @@
           <a:bodyPr wrap="square" lIns="0" tIns="0" rIns="0" bIns="0" rtlCol="0" anchor="t"/>
           <a:lstStyle/>
           <a:p>
-            <a:pPr indent="0" marL="0">
+            <a:pPr marL="0" indent="0">
               <a:spcAft>
                 <a:spcPts val="200"/>
               </a:spcAft>
@@ -2601,7 +2426,7 @@
             <a:endParaRPr lang="en-US" sz="1000" dirty="0"/>
           </a:p>
           <a:p>
-            <a:pPr indent="0" marL="0">
+            <a:pPr marL="0" indent="0">
               <a:spcAft>
                 <a:spcPts val="200"/>
               </a:spcAft>
@@ -2643,7 +2468,7 @@
           <a:bodyPr wrap="square" lIns="0" tIns="0" rIns="0" bIns="0" rtlCol="0" anchor="ctr"/>
           <a:lstStyle/>
           <a:p>
-            <a:pPr indent="0" marL="0">
+            <a:pPr marL="0" indent="0">
               <a:buNone/>
             </a:pPr>
             <a:r>
@@ -2682,7 +2507,7 @@
           <a:bodyPr wrap="square" lIns="0" tIns="0" rIns="0" bIns="0" rtlCol="0" anchor="ctr"/>
           <a:lstStyle/>
           <a:p>
-            <a:pPr indent="0" marL="0">
+            <a:pPr marL="0" indent="0">
               <a:buNone/>
             </a:pPr>
             <a:r>
@@ -2721,7 +2546,7 @@
           <a:bodyPr wrap="square" lIns="0" tIns="0" rIns="0" bIns="0" rtlCol="0" anchor="ctr"/>
           <a:lstStyle/>
           <a:p>
-            <a:pPr indent="0" marL="0">
+            <a:pPr marL="0" indent="0">
               <a:buNone/>
             </a:pPr>
             <a:r>
@@ -2733,12 +2558,12 @@
                 <a:ea typeface="Calibri" pitchFamily="34" charset="-122"/>
                 <a:cs typeface="Calibri" pitchFamily="34" charset="-120"/>
               </a:rPr>
-              <a:t xml:space="preserve">The type system is a constraint checker. </a:t>
+              <a:t>The type system is a constraint checker. </a:t>
             </a:r>
             <a:endParaRPr lang="en-US" sz="1300" dirty="0"/>
           </a:p>
           <a:p>
-            <a:pPr indent="0" marL="0">
+            <a:pPr marL="0" indent="0">
               <a:buNone/>
             </a:pPr>
             <a:r>
@@ -2775,6 +2600,13 @@
           </a:solidFill>
           <a:ln/>
         </p:spPr>
+        <p:txBody>
+          <a:bodyPr/>
+          <a:lstStyle/>
+          <a:p>
+            <a:endParaRPr lang="en-US"/>
+          </a:p>
+        </p:txBody>
       </p:sp>
       <p:sp>
         <p:nvSpPr>
@@ -2797,7 +2629,7 @@
           <a:bodyPr wrap="square" lIns="0" tIns="0" rIns="0" bIns="0" rtlCol="0" anchor="ctr"/>
           <a:lstStyle/>
           <a:p>
-            <a:pPr indent="0" marL="0">
+            <a:pPr marL="0" indent="0">
               <a:buNone/>
             </a:pPr>
             <a:r>
@@ -2809,11 +2641,8 @@
                 <a:ea typeface="Calibri" pitchFamily="34" charset="-122"/>
                 <a:cs typeface="Calibri" pitchFamily="34" charset="-120"/>
               </a:rPr>
-              <a:t xml:space="preserve">const </a:t>
-            </a:r>
-            <a:pPr indent="0" marL="0">
-              <a:buNone/>
-            </a:pPr>
+              <a:t>const </a:t>
+            </a:r>
             <a:r>
               <a:rPr lang="en-US" sz="1200" dirty="0">
                 <a:solidFill>
@@ -2848,6 +2677,13 @@
           </a:solidFill>
           <a:ln/>
         </p:spPr>
+        <p:txBody>
+          <a:bodyPr/>
+          <a:lstStyle/>
+          <a:p>
+            <a:endParaRPr lang="en-US"/>
+          </a:p>
+        </p:txBody>
       </p:sp>
       <p:sp>
         <p:nvSpPr>
@@ -2870,7 +2706,7 @@
           <a:bodyPr wrap="square" lIns="0" tIns="0" rIns="0" bIns="0" rtlCol="0" anchor="t"/>
           <a:lstStyle/>
           <a:p>
-            <a:pPr indent="0" marL="0">
+            <a:pPr marL="0" indent="0">
               <a:spcAft>
                 <a:spcPts val="200"/>
               </a:spcAft>
@@ -2890,7 +2726,7 @@
             <a:endParaRPr lang="en-US" sz="900" dirty="0"/>
           </a:p>
           <a:p>
-            <a:pPr indent="0" marL="0">
+            <a:pPr marL="0" indent="0">
               <a:spcAft>
                 <a:spcPts val="200"/>
               </a:spcAft>
@@ -2905,12 +2741,12 @@
                 <a:ea typeface="Consolas" pitchFamily="34" charset="-122"/>
                 <a:cs typeface="Consolas" pitchFamily="34" charset="-120"/>
               </a:rPr>
-              <a:t xml:space="preserve">    for (auto&amp; r : records) {</a:t>
+              <a:t>    for (auto&amp; r : records) {</a:t>
             </a:r>
             <a:endParaRPr lang="en-US" sz="900" dirty="0"/>
           </a:p>
           <a:p>
-            <a:pPr indent="0" marL="0">
+            <a:pPr marL="0" indent="0">
               <a:spcAft>
                 <a:spcPts val="200"/>
               </a:spcAft>
@@ -2925,12 +2761,12 @@
                 <a:ea typeface="Consolas" pitchFamily="34" charset="-122"/>
                 <a:cs typeface="Consolas" pitchFamily="34" charset="-120"/>
               </a:rPr>
-              <a:t xml:space="preserve">        std::transform(...);   // COMPILE ERROR — mutation rejected</a:t>
+              <a:t>        std::transform(...);   // COMPILE ERROR — mutation rejected</a:t>
             </a:r>
             <a:endParaRPr lang="en-US" sz="900" dirty="0"/>
           </a:p>
           <a:p>
-            <a:pPr indent="0" marL="0">
+            <a:pPr marL="0" indent="0">
               <a:spcAft>
                 <a:spcPts val="200"/>
               </a:spcAft>
@@ -2945,12 +2781,12 @@
                 <a:ea typeface="Consolas" pitchFamily="34" charset="-122"/>
                 <a:cs typeface="Consolas" pitchFamily="34" charset="-120"/>
               </a:rPr>
-              <a:t xml:space="preserve">    }</a:t>
+              <a:t>    }</a:t>
             </a:r>
             <a:endParaRPr lang="en-US" sz="900" dirty="0"/>
           </a:p>
           <a:p>
-            <a:pPr indent="0" marL="0">
+            <a:pPr marL="0" indent="0">
               <a:spcAft>
                 <a:spcPts val="200"/>
               </a:spcAft>
@@ -2992,7 +2828,7 @@
           <a:bodyPr wrap="square" rtlCol="0" anchor="ctr"/>
           <a:lstStyle/>
           <a:p>
-            <a:pPr algn="r" indent="0" marL="0">
+            <a:pPr marL="0" indent="0" algn="r">
               <a:buNone/>
             </a:pPr>
             <a:r>
@@ -3026,6 +2862,7 @@
         <a:solidFill>
           <a:srgbClr val="1A1D23"/>
         </a:solidFill>
+        <a:effectLst/>
       </p:bgPr>
     </p:bg>
     <p:spTree>
@@ -3044,7 +2881,7 @@
       </p:grpSpPr>
       <p:sp>
         <p:nvSpPr>
-          <p:cNvPr id="2" name="Text 0"/>
+          <p:cNvPr id="2" name="Title"/>
           <p:cNvSpPr/>
           <p:nvPr/>
         </p:nvSpPr>
@@ -3063,7 +2900,7 @@
           <a:bodyPr wrap="square" lIns="0" tIns="0" rIns="0" bIns="0" rtlCol="0" anchor="ctr"/>
           <a:lstStyle/>
           <a:p>
-            <a:pPr indent="0" marL="0">
+            <a:pPr marL="0" indent="0">
               <a:buNone/>
             </a:pPr>
             <a:r>
@@ -3075,7 +2912,7 @@
                 <a:ea typeface="Trebuchet MS" pitchFamily="34" charset="-122"/>
                 <a:cs typeface="Trebuchet MS" pitchFamily="34" charset="-120"/>
               </a:rPr>
-              <a:t>ENCODING OUR CONSTRAINTS</a:t>
+              <a:t>CONST CHOOSES BEHAVIOR</a:t>
             </a:r>
             <a:endParaRPr lang="en-US" sz="2800" dirty="0"/>
           </a:p>
@@ -3083,7 +2920,7 @@
       </p:sp>
       <p:sp>
         <p:nvSpPr>
-          <p:cNvPr id="3" name="Text 1"/>
+          <p:cNvPr id="3" name="Subtitle"/>
           <p:cNvSpPr/>
           <p:nvPr/>
         </p:nvSpPr>
@@ -3102,7 +2939,7 @@
           <a:bodyPr wrap="square" lIns="0" tIns="0" rIns="0" bIns="0" rtlCol="0" anchor="ctr"/>
           <a:lstStyle/>
           <a:p>
-            <a:pPr indent="0" marL="0">
+            <a:pPr marL="0" indent="0">
               <a:buNone/>
             </a:pPr>
             <a:r>
@@ -3114,7 +2951,7 @@
                 <a:ea typeface="Calibri" pitchFamily="34" charset="-122"/>
                 <a:cs typeface="Calibri" pitchFamily="34" charset="-120"/>
               </a:rPr>
-              <a:t>Same type, different meaning → Different types, compiler enforces</a:t>
+              <a:t>The type system doesn’t just block writes — it selects different code paths</a:t>
             </a:r>
             <a:endParaRPr lang="en-US" sz="1200" dirty="0"/>
           </a:p>
@@ -3122,14 +2959,139 @@
       </p:sp>
       <p:sp>
         <p:nvSpPr>
-          <p:cNvPr id="4" name="Text 2"/>
-          <p:cNvSpPr/>
-          <p:nvPr/>
-        </p:nvSpPr>
-        <p:spPr>
-          <a:xfrm>
-            <a:off x="640080" y="1097280"/>
-            <a:ext cx="3657600" cy="274320"/>
+          <p:cNvPr id="4" name="CodeBg"/>
+          <p:cNvSpPr/>
+          <p:nvPr/>
+        </p:nvSpPr>
+        <p:spPr>
+          <a:xfrm>
+            <a:off x="502920" y="1188720"/>
+            <a:ext cx="8138160" cy="1143000"/>
+          </a:xfrm>
+          <a:prstGeom prst="rect">
+            <a:avLst/>
+          </a:prstGeom>
+          <a:solidFill>
+            <a:srgbClr val="181B20"/>
+          </a:solidFill>
+          <a:ln/>
+        </p:spPr>
+        <p:txBody>
+          <a:bodyPr/>
+          <a:lstStyle/>
+          <a:p>
+            <a:endParaRPr lang="en-US"/>
+          </a:p>
+        </p:txBody>
+      </p:sp>
+      <p:sp>
+        <p:nvSpPr>
+          <p:cNvPr id="5" name="MatrixCode"/>
+          <p:cNvSpPr/>
+          <p:nvPr/>
+        </p:nvSpPr>
+        <p:spPr>
+          <a:xfrm>
+            <a:off x="640080" y="1280160"/>
+            <a:ext cx="7863840" cy="960120"/>
+          </a:xfrm>
+          <a:prstGeom prst="rect">
+            <a:avLst/>
+          </a:prstGeom>
+          <a:noFill/>
+          <a:ln/>
+        </p:spPr>
+        <p:txBody>
+          <a:bodyPr wrap="square" lIns="0" tIns="0" rIns="0" bIns="0" rtlCol="0" anchor="t"/>
+          <a:lstStyle/>
+          <a:p>
+            <a:pPr marL="0" indent="0">
+              <a:spcAft>
+                <a:spcPts val="200"/>
+              </a:spcAft>
+              <a:buNone/>
+            </a:pPr>
+            <a:r>
+              <a:rPr lang="en-US" sz="950" dirty="0">
+                <a:solidFill>
+                  <a:srgbClr val="D4D4D4"/>
+                </a:solidFill>
+                <a:latin typeface="Consolas" pitchFamily="34" charset="0"/>
+                <a:ea typeface="Consolas" pitchFamily="34" charset="-122"/>
+                <a:cs typeface="Consolas" pitchFamily="34" charset="-120"/>
+              </a:rPr>
+              <a:t>class Matrix {</a:t>
+            </a:r>
+          </a:p>
+          <a:p>
+            <a:pPr marL="0" indent="0">
+              <a:spcAft>
+                <a:spcPts val="200"/>
+              </a:spcAft>
+              <a:buNone/>
+            </a:pPr>
+            <a:r>
+              <a:rPr lang="en-US" sz="950" dirty="0">
+                <a:solidFill>
+                  <a:srgbClr val="D4D4D4"/>
+                </a:solidFill>
+                <a:latin typeface="Consolas" pitchFamily="34" charset="0"/>
+                <a:ea typeface="Consolas" pitchFamily="34" charset="-122"/>
+                <a:cs typeface="Consolas" pitchFamily="34" charset="-120"/>
+              </a:rPr>
+              <a:t>    double&amp;       operator()(int r, int c);        // called on Matrix&amp;</a:t>
+            </a:r>
+          </a:p>
+          <a:p>
+            <a:pPr marL="0" indent="0">
+              <a:spcAft>
+                <a:spcPts val="200"/>
+              </a:spcAft>
+              <a:buNone/>
+            </a:pPr>
+            <a:r>
+              <a:rPr lang="en-US" sz="950" dirty="0">
+                <a:solidFill>
+                  <a:srgbClr val="D4D4D4"/>
+                </a:solidFill>
+                <a:latin typeface="Consolas" pitchFamily="34" charset="0"/>
+                <a:ea typeface="Consolas" pitchFamily="34" charset="-122"/>
+                <a:cs typeface="Consolas" pitchFamily="34" charset="-120"/>
+              </a:rPr>
+              <a:t>    const double&amp; operator()(int r, int c) const; // called on const Matrix&amp;</a:t>
+            </a:r>
+          </a:p>
+          <a:p>
+            <a:pPr marL="0" indent="0">
+              <a:spcAft>
+                <a:spcPts val="200"/>
+              </a:spcAft>
+              <a:buNone/>
+            </a:pPr>
+            <a:r>
+              <a:rPr lang="en-US" sz="950" dirty="0">
+                <a:solidFill>
+                  <a:srgbClr val="D4D4D4"/>
+                </a:solidFill>
+                <a:latin typeface="Consolas" pitchFamily="34" charset="0"/>
+                <a:ea typeface="Consolas" pitchFamily="34" charset="-122"/>
+                <a:cs typeface="Consolas" pitchFamily="34" charset="-120"/>
+              </a:rPr>
+              <a:t>};</a:t>
+            </a:r>
+          </a:p>
+        </p:txBody>
+      </p:sp>
+      <p:sp>
+        <p:nvSpPr>
+          <p:cNvPr id="6" name="Explanation"/>
+          <p:cNvSpPr/>
+          <p:nvPr/>
+        </p:nvSpPr>
+        <p:spPr>
+          <a:xfrm>
+            <a:off x="502920" y="2468880"/>
+            <a:ext cx="8138160" cy="320040"/>
           </a:xfrm>
           <a:prstGeom prst="rect">
             <a:avLst/>
@@ -3141,73 +3103,34 @@
           <a:bodyPr wrap="square" lIns="0" tIns="0" rIns="0" bIns="0" rtlCol="0" anchor="ctr"/>
           <a:lstStyle/>
           <a:p>
-            <a:pPr indent="0" marL="0">
-              <a:buNone/>
-            </a:pPr>
-            <a:r>
-              <a:rPr lang="en-US" sz="1100" b="1" dirty="0">
-                <a:solidFill>
-                  <a:srgbClr val="EF4444"/>
-                </a:solidFill>
-                <a:latin typeface="Trebuchet MS" pitchFamily="34" charset="0"/>
-                <a:ea typeface="Trebuchet MS" pitchFamily="34" charset="-122"/>
-                <a:cs typeface="Trebuchet MS" pitchFamily="34" charset="-120"/>
-              </a:rPr>
-              <a:t>BEFORE</a:t>
-            </a:r>
-            <a:endParaRPr lang="en-US" sz="1100" dirty="0"/>
-          </a:p>
-        </p:txBody>
-      </p:sp>
-      <p:sp>
-        <p:nvSpPr>
-          <p:cNvPr id="5" name="Text 3"/>
-          <p:cNvSpPr/>
-          <p:nvPr/>
-        </p:nvSpPr>
-        <p:spPr>
-          <a:xfrm>
-            <a:off x="4754880" y="1097280"/>
-            <a:ext cx="3657600" cy="274320"/>
-          </a:xfrm>
-          <a:prstGeom prst="rect">
-            <a:avLst/>
-          </a:prstGeom>
-          <a:noFill/>
-          <a:ln/>
-        </p:spPr>
-        <p:txBody>
-          <a:bodyPr wrap="square" lIns="0" tIns="0" rIns="0" bIns="0" rtlCol="0" anchor="ctr"/>
-          <a:lstStyle/>
-          <a:p>
-            <a:pPr indent="0" marL="0">
-              <a:buNone/>
-            </a:pPr>
-            <a:r>
-              <a:rPr lang="en-US" sz="1100" b="1" dirty="0">
-                <a:solidFill>
-                  <a:srgbClr val="10B981"/>
-                </a:solidFill>
-                <a:latin typeface="Trebuchet MS" pitchFamily="34" charset="0"/>
-                <a:ea typeface="Trebuchet MS" pitchFamily="34" charset="-122"/>
-                <a:cs typeface="Trebuchet MS" pitchFamily="34" charset="-120"/>
-              </a:rPr>
-              <a:t>AFTER</a:t>
-            </a:r>
-            <a:endParaRPr lang="en-US" sz="1100" dirty="0"/>
-          </a:p>
-        </p:txBody>
-      </p:sp>
-      <p:sp>
-        <p:nvSpPr>
-          <p:cNvPr id="6" name="Shape 4"/>
-          <p:cNvSpPr/>
-          <p:nvPr/>
-        </p:nvSpPr>
-        <p:spPr>
-          <a:xfrm>
-            <a:off x="640080" y="1417320"/>
-            <a:ext cx="3840480" cy="1965960"/>
+            <a:pPr marL="0" indent="0">
+              <a:buNone/>
+            </a:pPr>
+            <a:r>
+              <a:rPr lang="en-US" sz="1300" b="1" dirty="0">
+                <a:solidFill>
+                  <a:srgbClr val="F1F5F9"/>
+                </a:solidFill>
+                <a:latin typeface="Calibri" pitchFamily="34" charset="0"/>
+                <a:ea typeface="Calibri" pitchFamily="34" charset="-122"/>
+                <a:cs typeface="Calibri" pitchFamily="34" charset="-120"/>
+              </a:rPr>
+              <a:t>Same name, same arguments. The compiler picks which one to call:</a:t>
+            </a:r>
+            <a:endParaRPr lang="en-US" sz="1300" dirty="0"/>
+          </a:p>
+        </p:txBody>
+      </p:sp>
+      <p:sp>
+        <p:nvSpPr>
+          <p:cNvPr id="7" name="LeftCallBg"/>
+          <p:cNvSpPr/>
+          <p:nvPr/>
+        </p:nvSpPr>
+        <p:spPr>
+          <a:xfrm>
+            <a:off x="502920" y="2834640"/>
+            <a:ext cx="3931920" cy="685800"/>
           </a:xfrm>
           <a:prstGeom prst="rect">
             <a:avLst/>
@@ -3217,17 +3140,24 @@
           </a:solidFill>
           <a:ln/>
         </p:spPr>
-      </p:sp>
-      <p:sp>
-        <p:nvSpPr>
-          <p:cNvPr id="7" name="Text 5"/>
-          <p:cNvSpPr/>
-          <p:nvPr/>
-        </p:nvSpPr>
-        <p:spPr>
-          <a:xfrm>
-            <a:off x="822960" y="1527048"/>
-            <a:ext cx="3474720" cy="1746504"/>
+        <p:txBody>
+          <a:bodyPr/>
+          <a:lstStyle/>
+          <a:p>
+            <a:endParaRPr lang="en-US"/>
+          </a:p>
+        </p:txBody>
+      </p:sp>
+      <p:sp>
+        <p:nvSpPr>
+          <p:cNvPr id="8" name="LeftCallCode"/>
+          <p:cNvSpPr/>
+          <p:nvPr/>
+        </p:nvSpPr>
+        <p:spPr>
+          <a:xfrm>
+            <a:off x="640080" y="2926080"/>
+            <a:ext cx="3657600" cy="502920"/>
           </a:xfrm>
           <a:prstGeom prst="rect">
             <a:avLst/>
@@ -3239,14 +3169,14 @@
           <a:bodyPr wrap="square" lIns="0" tIns="0" rIns="0" bIns="0" rtlCol="0" anchor="t"/>
           <a:lstStyle/>
           <a:p>
-            <a:pPr indent="0" marL="0">
+            <a:pPr marL="0" indent="0">
               <a:spcAft>
                 <a:spcPts val="200"/>
               </a:spcAft>
               <a:buNone/>
             </a:pPr>
             <a:r>
-              <a:rPr lang="en-US" sz="1000" dirty="0">
+              <a:rPr lang="en-US" sz="950" dirty="0">
                 <a:solidFill>
                   <a:srgbClr val="D4D4D4"/>
                 </a:solidFill>
@@ -3254,19 +3184,18 @@
                 <a:ea typeface="Consolas" pitchFamily="34" charset="-122"/>
                 <a:cs typeface="Consolas" pitchFamily="34" charset="-120"/>
               </a:rPr>
-              <a:t>int user_id = 42;</a:t>
-            </a:r>
-            <a:endParaRPr lang="en-US" sz="1000" dirty="0"/>
-          </a:p>
-          <a:p>
-            <a:pPr indent="0" marL="0">
+              <a:t>Matrix m(3, 3);</a:t>
+            </a:r>
+          </a:p>
+          <a:p>
+            <a:pPr marL="0" indent="0">
               <a:spcAft>
                 <a:spcPts val="200"/>
               </a:spcAft>
               <a:buNone/>
             </a:pPr>
             <a:r>
-              <a:rPr lang="en-US" sz="1000" dirty="0">
+              <a:rPr lang="en-US" sz="950" dirty="0">
                 <a:solidFill>
                   <a:srgbClr val="D4D4D4"/>
                 </a:solidFill>
@@ -3274,28 +3203,125 @@
                 <a:ea typeface="Consolas" pitchFamily="34" charset="-122"/>
                 <a:cs typeface="Consolas" pitchFamily="34" charset="-120"/>
               </a:rPr>
-              <a:t>int doc_id = 99;</a:t>
+              <a:t>m(0, 0) = 5.0;  // returns double&amp;</a:t>
+            </a:r>
+          </a:p>
+        </p:txBody>
+      </p:sp>
+      <p:sp>
+        <p:nvSpPr>
+          <p:cNvPr id="9" name="LeftAnnotation"/>
+          <p:cNvSpPr/>
+          <p:nvPr/>
+        </p:nvSpPr>
+        <p:spPr>
+          <a:xfrm>
+            <a:off x="502920" y="3566160"/>
+            <a:ext cx="3931920" cy="274320"/>
+          </a:xfrm>
+          <a:prstGeom prst="rect">
+            <a:avLst/>
+          </a:prstGeom>
+          <a:noFill/>
+          <a:ln/>
+        </p:spPr>
+        <p:txBody>
+          <a:bodyPr wrap="square" lIns="0" tIns="0" rIns="0" bIns="0" rtlCol="0" anchor="ctr"/>
+          <a:lstStyle/>
+          <a:p>
+            <a:pPr marL="0" indent="0">
+              <a:buNone/>
+            </a:pPr>
+            <a:r>
+              <a:rPr lang="en-US" sz="1000" i="1" dirty="0">
+                <a:solidFill>
+                  <a:srgbClr val="4ADE80"/>
+                </a:solidFill>
+                <a:latin typeface="Calibri" pitchFamily="34" charset="0"/>
+                <a:ea typeface="Calibri" pitchFamily="34" charset="-122"/>
+                <a:cs typeface="Calibri" pitchFamily="34" charset="-120"/>
+              </a:rPr>
+              <a:t>Mutable reference → can write</a:t>
             </a:r>
             <a:endParaRPr lang="en-US" sz="1000" dirty="0"/>
           </a:p>
-          <a:p>
-            <a:pPr indent="0" marL="0">
+        </p:txBody>
+      </p:sp>
+      <p:sp>
+        <p:nvSpPr>
+          <p:cNvPr id="10" name="RightCallBg"/>
+          <p:cNvSpPr/>
+          <p:nvPr/>
+        </p:nvSpPr>
+        <p:spPr>
+          <a:xfrm>
+            <a:off x="4709160" y="2834640"/>
+            <a:ext cx="3931920" cy="685800"/>
+          </a:xfrm>
+          <a:prstGeom prst="rect">
+            <a:avLst/>
+          </a:prstGeom>
+          <a:solidFill>
+            <a:srgbClr val="22262E"/>
+          </a:solidFill>
+          <a:ln/>
+        </p:spPr>
+        <p:txBody>
+          <a:bodyPr/>
+          <a:lstStyle/>
+          <a:p>
+            <a:endParaRPr lang="en-US"/>
+          </a:p>
+        </p:txBody>
+      </p:sp>
+      <p:sp>
+        <p:nvSpPr>
+          <p:cNvPr id="11" name="RightCallCode"/>
+          <p:cNvSpPr/>
+          <p:nvPr/>
+        </p:nvSpPr>
+        <p:spPr>
+          <a:xfrm>
+            <a:off x="4846320" y="2926080"/>
+            <a:ext cx="3657600" cy="502920"/>
+          </a:xfrm>
+          <a:prstGeom prst="rect">
+            <a:avLst/>
+          </a:prstGeom>
+          <a:noFill/>
+          <a:ln/>
+        </p:spPr>
+        <p:txBody>
+          <a:bodyPr wrap="square" lIns="0" tIns="0" rIns="0" bIns="0" rtlCol="0" anchor="t"/>
+          <a:lstStyle/>
+          <a:p>
+            <a:pPr marL="0" indent="0">
               <a:spcAft>
                 <a:spcPts val="200"/>
               </a:spcAft>
               <a:buNone/>
             </a:pPr>
-            <a:endParaRPr lang="en-US" sz="1000" dirty="0"/>
-          </a:p>
-          <a:p>
-            <a:pPr indent="0" marL="0">
+            <a:r>
+              <a:rPr lang="en-US" sz="950" dirty="0">
+                <a:solidFill>
+                  <a:srgbClr val="D4D4D4"/>
+                </a:solidFill>
+                <a:latin typeface="Consolas" pitchFamily="34" charset="0"/>
+                <a:ea typeface="Consolas" pitchFamily="34" charset="-122"/>
+                <a:cs typeface="Consolas" pitchFamily="34" charset="-120"/>
+              </a:rPr>
+              <a:t>const Matrix&amp; cm = m;</a:t>
+            </a:r>
+          </a:p>
+          <a:p>
+            <a:pPr marL="0" indent="0">
               <a:spcAft>
                 <a:spcPts val="200"/>
               </a:spcAft>
               <a:buNone/>
             </a:pPr>
             <a:r>
-              <a:rPr lang="en-US" sz="1000" dirty="0">
+              <a:rPr lang="en-US" sz="950" dirty="0">
                 <a:solidFill>
                   <a:srgbClr val="D4D4D4"/>
                 </a:solidFill>
@@ -3303,82 +3329,60 @@
                 <a:ea typeface="Consolas" pitchFamily="34" charset="-122"/>
                 <a:cs typeface="Consolas" pitchFamily="34" charset="-120"/>
               </a:rPr>
-              <a:t>// Compiler sees: int, int</a:t>
+              <a:t>double v = cm(0, 0); // returns const double&amp;</a:t>
+            </a:r>
+          </a:p>
+        </p:txBody>
+      </p:sp>
+      <p:sp>
+        <p:nvSpPr>
+          <p:cNvPr id="12" name="RightAnnotation"/>
+          <p:cNvSpPr/>
+          <p:nvPr/>
+        </p:nvSpPr>
+        <p:spPr>
+          <a:xfrm>
+            <a:off x="4709160" y="3566160"/>
+            <a:ext cx="3931920" cy="274320"/>
+          </a:xfrm>
+          <a:prstGeom prst="rect">
+            <a:avLst/>
+          </a:prstGeom>
+          <a:noFill/>
+          <a:ln/>
+        </p:spPr>
+        <p:txBody>
+          <a:bodyPr wrap="square" lIns="0" tIns="0" rIns="0" bIns="0" rtlCol="0" anchor="ctr"/>
+          <a:lstStyle/>
+          <a:p>
+            <a:pPr marL="0" indent="0">
+              <a:buNone/>
+            </a:pPr>
+            <a:r>
+              <a:rPr lang="en-US" sz="1000" i="1" dirty="0">
+                <a:solidFill>
+                  <a:srgbClr val="60A5FA"/>
+                </a:solidFill>
+                <a:latin typeface="Calibri" pitchFamily="34" charset="0"/>
+                <a:ea typeface="Calibri" pitchFamily="34" charset="-122"/>
+                <a:cs typeface="Calibri" pitchFamily="34" charset="-120"/>
+              </a:rPr>
+              <a:t>Read-only reference → can only read</a:t>
             </a:r>
             <a:endParaRPr lang="en-US" sz="1000" dirty="0"/>
           </a:p>
-          <a:p>
-            <a:pPr indent="0" marL="0">
-              <a:spcAft>
-                <a:spcPts val="200"/>
-              </a:spcAft>
-              <a:buNone/>
-            </a:pPr>
-            <a:r>
-              <a:rPr lang="en-US" sz="1000" dirty="0">
-                <a:solidFill>
-                  <a:srgbClr val="D4D4D4"/>
-                </a:solidFill>
-                <a:latin typeface="Consolas" pitchFamily="34" charset="0"/>
-                <a:ea typeface="Consolas" pitchFamily="34" charset="-122"/>
-                <a:cs typeface="Consolas" pitchFamily="34" charset="-120"/>
-              </a:rPr>
-              <a:t>// "Both are ints. Looks fine."</a:t>
-            </a:r>
-            <a:endParaRPr lang="en-US" sz="1000" dirty="0"/>
-          </a:p>
-          <a:p>
-            <a:pPr indent="0" marL="0">
-              <a:spcAft>
-                <a:spcPts val="200"/>
-              </a:spcAft>
-              <a:buNone/>
-            </a:pPr>
-            <a:r>
-              <a:rPr lang="en-US" sz="1000" dirty="0">
-                <a:solidFill>
-                  <a:srgbClr val="D4D4D4"/>
-                </a:solidFill>
-                <a:latin typeface="Consolas" pitchFamily="34" charset="0"/>
-                <a:ea typeface="Consolas" pitchFamily="34" charset="-122"/>
-                <a:cs typeface="Consolas" pitchFamily="34" charset="-120"/>
-              </a:rPr>
-              <a:t>grant_access(doc_id, user_id);</a:t>
-            </a:r>
-            <a:endParaRPr lang="en-US" sz="1000" dirty="0"/>
-          </a:p>
-          <a:p>
-            <a:pPr indent="0" marL="0">
-              <a:spcAft>
-                <a:spcPts val="200"/>
-              </a:spcAft>
-              <a:buNone/>
-            </a:pPr>
-            <a:r>
-              <a:rPr lang="en-US" sz="1000" dirty="0">
-                <a:solidFill>
-                  <a:srgbClr val="D4D4D4"/>
-                </a:solidFill>
-                <a:latin typeface="Consolas" pitchFamily="34" charset="0"/>
-                <a:ea typeface="Consolas" pitchFamily="34" charset="-122"/>
-                <a:cs typeface="Consolas" pitchFamily="34" charset="-120"/>
-              </a:rPr>
-              <a:t>// Oops — arguments swapped!</a:t>
-            </a:r>
-            <a:endParaRPr lang="en-US" sz="1000" dirty="0"/>
-          </a:p>
-        </p:txBody>
-      </p:sp>
-      <p:sp>
-        <p:nvSpPr>
-          <p:cNvPr id="8" name="Shape 6"/>
-          <p:cNvSpPr/>
-          <p:nvPr/>
-        </p:nvSpPr>
-        <p:spPr>
-          <a:xfrm>
-            <a:off x="4754880" y="1417320"/>
-            <a:ext cx="3749040" cy="1965960"/>
+        </p:txBody>
+      </p:sp>
+      <p:sp>
+        <p:nvSpPr>
+          <p:cNvPr id="13" name="CalloutBg"/>
+          <p:cNvSpPr/>
+          <p:nvPr/>
+        </p:nvSpPr>
+        <p:spPr>
+          <a:xfrm>
+            <a:off x="502920" y="3977640"/>
+            <a:ext cx="8138160" cy="640080"/>
           </a:xfrm>
           <a:prstGeom prst="rect">
             <a:avLst/>
@@ -3388,188 +3392,51 @@
           </a:solidFill>
           <a:ln/>
         </p:spPr>
-      </p:sp>
-      <p:sp>
-        <p:nvSpPr>
-          <p:cNvPr id="9" name="Text 7"/>
-          <p:cNvSpPr/>
-          <p:nvPr/>
-        </p:nvSpPr>
-        <p:spPr>
-          <a:xfrm>
-            <a:off x="4937760" y="1527048"/>
-            <a:ext cx="3383280" cy="1746504"/>
-          </a:xfrm>
-          <a:prstGeom prst="rect">
-            <a:avLst/>
-          </a:prstGeom>
-          <a:noFill/>
-          <a:ln/>
-        </p:spPr>
-        <p:txBody>
-          <a:bodyPr wrap="square" lIns="0" tIns="0" rIns="0" bIns="0" rtlCol="0" anchor="t"/>
-          <a:lstStyle/>
-          <a:p>
-            <a:pPr indent="0" marL="0">
-              <a:spcAft>
-                <a:spcPts val="200"/>
-              </a:spcAft>
-              <a:buNone/>
-            </a:pPr>
-            <a:r>
-              <a:rPr lang="en-US" sz="1000" dirty="0">
-                <a:solidFill>
-                  <a:srgbClr val="D4D4D4"/>
-                </a:solidFill>
-                <a:latin typeface="Consolas" pitchFamily="34" charset="0"/>
-                <a:ea typeface="Consolas" pitchFamily="34" charset="-122"/>
-                <a:cs typeface="Consolas" pitchFamily="34" charset="-120"/>
-              </a:rPr>
-              <a:t>UserId user_id{42};</a:t>
-            </a:r>
-            <a:endParaRPr lang="en-US" sz="1000" dirty="0"/>
-          </a:p>
-          <a:p>
-            <a:pPr indent="0" marL="0">
-              <a:spcAft>
-                <a:spcPts val="200"/>
-              </a:spcAft>
-              <a:buNone/>
-            </a:pPr>
-            <a:r>
-              <a:rPr lang="en-US" sz="1000" dirty="0">
-                <a:solidFill>
-                  <a:srgbClr val="D4D4D4"/>
-                </a:solidFill>
-                <a:latin typeface="Consolas" pitchFamily="34" charset="0"/>
-                <a:ea typeface="Consolas" pitchFamily="34" charset="-122"/>
-                <a:cs typeface="Consolas" pitchFamily="34" charset="-120"/>
-              </a:rPr>
-              <a:t>DocId doc_id{99};</a:t>
-            </a:r>
-            <a:endParaRPr lang="en-US" sz="1000" dirty="0"/>
-          </a:p>
-          <a:p>
-            <a:pPr indent="0" marL="0">
-              <a:spcAft>
-                <a:spcPts val="200"/>
-              </a:spcAft>
-              <a:buNone/>
-            </a:pPr>
-            <a:endParaRPr lang="en-US" sz="1000" dirty="0"/>
-          </a:p>
-          <a:p>
-            <a:pPr indent="0" marL="0">
-              <a:spcAft>
-                <a:spcPts val="200"/>
-              </a:spcAft>
-              <a:buNone/>
-            </a:pPr>
-            <a:r>
-              <a:rPr lang="en-US" sz="1000" dirty="0">
-                <a:solidFill>
-                  <a:srgbClr val="D4D4D4"/>
-                </a:solidFill>
-                <a:latin typeface="Consolas" pitchFamily="34" charset="0"/>
-                <a:ea typeface="Consolas" pitchFamily="34" charset="-122"/>
-                <a:cs typeface="Consolas" pitchFamily="34" charset="-120"/>
-              </a:rPr>
-              <a:t>// Compiler sees: UserId, DocId</a:t>
-            </a:r>
-            <a:endParaRPr lang="en-US" sz="1000" dirty="0"/>
-          </a:p>
-          <a:p>
-            <a:pPr indent="0" marL="0">
-              <a:spcAft>
-                <a:spcPts val="200"/>
-              </a:spcAft>
-              <a:buNone/>
-            </a:pPr>
-            <a:r>
-              <a:rPr lang="en-US" sz="1000" dirty="0">
-                <a:solidFill>
-                  <a:srgbClr val="D4D4D4"/>
-                </a:solidFill>
-                <a:latin typeface="Consolas" pitchFamily="34" charset="0"/>
-                <a:ea typeface="Consolas" pitchFamily="34" charset="-122"/>
-                <a:cs typeface="Consolas" pitchFamily="34" charset="-120"/>
-              </a:rPr>
-              <a:t>// "These are different types!"</a:t>
-            </a:r>
-            <a:endParaRPr lang="en-US" sz="1000" dirty="0"/>
-          </a:p>
-          <a:p>
-            <a:pPr indent="0" marL="0">
-              <a:spcAft>
-                <a:spcPts val="200"/>
-              </a:spcAft>
-              <a:buNone/>
-            </a:pPr>
-            <a:r>
-              <a:rPr lang="en-US" sz="1000" dirty="0">
-                <a:solidFill>
-                  <a:srgbClr val="D4D4D4"/>
-                </a:solidFill>
-                <a:latin typeface="Consolas" pitchFamily="34" charset="0"/>
-                <a:ea typeface="Consolas" pitchFamily="34" charset="-122"/>
-                <a:cs typeface="Consolas" pitchFamily="34" charset="-120"/>
-              </a:rPr>
-              <a:t>grant_access(doc_id, user_id);</a:t>
-            </a:r>
-            <a:endParaRPr lang="en-US" sz="1000" dirty="0"/>
-          </a:p>
-          <a:p>
-            <a:pPr indent="0" marL="0">
-              <a:spcAft>
-                <a:spcPts val="200"/>
-              </a:spcAft>
-              <a:buNone/>
-            </a:pPr>
-            <a:r>
-              <a:rPr lang="en-US" sz="1000" dirty="0">
-                <a:solidFill>
-                  <a:srgbClr val="D4D4D4"/>
-                </a:solidFill>
-                <a:latin typeface="Consolas" pitchFamily="34" charset="0"/>
-                <a:ea typeface="Consolas" pitchFamily="34" charset="-122"/>
-                <a:cs typeface="Consolas" pitchFamily="34" charset="-120"/>
-              </a:rPr>
-              <a:t>// COMPILE ERROR!</a:t>
-            </a:r>
-            <a:endParaRPr lang="en-US" sz="1000" dirty="0"/>
-          </a:p>
-        </p:txBody>
-      </p:sp>
-      <p:sp>
-        <p:nvSpPr>
-          <p:cNvPr id="10" name="Shape 8"/>
-          <p:cNvSpPr/>
-          <p:nvPr/>
-        </p:nvSpPr>
-        <p:spPr>
-          <a:xfrm>
-            <a:off x="640080" y="3611880"/>
-            <a:ext cx="7863840" cy="1188720"/>
+        <p:txBody>
+          <a:bodyPr/>
+          <a:lstStyle/>
+          <a:p>
+            <a:endParaRPr lang="en-US"/>
+          </a:p>
+        </p:txBody>
+      </p:sp>
+      <p:sp>
+        <p:nvSpPr>
+          <p:cNvPr id="14" name="AccentBar"/>
+          <p:cNvSpPr/>
+          <p:nvPr/>
+        </p:nvSpPr>
+        <p:spPr>
+          <a:xfrm>
+            <a:off x="502920" y="3977640"/>
+            <a:ext cx="45720" cy="640080"/>
           </a:xfrm>
           <a:prstGeom prst="rect">
             <a:avLst/>
           </a:prstGeom>
           <a:solidFill>
-            <a:srgbClr val="22262E"/>
+            <a:srgbClr val="60A5FA"/>
           </a:solidFill>
           <a:ln/>
         </p:spPr>
-      </p:sp>
-      <p:sp>
-        <p:nvSpPr>
-          <p:cNvPr id="11" name="Text 9"/>
-          <p:cNvSpPr/>
-          <p:nvPr/>
-        </p:nvSpPr>
-        <p:spPr>
-          <a:xfrm>
-            <a:off x="822960" y="3657600"/>
-            <a:ext cx="7498080" cy="1097280"/>
+        <p:txBody>
+          <a:bodyPr/>
+          <a:lstStyle/>
+          <a:p>
+            <a:endParaRPr lang="en-US"/>
+          </a:p>
+        </p:txBody>
+      </p:sp>
+      <p:sp>
+        <p:nvSpPr>
+          <p:cNvPr id="15" name="CalloutText"/>
+          <p:cNvSpPr/>
+          <p:nvPr/>
+        </p:nvSpPr>
+        <p:spPr>
+          <a:xfrm>
+            <a:off x="685800" y="4023360"/>
+            <a:ext cx="7818120" cy="548640"/>
           </a:xfrm>
           <a:prstGeom prst="rect">
             <a:avLst/>
@@ -3581,30 +3448,24 @@
           <a:bodyPr wrap="square" lIns="0" tIns="0" rIns="0" bIns="0" rtlCol="0" anchor="ctr"/>
           <a:lstStyle/>
           <a:p>
-            <a:pPr indent="0" marL="0">
+            <a:pPr marL="0" indent="0">
               <a:buNone/>
             </a:pPr>
             <a:r>
               <a:rPr lang="en-US" sz="1200" b="1" dirty="0">
                 <a:solidFill>
-                  <a:srgbClr val="F1F5F9"/>
+                  <a:srgbClr val="60A5FA"/>
                 </a:solidFill>
                 <a:latin typeface="Calibri" pitchFamily="34" charset="0"/>
                 <a:ea typeface="Calibri" pitchFamily="34" charset="-122"/>
                 <a:cs typeface="Calibri" pitchFamily="34" charset="-120"/>
               </a:rPr>
-              <a:t xml:space="preserve">We encoded semantic meaning in the type. </a:t>
+              <a:t>This is the type system choosing behavior, not just blocking a write. </a:t>
             </a:r>
             <a:endParaRPr lang="en-US" sz="1200" dirty="0"/>
           </a:p>
           <a:p>
-            <a:pPr indent="0" marL="0">
-              <a:buNone/>
-            </a:pPr>
-            <a:endParaRPr lang="en-US" sz="1200" dirty="0"/>
-          </a:p>
-          <a:p>
-            <a:pPr indent="0" marL="0">
+            <a:pPr marL="0" indent="0">
               <a:buNone/>
             </a:pPr>
             <a:r>
@@ -3616,80 +3477,46 @@
                 <a:ea typeface="Calibri" pitchFamily="34" charset="-122"/>
                 <a:cs typeface="Calibri" pitchFamily="34" charset="-120"/>
               </a:rPr>
-              <a:t xml:space="preserve">UserId and DocId are different types even though they both wrap an int. </a:t>
-            </a:r>
-            <a:endParaRPr lang="en-US" sz="1200" dirty="0"/>
-          </a:p>
-          <a:p>
-            <a:pPr indent="0" marL="0">
-              <a:buNone/>
-            </a:pPr>
-            <a:r>
-              <a:rPr lang="en-US" sz="1100" dirty="0">
-                <a:solidFill>
-                  <a:srgbClr val="94A3B8"/>
+              <a:t>And it cascades: if get_name() isn’t marked const, it vanishes from every function that takes const Person&amp;. One missing qualifier propagates through the entire call graph.</a:t>
+            </a:r>
+            <a:endParaRPr lang="en-US" sz="1100" dirty="0"/>
+          </a:p>
+        </p:txBody>
+      </p:sp>
+      <p:sp>
+        <p:nvSpPr>
+          <p:cNvPr id="16" name="SlideNum"/>
+          <p:cNvSpPr/>
+          <p:nvPr/>
+        </p:nvSpPr>
+        <p:spPr>
+          <a:xfrm>
+            <a:off x="7772400" y="4754880"/>
+            <a:ext cx="1097280" cy="320040"/>
+          </a:xfrm>
+          <a:prstGeom prst="rect">
+            <a:avLst/>
+          </a:prstGeom>
+          <a:noFill/>
+          <a:ln/>
+        </p:spPr>
+        <p:txBody>
+          <a:bodyPr wrap="square" rtlCol="0" anchor="ctr"/>
+          <a:lstStyle/>
+          <a:p>
+            <a:pPr marL="0" indent="0" algn="r">
+              <a:buNone/>
+            </a:pPr>
+            <a:r>
+              <a:rPr lang="en-US" sz="900" dirty="0">
+                <a:solidFill>
+                  <a:srgbClr val="64748B"/>
                 </a:solidFill>
                 <a:latin typeface="Calibri" pitchFamily="34" charset="0"/>
                 <a:ea typeface="Calibri" pitchFamily="34" charset="-122"/>
                 <a:cs typeface="Calibri" pitchFamily="34" charset="-120"/>
               </a:rPr>
-              <a:t xml:space="preserve">The compiler's existing type-checking now enforces our rule: </a:t>
-            </a:r>
-            <a:endParaRPr lang="en-US" sz="1200" dirty="0"/>
-          </a:p>
-          <a:p>
-            <a:pPr indent="0" marL="0">
-              <a:buNone/>
-            </a:pPr>
-            <a:r>
-              <a:rPr lang="en-US" sz="1100" i="1" dirty="0">
-                <a:solidFill>
-                  <a:srgbClr val="FBBF24"/>
-                </a:solidFill>
-                <a:latin typeface="Calibri" pitchFamily="34" charset="0"/>
-                <a:ea typeface="Calibri" pitchFamily="34" charset="-122"/>
-                <a:cs typeface="Calibri" pitchFamily="34" charset="-120"/>
-              </a:rPr>
-              <a:t>"Don't mix up user IDs and document IDs."</a:t>
-            </a:r>
-            <a:endParaRPr lang="en-US" sz="1200" dirty="0"/>
-          </a:p>
-        </p:txBody>
-      </p:sp>
-      <p:sp>
-        <p:nvSpPr>
-          <p:cNvPr id="12" name="Text 10"/>
-          <p:cNvSpPr/>
-          <p:nvPr/>
-        </p:nvSpPr>
-        <p:spPr>
-          <a:xfrm>
-            <a:off x="7772400" y="4754880"/>
-            <a:ext cx="1097280" cy="320040"/>
-          </a:xfrm>
-          <a:prstGeom prst="rect">
-            <a:avLst/>
-          </a:prstGeom>
-          <a:noFill/>
-          <a:ln/>
-        </p:spPr>
-        <p:txBody>
-          <a:bodyPr wrap="square" rtlCol="0" anchor="ctr"/>
-          <a:lstStyle/>
-          <a:p>
-            <a:pPr algn="r" indent="0" marL="0">
-              <a:buNone/>
-            </a:pPr>
-            <a:r>
-              <a:rPr lang="en-US" sz="900" dirty="0">
-                <a:solidFill>
-                  <a:srgbClr val="64748B"/>
-                </a:solidFill>
-                <a:latin typeface="Calibri" pitchFamily="34" charset="0"/>
-                <a:ea typeface="Calibri" pitchFamily="34" charset="-122"/>
-                <a:cs typeface="Calibri" pitchFamily="34" charset="-120"/>
-              </a:rPr>
-              <a:t>5 / 7</a:t>
+              <a:t>4 / 7</a:t>
             </a:r>
             <a:endParaRPr lang="en-US" sz="900" dirty="0"/>
           </a:p>
@@ -3705,12 +3532,13 @@
 
 <file path=ppt/slides/slide5.xml><?xml version="1.0" encoding="utf-8"?>
 <p:sld xmlns:a="http://schemas.openxmlformats.org/drawingml/2006/main" xmlns:r="http://schemas.openxmlformats.org/officeDocument/2006/relationships" xmlns:p="http://schemas.openxmlformats.org/presentationml/2006/main">
-  <p:cSld name="Slide 5">
+  <p:cSld name="Slide 4">
     <p:bg>
       <p:bgPr>
         <a:solidFill>
           <a:srgbClr val="1A1D23"/>
         </a:solidFill>
+        <a:effectLst/>
       </p:bgPr>
     </p:bg>
     <p:spTree>
@@ -3748,7 +3576,7 @@
           <a:bodyPr wrap="square" lIns="0" tIns="0" rIns="0" bIns="0" rtlCol="0" anchor="ctr"/>
           <a:lstStyle/>
           <a:p>
-            <a:pPr indent="0" marL="0">
+            <a:pPr marL="0" indent="0">
               <a:buNone/>
             </a:pPr>
             <a:r>
@@ -3760,7 +3588,7 @@
                 <a:ea typeface="Trebuchet MS" pitchFamily="34" charset="-122"/>
                 <a:cs typeface="Trebuchet MS" pitchFamily="34" charset="-120"/>
               </a:rPr>
-              <a:t>THE PATTERN</a:t>
+              <a:t>ENCODING OUR CONSTRAINTS</a:t>
             </a:r>
             <a:endParaRPr lang="en-US" sz="2800" dirty="0"/>
           </a:p>
@@ -3787,7 +3615,7 @@
           <a:bodyPr wrap="square" lIns="0" tIns="0" rIns="0" bIns="0" rtlCol="0" anchor="ctr"/>
           <a:lstStyle/>
           <a:p>
-            <a:pPr indent="0" marL="0">
+            <a:pPr marL="0" indent="0">
               <a:buNone/>
             </a:pPr>
             <a:r>
@@ -3799,7 +3627,7 @@
                 <a:ea typeface="Calibri" pitchFamily="34" charset="-122"/>
                 <a:cs typeface="Calibri" pitchFamily="34" charset="-120"/>
               </a:rPr>
-              <a:t>Three steps to compiler-enforced correctness</a:t>
+              <a:t>Same type, different meaning → Different types, compiler enforces</a:t>
             </a:r>
             <a:endParaRPr lang="en-US" sz="1200" dirty="0"/>
           </a:p>
@@ -3807,14 +3635,92 @@
       </p:sp>
       <p:sp>
         <p:nvSpPr>
-          <p:cNvPr id="4" name="Shape 2"/>
-          <p:cNvSpPr/>
-          <p:nvPr/>
-        </p:nvSpPr>
-        <p:spPr>
-          <a:xfrm>
-            <a:off x="640080" y="1280160"/>
-            <a:ext cx="7863840" cy="1051560"/>
+          <p:cNvPr id="4" name="Text 2"/>
+          <p:cNvSpPr/>
+          <p:nvPr/>
+        </p:nvSpPr>
+        <p:spPr>
+          <a:xfrm>
+            <a:off x="640080" y="1097280"/>
+            <a:ext cx="3657600" cy="274320"/>
+          </a:xfrm>
+          <a:prstGeom prst="rect">
+            <a:avLst/>
+          </a:prstGeom>
+          <a:noFill/>
+          <a:ln/>
+        </p:spPr>
+        <p:txBody>
+          <a:bodyPr wrap="square" lIns="0" tIns="0" rIns="0" bIns="0" rtlCol="0" anchor="ctr"/>
+          <a:lstStyle/>
+          <a:p>
+            <a:pPr marL="0" indent="0">
+              <a:buNone/>
+            </a:pPr>
+            <a:r>
+              <a:rPr lang="en-US" sz="1100" b="1" dirty="0">
+                <a:solidFill>
+                  <a:srgbClr val="EF4444"/>
+                </a:solidFill>
+                <a:latin typeface="Trebuchet MS" pitchFamily="34" charset="0"/>
+                <a:ea typeface="Trebuchet MS" pitchFamily="34" charset="-122"/>
+                <a:cs typeface="Trebuchet MS" pitchFamily="34" charset="-120"/>
+              </a:rPr>
+              <a:t>BEFORE</a:t>
+            </a:r>
+            <a:endParaRPr lang="en-US" sz="1100" dirty="0"/>
+          </a:p>
+        </p:txBody>
+      </p:sp>
+      <p:sp>
+        <p:nvSpPr>
+          <p:cNvPr id="5" name="Text 3"/>
+          <p:cNvSpPr/>
+          <p:nvPr/>
+        </p:nvSpPr>
+        <p:spPr>
+          <a:xfrm>
+            <a:off x="4754880" y="1097280"/>
+            <a:ext cx="3657600" cy="274320"/>
+          </a:xfrm>
+          <a:prstGeom prst="rect">
+            <a:avLst/>
+          </a:prstGeom>
+          <a:noFill/>
+          <a:ln/>
+        </p:spPr>
+        <p:txBody>
+          <a:bodyPr wrap="square" lIns="0" tIns="0" rIns="0" bIns="0" rtlCol="0" anchor="ctr"/>
+          <a:lstStyle/>
+          <a:p>
+            <a:pPr marL="0" indent="0">
+              <a:buNone/>
+            </a:pPr>
+            <a:r>
+              <a:rPr lang="en-US" sz="1100" b="1" dirty="0">
+                <a:solidFill>
+                  <a:srgbClr val="10B981"/>
+                </a:solidFill>
+                <a:latin typeface="Trebuchet MS" pitchFamily="34" charset="0"/>
+                <a:ea typeface="Trebuchet MS" pitchFamily="34" charset="-122"/>
+                <a:cs typeface="Trebuchet MS" pitchFamily="34" charset="-120"/>
+              </a:rPr>
+              <a:t>AFTER</a:t>
+            </a:r>
+            <a:endParaRPr lang="en-US" sz="1100" dirty="0"/>
+          </a:p>
+        </p:txBody>
+      </p:sp>
+      <p:sp>
+        <p:nvSpPr>
+          <p:cNvPr id="6" name="Shape 4"/>
+          <p:cNvSpPr/>
+          <p:nvPr/>
+        </p:nvSpPr>
+        <p:spPr>
+          <a:xfrm>
+            <a:off x="640080" y="1417320"/>
+            <a:ext cx="3840480" cy="1965960"/>
           </a:xfrm>
           <a:prstGeom prst="rect">
             <a:avLst/>
@@ -3824,37 +3730,380 @@
           </a:solidFill>
           <a:ln/>
         </p:spPr>
-      </p:sp>
-      <p:sp>
-        <p:nvSpPr>
-          <p:cNvPr id="5" name="Shape 3"/>
-          <p:cNvSpPr/>
-          <p:nvPr/>
-        </p:nvSpPr>
-        <p:spPr>
-          <a:xfrm>
-            <a:off x="822960" y="1508760"/>
-            <a:ext cx="502920" cy="502920"/>
-          </a:xfrm>
-          <a:prstGeom prst="oval">
+        <p:txBody>
+          <a:bodyPr/>
+          <a:lstStyle/>
+          <a:p>
+            <a:endParaRPr lang="en-US"/>
+          </a:p>
+        </p:txBody>
+      </p:sp>
+      <p:sp>
+        <p:nvSpPr>
+          <p:cNvPr id="7" name="Text 5"/>
+          <p:cNvSpPr/>
+          <p:nvPr/>
+        </p:nvSpPr>
+        <p:spPr>
+          <a:xfrm>
+            <a:off x="822960" y="1527048"/>
+            <a:ext cx="3474720" cy="1746504"/>
+          </a:xfrm>
+          <a:prstGeom prst="rect">
+            <a:avLst/>
+          </a:prstGeom>
+          <a:noFill/>
+          <a:ln/>
+        </p:spPr>
+        <p:txBody>
+          <a:bodyPr wrap="square" lIns="0" tIns="0" rIns="0" bIns="0" rtlCol="0" anchor="t"/>
+          <a:lstStyle/>
+          <a:p>
+            <a:pPr marL="0" indent="0">
+              <a:spcAft>
+                <a:spcPts val="200"/>
+              </a:spcAft>
+              <a:buNone/>
+            </a:pPr>
+            <a:r>
+              <a:rPr lang="en-US" sz="1000" dirty="0">
+                <a:solidFill>
+                  <a:srgbClr val="D4D4D4"/>
+                </a:solidFill>
+                <a:latin typeface="Consolas" pitchFamily="34" charset="0"/>
+                <a:ea typeface="Consolas" pitchFamily="34" charset="-122"/>
+                <a:cs typeface="Consolas" pitchFamily="34" charset="-120"/>
+              </a:rPr>
+              <a:t>int user_id = 42;</a:t>
+            </a:r>
+            <a:endParaRPr lang="en-US" sz="1000" dirty="0"/>
+          </a:p>
+          <a:p>
+            <a:pPr marL="0" indent="0">
+              <a:spcAft>
+                <a:spcPts val="200"/>
+              </a:spcAft>
+              <a:buNone/>
+            </a:pPr>
+            <a:r>
+              <a:rPr lang="en-US" sz="1000" dirty="0">
+                <a:solidFill>
+                  <a:srgbClr val="D4D4D4"/>
+                </a:solidFill>
+                <a:latin typeface="Consolas" pitchFamily="34" charset="0"/>
+                <a:ea typeface="Consolas" pitchFamily="34" charset="-122"/>
+                <a:cs typeface="Consolas" pitchFamily="34" charset="-120"/>
+              </a:rPr>
+              <a:t>int doc_id = 99;</a:t>
+            </a:r>
+            <a:endParaRPr lang="en-US" sz="1000" dirty="0"/>
+          </a:p>
+          <a:p>
+            <a:pPr marL="0" indent="0">
+              <a:spcAft>
+                <a:spcPts val="200"/>
+              </a:spcAft>
+              <a:buNone/>
+            </a:pPr>
+            <a:endParaRPr lang="en-US" sz="1000" dirty="0"/>
+          </a:p>
+          <a:p>
+            <a:pPr marL="0" indent="0">
+              <a:spcAft>
+                <a:spcPts val="200"/>
+              </a:spcAft>
+              <a:buNone/>
+            </a:pPr>
+            <a:r>
+              <a:rPr lang="en-US" sz="1000" dirty="0">
+                <a:solidFill>
+                  <a:srgbClr val="D4D4D4"/>
+                </a:solidFill>
+                <a:latin typeface="Consolas" pitchFamily="34" charset="0"/>
+                <a:ea typeface="Consolas" pitchFamily="34" charset="-122"/>
+                <a:cs typeface="Consolas" pitchFamily="34" charset="-120"/>
+              </a:rPr>
+              <a:t>// Compiler sees: int, int</a:t>
+            </a:r>
+            <a:endParaRPr lang="en-US" sz="1000" dirty="0"/>
+          </a:p>
+          <a:p>
+            <a:pPr marL="0" indent="0">
+              <a:spcAft>
+                <a:spcPts val="200"/>
+              </a:spcAft>
+              <a:buNone/>
+            </a:pPr>
+            <a:r>
+              <a:rPr lang="en-US" sz="1000" dirty="0">
+                <a:solidFill>
+                  <a:srgbClr val="D4D4D4"/>
+                </a:solidFill>
+                <a:latin typeface="Consolas" pitchFamily="34" charset="0"/>
+                <a:ea typeface="Consolas" pitchFamily="34" charset="-122"/>
+                <a:cs typeface="Consolas" pitchFamily="34" charset="-120"/>
+              </a:rPr>
+              <a:t>// "Both are ints. Looks fine."</a:t>
+            </a:r>
+            <a:endParaRPr lang="en-US" sz="1000" dirty="0"/>
+          </a:p>
+          <a:p>
+            <a:pPr marL="0" indent="0">
+              <a:spcAft>
+                <a:spcPts val="200"/>
+              </a:spcAft>
+              <a:buNone/>
+            </a:pPr>
+            <a:r>
+              <a:rPr lang="en-US" sz="1000" dirty="0">
+                <a:solidFill>
+                  <a:srgbClr val="D4D4D4"/>
+                </a:solidFill>
+                <a:latin typeface="Consolas" pitchFamily="34" charset="0"/>
+                <a:ea typeface="Consolas" pitchFamily="34" charset="-122"/>
+                <a:cs typeface="Consolas" pitchFamily="34" charset="-120"/>
+              </a:rPr>
+              <a:t>grant_access(doc_id, user_id);</a:t>
+            </a:r>
+            <a:endParaRPr lang="en-US" sz="1000" dirty="0"/>
+          </a:p>
+          <a:p>
+            <a:pPr marL="0" indent="0">
+              <a:spcAft>
+                <a:spcPts val="200"/>
+              </a:spcAft>
+              <a:buNone/>
+            </a:pPr>
+            <a:r>
+              <a:rPr lang="en-US" sz="1000" dirty="0">
+                <a:solidFill>
+                  <a:srgbClr val="D4D4D4"/>
+                </a:solidFill>
+                <a:latin typeface="Consolas" pitchFamily="34" charset="0"/>
+                <a:ea typeface="Consolas" pitchFamily="34" charset="-122"/>
+                <a:cs typeface="Consolas" pitchFamily="34" charset="-120"/>
+              </a:rPr>
+              <a:t>// Oops — arguments swapped!</a:t>
+            </a:r>
+            <a:endParaRPr lang="en-US" sz="1000" dirty="0"/>
+          </a:p>
+        </p:txBody>
+      </p:sp>
+      <p:sp>
+        <p:nvSpPr>
+          <p:cNvPr id="8" name="Shape 6"/>
+          <p:cNvSpPr/>
+          <p:nvPr/>
+        </p:nvSpPr>
+        <p:spPr>
+          <a:xfrm>
+            <a:off x="4754880" y="1417320"/>
+            <a:ext cx="3749040" cy="1965960"/>
+          </a:xfrm>
+          <a:prstGeom prst="rect">
             <a:avLst/>
           </a:prstGeom>
           <a:solidFill>
-            <a:srgbClr val="60A5FA"/>
+            <a:srgbClr val="22262E"/>
           </a:solidFill>
           <a:ln/>
         </p:spPr>
-      </p:sp>
-      <p:sp>
-        <p:nvSpPr>
-          <p:cNvPr id="6" name="Text 4"/>
-          <p:cNvSpPr/>
-          <p:nvPr/>
-        </p:nvSpPr>
-        <p:spPr>
-          <a:xfrm>
-            <a:off x="822960" y="1508760"/>
-            <a:ext cx="502920" cy="502920"/>
+        <p:txBody>
+          <a:bodyPr/>
+          <a:lstStyle/>
+          <a:p>
+            <a:endParaRPr lang="en-US"/>
+          </a:p>
+        </p:txBody>
+      </p:sp>
+      <p:sp>
+        <p:nvSpPr>
+          <p:cNvPr id="9" name="Text 7"/>
+          <p:cNvSpPr/>
+          <p:nvPr/>
+        </p:nvSpPr>
+        <p:spPr>
+          <a:xfrm>
+            <a:off x="4937760" y="1527048"/>
+            <a:ext cx="3383280" cy="1746504"/>
+          </a:xfrm>
+          <a:prstGeom prst="rect">
+            <a:avLst/>
+          </a:prstGeom>
+          <a:noFill/>
+          <a:ln/>
+        </p:spPr>
+        <p:txBody>
+          <a:bodyPr wrap="square" lIns="0" tIns="0" rIns="0" bIns="0" rtlCol="0" anchor="t"/>
+          <a:lstStyle/>
+          <a:p>
+            <a:pPr marL="0" indent="0">
+              <a:spcAft>
+                <a:spcPts val="200"/>
+              </a:spcAft>
+              <a:buNone/>
+            </a:pPr>
+            <a:r>
+              <a:rPr lang="en-US" sz="1000" dirty="0">
+                <a:solidFill>
+                  <a:srgbClr val="D4D4D4"/>
+                </a:solidFill>
+                <a:latin typeface="Consolas" pitchFamily="34" charset="0"/>
+                <a:ea typeface="Consolas" pitchFamily="34" charset="-122"/>
+                <a:cs typeface="Consolas" pitchFamily="34" charset="-120"/>
+              </a:rPr>
+              <a:t>UserId user_id{42};</a:t>
+            </a:r>
+            <a:endParaRPr lang="en-US" sz="1000" dirty="0"/>
+          </a:p>
+          <a:p>
+            <a:pPr marL="0" indent="0">
+              <a:spcAft>
+                <a:spcPts val="200"/>
+              </a:spcAft>
+              <a:buNone/>
+            </a:pPr>
+            <a:r>
+              <a:rPr lang="en-US" sz="1000" dirty="0">
+                <a:solidFill>
+                  <a:srgbClr val="D4D4D4"/>
+                </a:solidFill>
+                <a:latin typeface="Consolas" pitchFamily="34" charset="0"/>
+                <a:ea typeface="Consolas" pitchFamily="34" charset="-122"/>
+                <a:cs typeface="Consolas" pitchFamily="34" charset="-120"/>
+              </a:rPr>
+              <a:t>DocId doc_id{99};</a:t>
+            </a:r>
+            <a:endParaRPr lang="en-US" sz="1000" dirty="0"/>
+          </a:p>
+          <a:p>
+            <a:pPr marL="0" indent="0">
+              <a:spcAft>
+                <a:spcPts val="200"/>
+              </a:spcAft>
+              <a:buNone/>
+            </a:pPr>
+            <a:endParaRPr lang="en-US" sz="1000" dirty="0"/>
+          </a:p>
+          <a:p>
+            <a:pPr marL="0" indent="0">
+              <a:spcAft>
+                <a:spcPts val="200"/>
+              </a:spcAft>
+              <a:buNone/>
+            </a:pPr>
+            <a:r>
+              <a:rPr lang="en-US" sz="1000" dirty="0">
+                <a:solidFill>
+                  <a:srgbClr val="D4D4D4"/>
+                </a:solidFill>
+                <a:latin typeface="Consolas" pitchFamily="34" charset="0"/>
+                <a:ea typeface="Consolas" pitchFamily="34" charset="-122"/>
+                <a:cs typeface="Consolas" pitchFamily="34" charset="-120"/>
+              </a:rPr>
+              <a:t>// Compiler sees: UserId, DocId</a:t>
+            </a:r>
+            <a:endParaRPr lang="en-US" sz="1000" dirty="0"/>
+          </a:p>
+          <a:p>
+            <a:pPr marL="0" indent="0">
+              <a:spcAft>
+                <a:spcPts val="200"/>
+              </a:spcAft>
+              <a:buNone/>
+            </a:pPr>
+            <a:r>
+              <a:rPr lang="en-US" sz="1000" dirty="0">
+                <a:solidFill>
+                  <a:srgbClr val="D4D4D4"/>
+                </a:solidFill>
+                <a:latin typeface="Consolas" pitchFamily="34" charset="0"/>
+                <a:ea typeface="Consolas" pitchFamily="34" charset="-122"/>
+                <a:cs typeface="Consolas" pitchFamily="34" charset="-120"/>
+              </a:rPr>
+              <a:t>// "These are different types!"</a:t>
+            </a:r>
+            <a:endParaRPr lang="en-US" sz="1000" dirty="0"/>
+          </a:p>
+          <a:p>
+            <a:pPr marL="0" indent="0">
+              <a:spcAft>
+                <a:spcPts val="200"/>
+              </a:spcAft>
+              <a:buNone/>
+            </a:pPr>
+            <a:r>
+              <a:rPr lang="en-US" sz="1000" dirty="0">
+                <a:solidFill>
+                  <a:srgbClr val="D4D4D4"/>
+                </a:solidFill>
+                <a:latin typeface="Consolas" pitchFamily="34" charset="0"/>
+                <a:ea typeface="Consolas" pitchFamily="34" charset="-122"/>
+                <a:cs typeface="Consolas" pitchFamily="34" charset="-120"/>
+              </a:rPr>
+              <a:t>grant_access(doc_id, user_id);</a:t>
+            </a:r>
+            <a:endParaRPr lang="en-US" sz="1000" dirty="0"/>
+          </a:p>
+          <a:p>
+            <a:pPr marL="0" indent="0">
+              <a:spcAft>
+                <a:spcPts val="200"/>
+              </a:spcAft>
+              <a:buNone/>
+            </a:pPr>
+            <a:r>
+              <a:rPr lang="en-US" sz="1000" dirty="0">
+                <a:solidFill>
+                  <a:srgbClr val="D4D4D4"/>
+                </a:solidFill>
+                <a:latin typeface="Consolas" pitchFamily="34" charset="0"/>
+                <a:ea typeface="Consolas" pitchFamily="34" charset="-122"/>
+                <a:cs typeface="Consolas" pitchFamily="34" charset="-120"/>
+              </a:rPr>
+              <a:t>// COMPILE ERROR!</a:t>
+            </a:r>
+            <a:endParaRPr lang="en-US" sz="1000" dirty="0"/>
+          </a:p>
+        </p:txBody>
+      </p:sp>
+      <p:sp>
+        <p:nvSpPr>
+          <p:cNvPr id="10" name="Shape 8"/>
+          <p:cNvSpPr/>
+          <p:nvPr/>
+        </p:nvSpPr>
+        <p:spPr>
+          <a:xfrm>
+            <a:off x="640080" y="3611880"/>
+            <a:ext cx="7863840" cy="1188720"/>
+          </a:xfrm>
+          <a:prstGeom prst="rect">
+            <a:avLst/>
+          </a:prstGeom>
+          <a:solidFill>
+            <a:srgbClr val="22262E"/>
+          </a:solidFill>
+          <a:ln/>
+        </p:spPr>
+        <p:txBody>
+          <a:bodyPr/>
+          <a:lstStyle/>
+          <a:p>
+            <a:endParaRPr lang="en-US"/>
+          </a:p>
+        </p:txBody>
+      </p:sp>
+      <p:sp>
+        <p:nvSpPr>
+          <p:cNvPr id="11" name="Text 9"/>
+          <p:cNvSpPr/>
+          <p:nvPr/>
+        </p:nvSpPr>
+        <p:spPr>
+          <a:xfrm>
+            <a:off x="822960" y="3657600"/>
+            <a:ext cx="7498080" cy="1097280"/>
           </a:xfrm>
           <a:prstGeom prst="rect">
             <a:avLst/>
@@ -3866,50 +4115,11 @@
           <a:bodyPr wrap="square" lIns="0" tIns="0" rIns="0" bIns="0" rtlCol="0" anchor="ctr"/>
           <a:lstStyle/>
           <a:p>
-            <a:pPr algn="ctr" indent="0" marL="0">
-              <a:buNone/>
-            </a:pPr>
-            <a:r>
-              <a:rPr lang="en-US" sz="1800" b="1" dirty="0">
-                <a:solidFill>
-                  <a:srgbClr val="1A1D23"/>
-                </a:solidFill>
-                <a:latin typeface="Trebuchet MS" pitchFamily="34" charset="0"/>
-                <a:ea typeface="Trebuchet MS" pitchFamily="34" charset="-122"/>
-                <a:cs typeface="Trebuchet MS" pitchFamily="34" charset="-120"/>
-              </a:rPr>
-              <a:t>1</a:t>
-            </a:r>
-            <a:endParaRPr lang="en-US" sz="1800" dirty="0"/>
-          </a:p>
-        </p:txBody>
-      </p:sp>
-      <p:sp>
-        <p:nvSpPr>
-          <p:cNvPr id="7" name="Text 5"/>
-          <p:cNvSpPr/>
-          <p:nvPr/>
-        </p:nvSpPr>
-        <p:spPr>
-          <a:xfrm>
-            <a:off x="1508760" y="1389888"/>
-            <a:ext cx="3657600" cy="320040"/>
-          </a:xfrm>
-          <a:prstGeom prst="rect">
-            <a:avLst/>
-          </a:prstGeom>
-          <a:noFill/>
-          <a:ln/>
-        </p:spPr>
-        <p:txBody>
-          <a:bodyPr wrap="square" lIns="0" tIns="0" rIns="0" bIns="0" rtlCol="0" anchor="ctr"/>
-          <a:lstStyle/>
-          <a:p>
-            <a:pPr indent="0" marL="0">
-              <a:buNone/>
-            </a:pPr>
-            <a:r>
-              <a:rPr lang="en-US" sz="1600" b="1" dirty="0">
+            <a:pPr marL="0" indent="0">
+              <a:buNone/>
+            </a:pPr>
+            <a:r>
+              <a:rPr lang="en-US" sz="1200" b="1" dirty="0">
                 <a:solidFill>
                   <a:srgbClr val="F1F5F9"/>
                 </a:solidFill>
@@ -3917,34 +4127,18 @@
                 <a:ea typeface="Calibri" pitchFamily="34" charset="-122"/>
                 <a:cs typeface="Calibri" pitchFamily="34" charset="-120"/>
               </a:rPr>
-              <a:t>Identify the constraint</a:t>
-            </a:r>
-            <a:endParaRPr lang="en-US" sz="1600" dirty="0"/>
-          </a:p>
-        </p:txBody>
-      </p:sp>
-      <p:sp>
-        <p:nvSpPr>
-          <p:cNvPr id="8" name="Text 6"/>
-          <p:cNvSpPr/>
-          <p:nvPr/>
-        </p:nvSpPr>
-        <p:spPr>
-          <a:xfrm>
-            <a:off x="1508760" y="1719072"/>
-            <a:ext cx="3657600" cy="274320"/>
-          </a:xfrm>
-          <a:prstGeom prst="rect">
-            <a:avLst/>
-          </a:prstGeom>
-          <a:noFill/>
-          <a:ln/>
-        </p:spPr>
-        <p:txBody>
-          <a:bodyPr wrap="square" lIns="0" tIns="0" rIns="0" bIns="0" rtlCol="0" anchor="ctr"/>
-          <a:lstStyle/>
-          <a:p>
-            <a:pPr indent="0" marL="0">
+              <a:t>We encoded semantic meaning in the type. </a:t>
+            </a:r>
+            <a:endParaRPr lang="en-US" sz="1200" dirty="0"/>
+          </a:p>
+          <a:p>
+            <a:pPr marL="0" indent="0">
+              <a:buNone/>
+            </a:pPr>
+            <a:endParaRPr lang="en-US" sz="1200" dirty="0"/>
+          </a:p>
+          <a:p>
+            <a:pPr marL="0" indent="0">
               <a:buNone/>
             </a:pPr>
             <a:r>
@@ -3956,477 +4150,80 @@
                 <a:ea typeface="Calibri" pitchFamily="34" charset="-122"/>
                 <a:cs typeface="Calibri" pitchFamily="34" charset="-120"/>
               </a:rPr>
-              <a:t>What rule do you want the compiler to enforce?</a:t>
-            </a:r>
-            <a:endParaRPr lang="en-US" sz="1100" dirty="0"/>
-          </a:p>
-        </p:txBody>
-      </p:sp>
-      <p:sp>
-        <p:nvSpPr>
-          <p:cNvPr id="9" name="Text 7"/>
-          <p:cNvSpPr/>
-          <p:nvPr/>
-        </p:nvSpPr>
-        <p:spPr>
-          <a:xfrm>
-            <a:off x="5303520" y="1389888"/>
-            <a:ext cx="3017520" cy="822960"/>
-          </a:xfrm>
-          <a:prstGeom prst="rect">
-            <a:avLst/>
-          </a:prstGeom>
-          <a:noFill/>
-          <a:ln/>
-        </p:spPr>
-        <p:txBody>
-          <a:bodyPr wrap="square" lIns="0" tIns="0" rIns="0" bIns="0" rtlCol="0" anchor="ctr"/>
-          <a:lstStyle/>
-          <a:p>
-            <a:pPr indent="0" marL="0">
-              <a:buNone/>
-            </a:pPr>
-            <a:r>
-              <a:rPr lang="en-US" sz="1100" i="1" dirty="0">
-                <a:solidFill>
-                  <a:srgbClr val="64748B"/>
+              <a:t>UserId and DocId are different types even though they both wrap an int. </a:t>
+            </a:r>
+            <a:endParaRPr lang="en-US" sz="1200" dirty="0"/>
+          </a:p>
+          <a:p>
+            <a:pPr marL="0" indent="0">
+              <a:buNone/>
+            </a:pPr>
+            <a:r>
+              <a:rPr lang="en-US" sz="1100" dirty="0">
+                <a:solidFill>
+                  <a:srgbClr val="94A3B8"/>
                 </a:solidFill>
                 <a:latin typeface="Calibri" pitchFamily="34" charset="0"/>
                 <a:ea typeface="Calibri" pitchFamily="34" charset="-122"/>
                 <a:cs typeface="Calibri" pitchFamily="34" charset="-120"/>
               </a:rPr>
-              <a:t>"Users and documents have different IDs"</a:t>
-            </a:r>
-            <a:endParaRPr lang="en-US" sz="1100" dirty="0"/>
-          </a:p>
-        </p:txBody>
-      </p:sp>
-      <p:sp>
-        <p:nvSpPr>
-          <p:cNvPr id="10" name="Shape 8"/>
-          <p:cNvSpPr/>
-          <p:nvPr/>
-        </p:nvSpPr>
-        <p:spPr>
-          <a:xfrm>
-            <a:off x="640080" y="2468880"/>
-            <a:ext cx="7863840" cy="1051560"/>
-          </a:xfrm>
-          <a:prstGeom prst="rect">
-            <a:avLst/>
-          </a:prstGeom>
-          <a:solidFill>
-            <a:srgbClr val="22262E"/>
-          </a:solidFill>
-          <a:ln/>
-        </p:spPr>
-      </p:sp>
-      <p:sp>
-        <p:nvSpPr>
-          <p:cNvPr id="11" name="Shape 9"/>
-          <p:cNvSpPr/>
-          <p:nvPr/>
-        </p:nvSpPr>
-        <p:spPr>
-          <a:xfrm>
-            <a:off x="822960" y="2697480"/>
-            <a:ext cx="502920" cy="502920"/>
-          </a:xfrm>
-          <a:prstGeom prst="oval">
-            <a:avLst/>
-          </a:prstGeom>
-          <a:solidFill>
-            <a:srgbClr val="10B981"/>
-          </a:solidFill>
-          <a:ln/>
-        </p:spPr>
-      </p:sp>
-      <p:sp>
-        <p:nvSpPr>
-          <p:cNvPr id="12" name="Text 10"/>
-          <p:cNvSpPr/>
-          <p:nvPr/>
-        </p:nvSpPr>
-        <p:spPr>
-          <a:xfrm>
-            <a:off x="822960" y="2697480"/>
-            <a:ext cx="502920" cy="502920"/>
-          </a:xfrm>
-          <a:prstGeom prst="rect">
-            <a:avLst/>
-          </a:prstGeom>
-          <a:noFill/>
-          <a:ln/>
-        </p:spPr>
-        <p:txBody>
-          <a:bodyPr wrap="square" lIns="0" tIns="0" rIns="0" bIns="0" rtlCol="0" anchor="ctr"/>
-          <a:lstStyle/>
-          <a:p>
-            <a:pPr algn="ctr" indent="0" marL="0">
-              <a:buNone/>
-            </a:pPr>
-            <a:r>
-              <a:rPr lang="en-US" sz="1800" b="1" dirty="0">
-                <a:solidFill>
-                  <a:srgbClr val="1A1D23"/>
-                </a:solidFill>
-                <a:latin typeface="Trebuchet MS" pitchFamily="34" charset="0"/>
-                <a:ea typeface="Trebuchet MS" pitchFamily="34" charset="-122"/>
-                <a:cs typeface="Trebuchet MS" pitchFamily="34" charset="-120"/>
-              </a:rPr>
-              <a:t>2</a:t>
-            </a:r>
-            <a:endParaRPr lang="en-US" sz="1800" dirty="0"/>
-          </a:p>
-        </p:txBody>
-      </p:sp>
-      <p:sp>
-        <p:nvSpPr>
-          <p:cNvPr id="13" name="Text 11"/>
-          <p:cNvSpPr/>
-          <p:nvPr/>
-        </p:nvSpPr>
-        <p:spPr>
-          <a:xfrm>
-            <a:off x="1508760" y="2578608"/>
-            <a:ext cx="3657600" cy="320040"/>
-          </a:xfrm>
-          <a:prstGeom prst="rect">
-            <a:avLst/>
-          </a:prstGeom>
-          <a:noFill/>
-          <a:ln/>
-        </p:spPr>
-        <p:txBody>
-          <a:bodyPr wrap="square" lIns="0" tIns="0" rIns="0" bIns="0" rtlCol="0" anchor="ctr"/>
-          <a:lstStyle/>
-          <a:p>
-            <a:pPr indent="0" marL="0">
-              <a:buNone/>
-            </a:pPr>
-            <a:r>
-              <a:rPr lang="en-US" sz="1600" b="1" dirty="0">
-                <a:solidFill>
-                  <a:srgbClr val="F1F5F9"/>
+              <a:t>The compiler's existing type-checking now enforces our rule: </a:t>
+            </a:r>
+            <a:endParaRPr lang="en-US" sz="1200" dirty="0"/>
+          </a:p>
+          <a:p>
+            <a:pPr marL="0" indent="0">
+              <a:buNone/>
+            </a:pPr>
+            <a:r>
+              <a:rPr lang="en-US" sz="1100" i="1" dirty="0">
+                <a:solidFill>
+                  <a:srgbClr val="FBBF24"/>
                 </a:solidFill>
                 <a:latin typeface="Calibri" pitchFamily="34" charset="0"/>
                 <a:ea typeface="Calibri" pitchFamily="34" charset="-122"/>
                 <a:cs typeface="Calibri" pitchFamily="34" charset="-120"/>
               </a:rPr>
-              <a:t>Encode it as a type</a:t>
-            </a:r>
-            <a:endParaRPr lang="en-US" sz="1600" dirty="0"/>
-          </a:p>
-        </p:txBody>
-      </p:sp>
-      <p:sp>
-        <p:nvSpPr>
-          <p:cNvPr id="14" name="Text 12"/>
-          <p:cNvSpPr/>
-          <p:nvPr/>
-        </p:nvSpPr>
-        <p:spPr>
-          <a:xfrm>
-            <a:off x="1508760" y="2907792"/>
-            <a:ext cx="3657600" cy="274320"/>
-          </a:xfrm>
-          <a:prstGeom prst="rect">
-            <a:avLst/>
-          </a:prstGeom>
-          <a:noFill/>
-          <a:ln/>
-        </p:spPr>
-        <p:txBody>
-          <a:bodyPr wrap="square" lIns="0" tIns="0" rIns="0" bIns="0" rtlCol="0" anchor="ctr"/>
-          <a:lstStyle/>
-          <a:p>
-            <a:pPr indent="0" marL="0">
-              <a:buNone/>
-            </a:pPr>
-            <a:r>
-              <a:rPr lang="en-US" sz="1100" dirty="0">
-                <a:solidFill>
-                  <a:srgbClr val="94A3B8"/>
+              <a:t>"Don't mix up user IDs and document IDs."</a:t>
+            </a:r>
+            <a:endParaRPr lang="en-US" sz="1200" dirty="0"/>
+          </a:p>
+        </p:txBody>
+      </p:sp>
+      <p:sp>
+        <p:nvSpPr>
+          <p:cNvPr id="12" name="Text 10"/>
+          <p:cNvSpPr/>
+          <p:nvPr/>
+        </p:nvSpPr>
+        <p:spPr>
+          <a:xfrm>
+            <a:off x="7772400" y="4754880"/>
+            <a:ext cx="1097280" cy="320040"/>
+          </a:xfrm>
+          <a:prstGeom prst="rect">
+            <a:avLst/>
+          </a:prstGeom>
+          <a:noFill/>
+          <a:ln/>
+        </p:spPr>
+        <p:txBody>
+          <a:bodyPr wrap="square" rtlCol="0" anchor="ctr"/>
+          <a:lstStyle/>
+          <a:p>
+            <a:pPr marL="0" indent="0" algn="r">
+              <a:buNone/>
+            </a:pPr>
+            <a:r>
+              <a:rPr lang="en-US" sz="900" dirty="0">
+                <a:solidFill>
+                  <a:srgbClr val="64748B"/>
                 </a:solidFill>
                 <a:latin typeface="Calibri" pitchFamily="34" charset="0"/>
                 <a:ea typeface="Calibri" pitchFamily="34" charset="-122"/>
                 <a:cs typeface="Calibri" pitchFamily="34" charset="-120"/>
               </a:rPr>
-              <a:t>Create types that make violations impossible</a:t>
-            </a:r>
-            <a:endParaRPr lang="en-US" sz="1100" dirty="0"/>
-          </a:p>
-        </p:txBody>
-      </p:sp>
-      <p:sp>
-        <p:nvSpPr>
-          <p:cNvPr id="15" name="Text 13"/>
-          <p:cNvSpPr/>
-          <p:nvPr/>
-        </p:nvSpPr>
-        <p:spPr>
-          <a:xfrm>
-            <a:off x="5303520" y="2578608"/>
-            <a:ext cx="3017520" cy="822960"/>
-          </a:xfrm>
-          <a:prstGeom prst="rect">
-            <a:avLst/>
-          </a:prstGeom>
-          <a:noFill/>
-          <a:ln/>
-        </p:spPr>
-        <p:txBody>
-          <a:bodyPr wrap="square" lIns="0" tIns="0" rIns="0" bIns="0" rtlCol="0" anchor="ctr"/>
-          <a:lstStyle/>
-          <a:p>
-            <a:pPr indent="0" marL="0">
-              <a:buNone/>
-            </a:pPr>
-            <a:r>
-              <a:rPr lang="en-US" sz="1100" i="1" dirty="0">
-                <a:solidFill>
-                  <a:srgbClr val="64748B"/>
-                </a:solidFill>
-                <a:latin typeface="Calibri" pitchFamily="34" charset="0"/>
-                <a:ea typeface="Calibri" pitchFamily="34" charset="-122"/>
-                <a:cs typeface="Calibri" pitchFamily="34" charset="-120"/>
-              </a:rPr>
-              <a:t>UserId and DocId as distinct types</a:t>
-            </a:r>
-            <a:endParaRPr lang="en-US" sz="1100" dirty="0"/>
-          </a:p>
-        </p:txBody>
-      </p:sp>
-      <p:sp>
-        <p:nvSpPr>
-          <p:cNvPr id="16" name="Shape 14"/>
-          <p:cNvSpPr/>
-          <p:nvPr/>
-        </p:nvSpPr>
-        <p:spPr>
-          <a:xfrm>
-            <a:off x="640080" y="3657600"/>
-            <a:ext cx="7863840" cy="1051560"/>
-          </a:xfrm>
-          <a:prstGeom prst="rect">
-            <a:avLst/>
-          </a:prstGeom>
-          <a:solidFill>
-            <a:srgbClr val="22262E"/>
-          </a:solidFill>
-          <a:ln/>
-        </p:spPr>
-      </p:sp>
-      <p:sp>
-        <p:nvSpPr>
-          <p:cNvPr id="17" name="Shape 15"/>
-          <p:cNvSpPr/>
-          <p:nvPr/>
-        </p:nvSpPr>
-        <p:spPr>
-          <a:xfrm>
-            <a:off x="822960" y="3886200"/>
-            <a:ext cx="502920" cy="502920"/>
-          </a:xfrm>
-          <a:prstGeom prst="oval">
-            <a:avLst/>
-          </a:prstGeom>
-          <a:solidFill>
-            <a:srgbClr val="FBBF24"/>
-          </a:solidFill>
-          <a:ln/>
-        </p:spPr>
-      </p:sp>
-      <p:sp>
-        <p:nvSpPr>
-          <p:cNvPr id="18" name="Text 16"/>
-          <p:cNvSpPr/>
-          <p:nvPr/>
-        </p:nvSpPr>
-        <p:spPr>
-          <a:xfrm>
-            <a:off x="822960" y="3886200"/>
-            <a:ext cx="502920" cy="502920"/>
-          </a:xfrm>
-          <a:prstGeom prst="rect">
-            <a:avLst/>
-          </a:prstGeom>
-          <a:noFill/>
-          <a:ln/>
-        </p:spPr>
-        <p:txBody>
-          <a:bodyPr wrap="square" lIns="0" tIns="0" rIns="0" bIns="0" rtlCol="0" anchor="ctr"/>
-          <a:lstStyle/>
-          <a:p>
-            <a:pPr algn="ctr" indent="0" marL="0">
-              <a:buNone/>
-            </a:pPr>
-            <a:r>
-              <a:rPr lang="en-US" sz="1800" b="1" dirty="0">
-                <a:solidFill>
-                  <a:srgbClr val="1A1D23"/>
-                </a:solidFill>
-                <a:latin typeface="Trebuchet MS" pitchFamily="34" charset="0"/>
-                <a:ea typeface="Trebuchet MS" pitchFamily="34" charset="-122"/>
-                <a:cs typeface="Trebuchet MS" pitchFamily="34" charset="-120"/>
-              </a:rPr>
-              <a:t>3</a:t>
-            </a:r>
-            <a:endParaRPr lang="en-US" sz="1800" dirty="0"/>
-          </a:p>
-        </p:txBody>
-      </p:sp>
-      <p:sp>
-        <p:nvSpPr>
-          <p:cNvPr id="19" name="Text 17"/>
-          <p:cNvSpPr/>
-          <p:nvPr/>
-        </p:nvSpPr>
-        <p:spPr>
-          <a:xfrm>
-            <a:off x="1508760" y="3767328"/>
-            <a:ext cx="3657600" cy="320040"/>
-          </a:xfrm>
-          <a:prstGeom prst="rect">
-            <a:avLst/>
-          </a:prstGeom>
-          <a:noFill/>
-          <a:ln/>
-        </p:spPr>
-        <p:txBody>
-          <a:bodyPr wrap="square" lIns="0" tIns="0" rIns="0" bIns="0" rtlCol="0" anchor="ctr"/>
-          <a:lstStyle/>
-          <a:p>
-            <a:pPr indent="0" marL="0">
-              <a:buNone/>
-            </a:pPr>
-            <a:r>
-              <a:rPr lang="en-US" sz="1600" b="1" dirty="0">
-                <a:solidFill>
-                  <a:srgbClr val="F1F5F9"/>
-                </a:solidFill>
-                <a:latin typeface="Calibri" pitchFamily="34" charset="0"/>
-                <a:ea typeface="Calibri" pitchFamily="34" charset="-122"/>
-                <a:cs typeface="Calibri" pitchFamily="34" charset="-120"/>
-              </a:rPr>
-              <a:t>Let the compiler work</a:t>
-            </a:r>
-            <a:endParaRPr lang="en-US" sz="1600" dirty="0"/>
-          </a:p>
-        </p:txBody>
-      </p:sp>
-      <p:sp>
-        <p:nvSpPr>
-          <p:cNvPr id="20" name="Text 18"/>
-          <p:cNvSpPr/>
-          <p:nvPr/>
-        </p:nvSpPr>
-        <p:spPr>
-          <a:xfrm>
-            <a:off x="1508760" y="4096512"/>
-            <a:ext cx="3657600" cy="274320"/>
-          </a:xfrm>
-          <a:prstGeom prst="rect">
-            <a:avLst/>
-          </a:prstGeom>
-          <a:noFill/>
-          <a:ln/>
-        </p:spPr>
-        <p:txBody>
-          <a:bodyPr wrap="square" lIns="0" tIns="0" rIns="0" bIns="0" rtlCol="0" anchor="ctr"/>
-          <a:lstStyle/>
-          <a:p>
-            <a:pPr indent="0" marL="0">
-              <a:buNone/>
-            </a:pPr>
-            <a:r>
-              <a:rPr lang="en-US" sz="1100" dirty="0">
-                <a:solidFill>
-                  <a:srgbClr val="94A3B8"/>
-                </a:solidFill>
-                <a:latin typeface="Calibri" pitchFamily="34" charset="0"/>
-                <a:ea typeface="Calibri" pitchFamily="34" charset="-122"/>
-                <a:cs typeface="Calibri" pitchFamily="34" charset="-120"/>
-              </a:rPr>
-              <a:t>Type-checking now catches mistakes at compile time</a:t>
-            </a:r>
-            <a:endParaRPr lang="en-US" sz="1100" dirty="0"/>
-          </a:p>
-        </p:txBody>
-      </p:sp>
-      <p:sp>
-        <p:nvSpPr>
-          <p:cNvPr id="21" name="Text 19"/>
-          <p:cNvSpPr/>
-          <p:nvPr/>
-        </p:nvSpPr>
-        <p:spPr>
-          <a:xfrm>
-            <a:off x="5303520" y="3767328"/>
-            <a:ext cx="3017520" cy="822960"/>
-          </a:xfrm>
-          <a:prstGeom prst="rect">
-            <a:avLst/>
-          </a:prstGeom>
-          <a:noFill/>
-          <a:ln/>
-        </p:spPr>
-        <p:txBody>
-          <a:bodyPr wrap="square" lIns="0" tIns="0" rIns="0" bIns="0" rtlCol="0" anchor="ctr"/>
-          <a:lstStyle/>
-          <a:p>
-            <a:pPr indent="0" marL="0">
-              <a:buNone/>
-            </a:pPr>
-            <a:r>
-              <a:rPr lang="en-US" sz="1100" i="1" dirty="0">
-                <a:solidFill>
-                  <a:srgbClr val="64748B"/>
-                </a:solidFill>
-                <a:latin typeface="Calibri" pitchFamily="34" charset="0"/>
-                <a:ea typeface="Calibri" pitchFamily="34" charset="-122"/>
-                <a:cs typeface="Calibri" pitchFamily="34" charset="-120"/>
-              </a:rPr>
-              <a:t>No runtime cost, no discipline required</a:t>
-            </a:r>
-            <a:endParaRPr lang="en-US" sz="1100" dirty="0"/>
-          </a:p>
-        </p:txBody>
-      </p:sp>
-      <p:sp>
-        <p:nvSpPr>
-          <p:cNvPr id="22" name="Text 20"/>
-          <p:cNvSpPr/>
-          <p:nvPr/>
-        </p:nvSpPr>
-        <p:spPr>
-          <a:xfrm>
-            <a:off x="7772400" y="4754880"/>
-            <a:ext cx="1097280" cy="320040"/>
-          </a:xfrm>
-          <a:prstGeom prst="rect">
-            <a:avLst/>
-          </a:prstGeom>
-          <a:noFill/>
-          <a:ln/>
-        </p:spPr>
-        <p:txBody>
-          <a:bodyPr wrap="square" rtlCol="0" anchor="ctr"/>
-          <a:lstStyle/>
-          <a:p>
-            <a:pPr algn="r" indent="0" marL="0">
-              <a:buNone/>
-            </a:pPr>
-            <a:r>
-              <a:rPr lang="en-US" sz="900" dirty="0">
-                <a:solidFill>
-                  <a:srgbClr val="64748B"/>
-                </a:solidFill>
-                <a:latin typeface="Calibri" pitchFamily="34" charset="0"/>
-                <a:ea typeface="Calibri" pitchFamily="34" charset="-122"/>
-                <a:cs typeface="Calibri" pitchFamily="34" charset="-120"/>
-              </a:rPr>
-              <a:t>6 / 7</a:t>
+              <a:t>5 / 7</a:t>
             </a:r>
             <a:endParaRPr lang="en-US" sz="900" dirty="0"/>
           </a:p>
@@ -4442,12 +4239,13 @@
 
 <file path=ppt/slides/slide6.xml><?xml version="1.0" encoding="utf-8"?>
 <p:sld xmlns:a="http://schemas.openxmlformats.org/drawingml/2006/main" xmlns:r="http://schemas.openxmlformats.org/officeDocument/2006/relationships" xmlns:p="http://schemas.openxmlformats.org/presentationml/2006/main">
-  <p:cSld name="Slide 6">
+  <p:cSld name="Slide 5">
     <p:bg>
       <p:bgPr>
         <a:solidFill>
           <a:srgbClr val="1A1D23"/>
         </a:solidFill>
+        <a:effectLst/>
       </p:bgPr>
     </p:bg>
     <p:spTree>
@@ -4485,7 +4283,7 @@
           <a:bodyPr wrap="square" lIns="0" tIns="0" rIns="0" bIns="0" rtlCol="0" anchor="ctr"/>
           <a:lstStyle/>
           <a:p>
-            <a:pPr indent="0" marL="0">
+            <a:pPr marL="0" indent="0">
               <a:buNone/>
             </a:pPr>
             <a:r>
@@ -4497,7 +4295,7 @@
                 <a:ea typeface="Trebuchet MS" pitchFamily="34" charset="-122"/>
                 <a:cs typeface="Trebuchet MS" pitchFamily="34" charset="-120"/>
               </a:rPr>
-              <a:t>THE PAYOFF</a:t>
+              <a:t>THE PATTERN</a:t>
             </a:r>
             <a:endParaRPr lang="en-US" sz="2800" dirty="0"/>
           </a:p>
@@ -4511,8 +4309,8 @@
         </p:nvSpPr>
         <p:spPr>
           <a:xfrm>
-            <a:off x="640080" y="1097280"/>
-            <a:ext cx="7863840" cy="411480"/>
+            <a:off x="502920" y="777240"/>
+            <a:ext cx="8138160" cy="320040"/>
           </a:xfrm>
           <a:prstGeom prst="rect">
             <a:avLst/>
@@ -4524,11 +4322,11 @@
           <a:bodyPr wrap="square" lIns="0" tIns="0" rIns="0" bIns="0" rtlCol="0" anchor="ctr"/>
           <a:lstStyle/>
           <a:p>
-            <a:pPr indent="0" marL="0">
-              <a:buNone/>
-            </a:pPr>
-            <a:r>
-              <a:rPr lang="en-US" sz="1600" dirty="0">
+            <a:pPr marL="0" indent="0">
+              <a:buNone/>
+            </a:pPr>
+            <a:r>
+              <a:rPr lang="en-US" sz="1200" dirty="0">
                 <a:solidFill>
                   <a:srgbClr val="94A3B8"/>
                 </a:solidFill>
@@ -4536,22 +4334,76 @@
                 <a:ea typeface="Calibri" pitchFamily="34" charset="-122"/>
                 <a:cs typeface="Calibri" pitchFamily="34" charset="-120"/>
               </a:rPr>
-              <a:t>If the compiler accepts your code,</a:t>
-            </a:r>
-            <a:endParaRPr lang="en-US" sz="1600" dirty="0"/>
-          </a:p>
-        </p:txBody>
-      </p:sp>
-      <p:sp>
-        <p:nvSpPr>
-          <p:cNvPr id="4" name="Text 2"/>
-          <p:cNvSpPr/>
-          <p:nvPr/>
-        </p:nvSpPr>
-        <p:spPr>
-          <a:xfrm>
-            <a:off x="640080" y="1508760"/>
-            <a:ext cx="7863840" cy="548640"/>
+              <a:t>Three steps to compiler-enforced correctness</a:t>
+            </a:r>
+            <a:endParaRPr lang="en-US" sz="1200" dirty="0"/>
+          </a:p>
+        </p:txBody>
+      </p:sp>
+      <p:sp>
+        <p:nvSpPr>
+          <p:cNvPr id="4" name="Shape 2"/>
+          <p:cNvSpPr/>
+          <p:nvPr/>
+        </p:nvSpPr>
+        <p:spPr>
+          <a:xfrm>
+            <a:off x="640080" y="1280160"/>
+            <a:ext cx="7863840" cy="1051560"/>
+          </a:xfrm>
+          <a:prstGeom prst="rect">
+            <a:avLst/>
+          </a:prstGeom>
+          <a:solidFill>
+            <a:srgbClr val="22262E"/>
+          </a:solidFill>
+          <a:ln/>
+        </p:spPr>
+        <p:txBody>
+          <a:bodyPr/>
+          <a:lstStyle/>
+          <a:p>
+            <a:endParaRPr lang="en-US"/>
+          </a:p>
+        </p:txBody>
+      </p:sp>
+      <p:sp>
+        <p:nvSpPr>
+          <p:cNvPr id="5" name="Shape 3"/>
+          <p:cNvSpPr/>
+          <p:nvPr/>
+        </p:nvSpPr>
+        <p:spPr>
+          <a:xfrm>
+            <a:off x="822960" y="1508760"/>
+            <a:ext cx="502920" cy="502920"/>
+          </a:xfrm>
+          <a:prstGeom prst="line">
+            <a:avLst/>
+          </a:prstGeom>
+          <a:solidFill>
+            <a:srgbClr val="60A5FA"/>
+          </a:solidFill>
+          <a:ln/>
+        </p:spPr>
+        <p:txBody>
+          <a:bodyPr/>
+          <a:lstStyle/>
+          <a:p>
+            <a:endParaRPr lang="en-US"/>
+          </a:p>
+        </p:txBody>
+      </p:sp>
+      <p:sp>
+        <p:nvSpPr>
+          <p:cNvPr id="6" name="Text 4"/>
+          <p:cNvSpPr/>
+          <p:nvPr/>
+        </p:nvSpPr>
+        <p:spPr>
+          <a:xfrm>
+            <a:off x="822960" y="1508760"/>
+            <a:ext cx="502920" cy="502920"/>
           </a:xfrm>
           <a:prstGeom prst="rect">
             <a:avLst/>
@@ -4563,34 +4415,34 @@
           <a:bodyPr wrap="square" lIns="0" tIns="0" rIns="0" bIns="0" rtlCol="0" anchor="ctr"/>
           <a:lstStyle/>
           <a:p>
-            <a:pPr indent="0" marL="0">
-              <a:buNone/>
-            </a:pPr>
-            <a:r>
-              <a:rPr lang="en-US" sz="2800" b="1" dirty="0">
-                <a:solidFill>
-                  <a:srgbClr val="F1F5F9"/>
+            <a:pPr marL="0" indent="0" algn="ctr">
+              <a:buNone/>
+            </a:pPr>
+            <a:r>
+              <a:rPr lang="en-US" sz="1800" b="1" dirty="0">
+                <a:solidFill>
+                  <a:srgbClr val="1A1D23"/>
                 </a:solidFill>
                 <a:latin typeface="Trebuchet MS" pitchFamily="34" charset="0"/>
                 <a:ea typeface="Trebuchet MS" pitchFamily="34" charset="-122"/>
                 <a:cs typeface="Trebuchet MS" pitchFamily="34" charset="-120"/>
               </a:rPr>
-              <a:t>certain bugs are impossible.</a:t>
-            </a:r>
-            <a:endParaRPr lang="en-US" sz="2800" dirty="0"/>
-          </a:p>
-        </p:txBody>
-      </p:sp>
-      <p:sp>
-        <p:nvSpPr>
-          <p:cNvPr id="5" name="Text 3"/>
-          <p:cNvSpPr/>
-          <p:nvPr/>
-        </p:nvSpPr>
-        <p:spPr>
-          <a:xfrm>
-            <a:off x="640080" y="2057400"/>
-            <a:ext cx="7863840" cy="320040"/>
+              <a:t>1</a:t>
+            </a:r>
+            <a:endParaRPr lang="en-US" sz="1800" dirty="0"/>
+          </a:p>
+        </p:txBody>
+      </p:sp>
+      <p:sp>
+        <p:nvSpPr>
+          <p:cNvPr id="7" name="Text 5"/>
+          <p:cNvSpPr/>
+          <p:nvPr/>
+        </p:nvSpPr>
+        <p:spPr>
+          <a:xfrm>
+            <a:off x="1508760" y="1389888"/>
+            <a:ext cx="3657600" cy="320040"/>
           </a:xfrm>
           <a:prstGeom prst="rect">
             <a:avLst/>
@@ -4602,48 +4454,73 @@
           <a:bodyPr wrap="square" lIns="0" tIns="0" rIns="0" bIns="0" rtlCol="0" anchor="ctr"/>
           <a:lstStyle/>
           <a:p>
-            <a:pPr indent="0" marL="0">
-              <a:buNone/>
-            </a:pPr>
-            <a:r>
-              <a:rPr lang="en-US" sz="1200" dirty="0">
-                <a:solidFill>
-                  <a:srgbClr val="64748B"/>
+            <a:pPr marL="0" indent="0">
+              <a:buNone/>
+            </a:pPr>
+            <a:r>
+              <a:rPr lang="en-US" sz="1600" b="1" dirty="0">
+                <a:solidFill>
+                  <a:srgbClr val="F1F5F9"/>
                 </a:solidFill>
                 <a:latin typeface="Calibri" pitchFamily="34" charset="0"/>
                 <a:ea typeface="Calibri" pitchFamily="34" charset="-122"/>
                 <a:cs typeface="Calibri" pitchFamily="34" charset="-120"/>
               </a:rPr>
-              <a:t xml:space="preserve">Not "unlikely." Not "tested for." </a:t>
-            </a:r>
-            <a:pPr indent="0" marL="0">
-              <a:buNone/>
-            </a:pPr>
-            <a:r>
-              <a:rPr lang="en-US" sz="1200" b="1" dirty="0">
-                <a:solidFill>
-                  <a:srgbClr val="34D399"/>
+              <a:t>Identify the constraint</a:t>
+            </a:r>
+            <a:endParaRPr lang="en-US" sz="1600" dirty="0"/>
+          </a:p>
+        </p:txBody>
+      </p:sp>
+      <p:sp>
+        <p:nvSpPr>
+          <p:cNvPr id="8" name="Text 6"/>
+          <p:cNvSpPr/>
+          <p:nvPr/>
+        </p:nvSpPr>
+        <p:spPr>
+          <a:xfrm>
+            <a:off x="1508760" y="1719072"/>
+            <a:ext cx="3657600" cy="274320"/>
+          </a:xfrm>
+          <a:prstGeom prst="rect">
+            <a:avLst/>
+          </a:prstGeom>
+          <a:noFill/>
+          <a:ln/>
+        </p:spPr>
+        <p:txBody>
+          <a:bodyPr wrap="square" lIns="0" tIns="0" rIns="0" bIns="0" rtlCol="0" anchor="ctr"/>
+          <a:lstStyle/>
+          <a:p>
+            <a:pPr marL="0" indent="0">
+              <a:buNone/>
+            </a:pPr>
+            <a:r>
+              <a:rPr lang="en-US" sz="1100" dirty="0">
+                <a:solidFill>
+                  <a:srgbClr val="94A3B8"/>
                 </a:solidFill>
                 <a:latin typeface="Calibri" pitchFamily="34" charset="0"/>
                 <a:ea typeface="Calibri" pitchFamily="34" charset="-122"/>
                 <a:cs typeface="Calibri" pitchFamily="34" charset="-120"/>
               </a:rPr>
-              <a:t>Impossible.</a:t>
-            </a:r>
-            <a:endParaRPr lang="en-US" sz="1200" dirty="0"/>
-          </a:p>
-        </p:txBody>
-      </p:sp>
-      <p:sp>
-        <p:nvSpPr>
-          <p:cNvPr id="6" name="Text 4"/>
-          <p:cNvSpPr/>
-          <p:nvPr/>
-        </p:nvSpPr>
-        <p:spPr>
-          <a:xfrm>
-            <a:off x="640080" y="2606040"/>
-            <a:ext cx="7863840" cy="320040"/>
+              <a:t>What rule do you want the compiler to enforce?</a:t>
+            </a:r>
+            <a:endParaRPr lang="en-US" sz="1100" dirty="0"/>
+          </a:p>
+        </p:txBody>
+      </p:sp>
+      <p:sp>
+        <p:nvSpPr>
+          <p:cNvPr id="9" name="Text 7"/>
+          <p:cNvSpPr/>
+          <p:nvPr/>
+        </p:nvSpPr>
+        <p:spPr>
+          <a:xfrm>
+            <a:off x="5303520" y="1389888"/>
+            <a:ext cx="3017520" cy="822960"/>
           </a:xfrm>
           <a:prstGeom prst="rect">
             <a:avLst/>
@@ -4655,34 +4532,34 @@
           <a:bodyPr wrap="square" lIns="0" tIns="0" rIns="0" bIns="0" rtlCol="0" anchor="ctr"/>
           <a:lstStyle/>
           <a:p>
-            <a:pPr indent="0" marL="0">
-              <a:buNone/>
-            </a:pPr>
-            <a:r>
-              <a:rPr lang="en-US" sz="1200" dirty="0">
-                <a:solidFill>
-                  <a:srgbClr val="94A3B8"/>
+            <a:pPr marL="0" indent="0">
+              <a:buNone/>
+            </a:pPr>
+            <a:r>
+              <a:rPr lang="en-US" sz="1100" i="1" dirty="0">
+                <a:solidFill>
+                  <a:srgbClr val="64748B"/>
                 </a:solidFill>
                 <a:latin typeface="Calibri" pitchFamily="34" charset="0"/>
                 <a:ea typeface="Calibri" pitchFamily="34" charset="-122"/>
                 <a:cs typeface="Calibri" pitchFamily="34" charset="-120"/>
               </a:rPr>
-              <a:t>The compiler already enforces:</a:t>
-            </a:r>
-            <a:endParaRPr lang="en-US" sz="1200" dirty="0"/>
-          </a:p>
-        </p:txBody>
-      </p:sp>
-      <p:sp>
-        <p:nvSpPr>
-          <p:cNvPr id="7" name="Shape 5"/>
-          <p:cNvSpPr/>
-          <p:nvPr/>
-        </p:nvSpPr>
-        <p:spPr>
-          <a:xfrm>
-            <a:off x="640080" y="2971800"/>
-            <a:ext cx="7863840" cy="457200"/>
+              <a:t>"Users and documents have different IDs"</a:t>
+            </a:r>
+            <a:endParaRPr lang="en-US" sz="1100" dirty="0"/>
+          </a:p>
+        </p:txBody>
+      </p:sp>
+      <p:sp>
+        <p:nvSpPr>
+          <p:cNvPr id="10" name="Shape 8"/>
+          <p:cNvSpPr/>
+          <p:nvPr/>
+        </p:nvSpPr>
+        <p:spPr>
+          <a:xfrm>
+            <a:off x="640080" y="2468880"/>
+            <a:ext cx="7863840" cy="1051560"/>
           </a:xfrm>
           <a:prstGeom prst="rect">
             <a:avLst/>
@@ -4692,37 +4569,51 @@
           </a:solidFill>
           <a:ln/>
         </p:spPr>
-      </p:sp>
-      <p:sp>
-        <p:nvSpPr>
-          <p:cNvPr id="8" name="Shape 6"/>
-          <p:cNvSpPr/>
-          <p:nvPr/>
-        </p:nvSpPr>
-        <p:spPr>
-          <a:xfrm>
-            <a:off x="640080" y="2971800"/>
-            <a:ext cx="54864" cy="457200"/>
-          </a:xfrm>
-          <a:prstGeom prst="rect">
+        <p:txBody>
+          <a:bodyPr/>
+          <a:lstStyle/>
+          <a:p>
+            <a:endParaRPr lang="en-US"/>
+          </a:p>
+        </p:txBody>
+      </p:sp>
+      <p:sp>
+        <p:nvSpPr>
+          <p:cNvPr id="11" name="Shape 9"/>
+          <p:cNvSpPr/>
+          <p:nvPr/>
+        </p:nvSpPr>
+        <p:spPr>
+          <a:xfrm>
+            <a:off x="822960" y="2697480"/>
+            <a:ext cx="502920" cy="502920"/>
+          </a:xfrm>
+          <a:prstGeom prst="line">
             <a:avLst/>
           </a:prstGeom>
           <a:solidFill>
-            <a:srgbClr val="60A5FA"/>
+            <a:srgbClr val="10B981"/>
           </a:solidFill>
           <a:ln/>
         </p:spPr>
-      </p:sp>
-      <p:sp>
-        <p:nvSpPr>
-          <p:cNvPr id="9" name="Text 7"/>
-          <p:cNvSpPr/>
-          <p:nvPr/>
-        </p:nvSpPr>
-        <p:spPr>
-          <a:xfrm>
-            <a:off x="914400" y="2971800"/>
-            <a:ext cx="2286000" cy="457200"/>
+        <p:txBody>
+          <a:bodyPr/>
+          <a:lstStyle/>
+          <a:p>
+            <a:endParaRPr lang="en-US"/>
+          </a:p>
+        </p:txBody>
+      </p:sp>
+      <p:sp>
+        <p:nvSpPr>
+          <p:cNvPr id="12" name="Text 10"/>
+          <p:cNvSpPr/>
+          <p:nvPr/>
+        </p:nvSpPr>
+        <p:spPr>
+          <a:xfrm>
+            <a:off x="822960" y="2697480"/>
+            <a:ext cx="502920" cy="502920"/>
           </a:xfrm>
           <a:prstGeom prst="rect">
             <a:avLst/>
@@ -4734,11 +4625,50 @@
           <a:bodyPr wrap="square" lIns="0" tIns="0" rIns="0" bIns="0" rtlCol="0" anchor="ctr"/>
           <a:lstStyle/>
           <a:p>
-            <a:pPr indent="0" marL="0">
-              <a:buNone/>
-            </a:pPr>
-            <a:r>
-              <a:rPr lang="en-US" sz="1300" b="1" dirty="0">
+            <a:pPr marL="0" indent="0" algn="ctr">
+              <a:buNone/>
+            </a:pPr>
+            <a:r>
+              <a:rPr lang="en-US" sz="1800" b="1" dirty="0">
+                <a:solidFill>
+                  <a:srgbClr val="1A1D23"/>
+                </a:solidFill>
+                <a:latin typeface="Trebuchet MS" pitchFamily="34" charset="0"/>
+                <a:ea typeface="Trebuchet MS" pitchFamily="34" charset="-122"/>
+                <a:cs typeface="Trebuchet MS" pitchFamily="34" charset="-120"/>
+              </a:rPr>
+              <a:t>2</a:t>
+            </a:r>
+            <a:endParaRPr lang="en-US" sz="1800" dirty="0"/>
+          </a:p>
+        </p:txBody>
+      </p:sp>
+      <p:sp>
+        <p:nvSpPr>
+          <p:cNvPr id="13" name="Text 11"/>
+          <p:cNvSpPr/>
+          <p:nvPr/>
+        </p:nvSpPr>
+        <p:spPr>
+          <a:xfrm>
+            <a:off x="1508760" y="2578608"/>
+            <a:ext cx="3657600" cy="320040"/>
+          </a:xfrm>
+          <a:prstGeom prst="rect">
+            <a:avLst/>
+          </a:prstGeom>
+          <a:noFill/>
+          <a:ln/>
+        </p:spPr>
+        <p:txBody>
+          <a:bodyPr wrap="square" lIns="0" tIns="0" rIns="0" bIns="0" rtlCol="0" anchor="ctr"/>
+          <a:lstStyle/>
+          <a:p>
+            <a:pPr marL="0" indent="0">
+              <a:buNone/>
+            </a:pPr>
+            <a:r>
+              <a:rPr lang="en-US" sz="1600" b="1" dirty="0">
                 <a:solidFill>
                   <a:srgbClr val="F1F5F9"/>
                 </a:solidFill>
@@ -4746,22 +4676,22 @@
                 <a:ea typeface="Calibri" pitchFamily="34" charset="-122"/>
                 <a:cs typeface="Calibri" pitchFamily="34" charset="-120"/>
               </a:rPr>
-              <a:t>Built-in types</a:t>
-            </a:r>
-            <a:endParaRPr lang="en-US" sz="1300" dirty="0"/>
-          </a:p>
-        </p:txBody>
-      </p:sp>
-      <p:sp>
-        <p:nvSpPr>
-          <p:cNvPr id="10" name="Text 8"/>
-          <p:cNvSpPr/>
-          <p:nvPr/>
-        </p:nvSpPr>
-        <p:spPr>
-          <a:xfrm>
-            <a:off x="3200400" y="2971800"/>
-            <a:ext cx="5120640" cy="457200"/>
+              <a:t>Encode it as a type</a:t>
+            </a:r>
+            <a:endParaRPr lang="en-US" sz="1600" dirty="0"/>
+          </a:p>
+        </p:txBody>
+      </p:sp>
+      <p:sp>
+        <p:nvSpPr>
+          <p:cNvPr id="14" name="Text 12"/>
+          <p:cNvSpPr/>
+          <p:nvPr/>
+        </p:nvSpPr>
+        <p:spPr>
+          <a:xfrm>
+            <a:off x="1508760" y="2907792"/>
+            <a:ext cx="3657600" cy="274320"/>
           </a:xfrm>
           <a:prstGeom prst="rect">
             <a:avLst/>
@@ -4773,7 +4703,7 @@
           <a:bodyPr wrap="square" lIns="0" tIns="0" rIns="0" bIns="0" rtlCol="0" anchor="ctr"/>
           <a:lstStyle/>
           <a:p>
-            <a:pPr indent="0" marL="0">
+            <a:pPr marL="0" indent="0">
               <a:buNone/>
             </a:pPr>
             <a:r>
@@ -4785,7 +4715,7 @@
                 <a:ea typeface="Calibri" pitchFamily="34" charset="-122"/>
                 <a:cs typeface="Calibri" pitchFamily="34" charset="-120"/>
               </a:rPr>
-              <a:t>string ≠ int, int* ≠ char*</a:t>
+              <a:t>Create types that make violations impossible</a:t>
             </a:r>
             <a:endParaRPr lang="en-US" sz="1100" dirty="0"/>
           </a:p>
@@ -4793,14 +4723,53 @@
       </p:sp>
       <p:sp>
         <p:nvSpPr>
-          <p:cNvPr id="11" name="Shape 9"/>
-          <p:cNvSpPr/>
-          <p:nvPr/>
-        </p:nvSpPr>
-        <p:spPr>
-          <a:xfrm>
-            <a:off x="640080" y="3502152"/>
-            <a:ext cx="7863840" cy="457200"/>
+          <p:cNvPr id="15" name="Text 13"/>
+          <p:cNvSpPr/>
+          <p:nvPr/>
+        </p:nvSpPr>
+        <p:spPr>
+          <a:xfrm>
+            <a:off x="5303520" y="2578608"/>
+            <a:ext cx="3017520" cy="822960"/>
+          </a:xfrm>
+          <a:prstGeom prst="rect">
+            <a:avLst/>
+          </a:prstGeom>
+          <a:noFill/>
+          <a:ln/>
+        </p:spPr>
+        <p:txBody>
+          <a:bodyPr wrap="square" lIns="0" tIns="0" rIns="0" bIns="0" rtlCol="0" anchor="ctr"/>
+          <a:lstStyle/>
+          <a:p>
+            <a:pPr marL="0" indent="0">
+              <a:buNone/>
+            </a:pPr>
+            <a:r>
+              <a:rPr lang="en-US" sz="1100" i="1" dirty="0">
+                <a:solidFill>
+                  <a:srgbClr val="64748B"/>
+                </a:solidFill>
+                <a:latin typeface="Calibri" pitchFamily="34" charset="0"/>
+                <a:ea typeface="Calibri" pitchFamily="34" charset="-122"/>
+                <a:cs typeface="Calibri" pitchFamily="34" charset="-120"/>
+              </a:rPr>
+              <a:t>UserId and DocId as distinct types</a:t>
+            </a:r>
+            <a:endParaRPr lang="en-US" sz="1100" dirty="0"/>
+          </a:p>
+        </p:txBody>
+      </p:sp>
+      <p:sp>
+        <p:nvSpPr>
+          <p:cNvPr id="16" name="Shape 14"/>
+          <p:cNvSpPr/>
+          <p:nvPr/>
+        </p:nvSpPr>
+        <p:spPr>
+          <a:xfrm>
+            <a:off x="640080" y="3657600"/>
+            <a:ext cx="7863840" cy="1051560"/>
           </a:xfrm>
           <a:prstGeom prst="rect">
             <a:avLst/>
@@ -4810,37 +4779,51 @@
           </a:solidFill>
           <a:ln/>
         </p:spPr>
-      </p:sp>
-      <p:sp>
-        <p:nvSpPr>
-          <p:cNvPr id="12" name="Shape 10"/>
-          <p:cNvSpPr/>
-          <p:nvPr/>
-        </p:nvSpPr>
-        <p:spPr>
-          <a:xfrm>
-            <a:off x="640080" y="3502152"/>
-            <a:ext cx="54864" cy="457200"/>
-          </a:xfrm>
-          <a:prstGeom prst="rect">
+        <p:txBody>
+          <a:bodyPr/>
+          <a:lstStyle/>
+          <a:p>
+            <a:endParaRPr lang="en-US"/>
+          </a:p>
+        </p:txBody>
+      </p:sp>
+      <p:sp>
+        <p:nvSpPr>
+          <p:cNvPr id="17" name="Shape 15"/>
+          <p:cNvSpPr/>
+          <p:nvPr/>
+        </p:nvSpPr>
+        <p:spPr>
+          <a:xfrm>
+            <a:off x="822960" y="3886200"/>
+            <a:ext cx="502920" cy="502920"/>
+          </a:xfrm>
+          <a:prstGeom prst="line">
             <a:avLst/>
           </a:prstGeom>
           <a:solidFill>
-            <a:srgbClr val="10B981"/>
+            <a:srgbClr val="FBBF24"/>
           </a:solidFill>
           <a:ln/>
         </p:spPr>
-      </p:sp>
-      <p:sp>
-        <p:nvSpPr>
-          <p:cNvPr id="13" name="Text 11"/>
-          <p:cNvSpPr/>
-          <p:nvPr/>
-        </p:nvSpPr>
-        <p:spPr>
-          <a:xfrm>
-            <a:off x="914400" y="3502152"/>
-            <a:ext cx="2286000" cy="457200"/>
+        <p:txBody>
+          <a:bodyPr/>
+          <a:lstStyle/>
+          <a:p>
+            <a:endParaRPr lang="en-US"/>
+          </a:p>
+        </p:txBody>
+      </p:sp>
+      <p:sp>
+        <p:nvSpPr>
+          <p:cNvPr id="18" name="Text 16"/>
+          <p:cNvSpPr/>
+          <p:nvPr/>
+        </p:nvSpPr>
+        <p:spPr>
+          <a:xfrm>
+            <a:off x="822960" y="3886200"/>
+            <a:ext cx="502920" cy="502920"/>
           </a:xfrm>
           <a:prstGeom prst="rect">
             <a:avLst/>
@@ -4852,11 +4835,50 @@
           <a:bodyPr wrap="square" lIns="0" tIns="0" rIns="0" bIns="0" rtlCol="0" anchor="ctr"/>
           <a:lstStyle/>
           <a:p>
-            <a:pPr indent="0" marL="0">
-              <a:buNone/>
-            </a:pPr>
-            <a:r>
-              <a:rPr lang="en-US" sz="1300" b="1" dirty="0">
+            <a:pPr marL="0" indent="0" algn="ctr">
+              <a:buNone/>
+            </a:pPr>
+            <a:r>
+              <a:rPr lang="en-US" sz="1800" b="1" dirty="0">
+                <a:solidFill>
+                  <a:srgbClr val="1A1D23"/>
+                </a:solidFill>
+                <a:latin typeface="Trebuchet MS" pitchFamily="34" charset="0"/>
+                <a:ea typeface="Trebuchet MS" pitchFamily="34" charset="-122"/>
+                <a:cs typeface="Trebuchet MS" pitchFamily="34" charset="-120"/>
+              </a:rPr>
+              <a:t>3</a:t>
+            </a:r>
+            <a:endParaRPr lang="en-US" sz="1800" dirty="0"/>
+          </a:p>
+        </p:txBody>
+      </p:sp>
+      <p:sp>
+        <p:nvSpPr>
+          <p:cNvPr id="19" name="Text 17"/>
+          <p:cNvSpPr/>
+          <p:nvPr/>
+        </p:nvSpPr>
+        <p:spPr>
+          <a:xfrm>
+            <a:off x="1508760" y="3767328"/>
+            <a:ext cx="3657600" cy="320040"/>
+          </a:xfrm>
+          <a:prstGeom prst="rect">
+            <a:avLst/>
+          </a:prstGeom>
+          <a:noFill/>
+          <a:ln/>
+        </p:spPr>
+        <p:txBody>
+          <a:bodyPr wrap="square" lIns="0" tIns="0" rIns="0" bIns="0" rtlCol="0" anchor="ctr"/>
+          <a:lstStyle/>
+          <a:p>
+            <a:pPr marL="0" indent="0">
+              <a:buNone/>
+            </a:pPr>
+            <a:r>
+              <a:rPr lang="en-US" sz="1600" b="1" dirty="0">
                 <a:solidFill>
                   <a:srgbClr val="F1F5F9"/>
                 </a:solidFill>
@@ -4864,22 +4886,22 @@
                 <a:ea typeface="Calibri" pitchFamily="34" charset="-122"/>
                 <a:cs typeface="Calibri" pitchFamily="34" charset="-120"/>
               </a:rPr>
-              <a:t>const correctness</a:t>
-            </a:r>
-            <a:endParaRPr lang="en-US" sz="1300" dirty="0"/>
-          </a:p>
-        </p:txBody>
-      </p:sp>
-      <p:sp>
-        <p:nvSpPr>
-          <p:cNvPr id="14" name="Text 12"/>
-          <p:cNvSpPr/>
-          <p:nvPr/>
-        </p:nvSpPr>
-        <p:spPr>
-          <a:xfrm>
-            <a:off x="3200400" y="3502152"/>
-            <a:ext cx="5120640" cy="457200"/>
+              <a:t>Let the compiler work</a:t>
+            </a:r>
+            <a:endParaRPr lang="en-US" sz="1600" dirty="0"/>
+          </a:p>
+        </p:txBody>
+      </p:sp>
+      <p:sp>
+        <p:nvSpPr>
+          <p:cNvPr id="20" name="Text 18"/>
+          <p:cNvSpPr/>
+          <p:nvPr/>
+        </p:nvSpPr>
+        <p:spPr>
+          <a:xfrm>
+            <a:off x="1508760" y="4096512"/>
+            <a:ext cx="3657600" cy="274320"/>
           </a:xfrm>
           <a:prstGeom prst="rect">
             <a:avLst/>
@@ -4891,7 +4913,7 @@
           <a:bodyPr wrap="square" lIns="0" tIns="0" rIns="0" bIns="0" rtlCol="0" anchor="ctr"/>
           <a:lstStyle/>
           <a:p>
-            <a:pPr indent="0" marL="0">
+            <a:pPr marL="0" indent="0">
               <a:buNone/>
             </a:pPr>
             <a:r>
@@ -4903,7 +4925,7 @@
                 <a:ea typeface="Calibri" pitchFamily="34" charset="-122"/>
                 <a:cs typeface="Calibri" pitchFamily="34" charset="-120"/>
               </a:rPr>
-              <a:t>Read-only contracts — mutation rejected at compile time</a:t>
+              <a:t>Type-checking now catches mistakes at compile time</a:t>
             </a:r>
             <a:endParaRPr lang="en-US" sz="1100" dirty="0"/>
           </a:p>
@@ -4911,54 +4933,14 @@
       </p:sp>
       <p:sp>
         <p:nvSpPr>
-          <p:cNvPr id="15" name="Shape 13"/>
-          <p:cNvSpPr/>
-          <p:nvPr/>
-        </p:nvSpPr>
-        <p:spPr>
-          <a:xfrm>
-            <a:off x="640080" y="4032504"/>
-            <a:ext cx="7863840" cy="457200"/>
-          </a:xfrm>
-          <a:prstGeom prst="rect">
-            <a:avLst/>
-          </a:prstGeom>
-          <a:solidFill>
-            <a:srgbClr val="22262E"/>
-          </a:solidFill>
-          <a:ln/>
-        </p:spPr>
-      </p:sp>
-      <p:sp>
-        <p:nvSpPr>
-          <p:cNvPr id="16" name="Shape 14"/>
-          <p:cNvSpPr/>
-          <p:nvPr/>
-        </p:nvSpPr>
-        <p:spPr>
-          <a:xfrm>
-            <a:off x="640080" y="4032504"/>
-            <a:ext cx="54864" cy="457200"/>
-          </a:xfrm>
-          <a:prstGeom prst="rect">
-            <a:avLst/>
-          </a:prstGeom>
-          <a:solidFill>
-            <a:srgbClr val="FBBF24"/>
-          </a:solidFill>
-          <a:ln/>
-        </p:spPr>
-      </p:sp>
-      <p:sp>
-        <p:nvSpPr>
-          <p:cNvPr id="17" name="Text 15"/>
-          <p:cNvSpPr/>
-          <p:nvPr/>
-        </p:nvSpPr>
-        <p:spPr>
-          <a:xfrm>
-            <a:off x="914400" y="4032504"/>
-            <a:ext cx="2286000" cy="457200"/>
+          <p:cNvPr id="21" name="Text 19"/>
+          <p:cNvSpPr/>
+          <p:nvPr/>
+        </p:nvSpPr>
+        <p:spPr>
+          <a:xfrm>
+            <a:off x="5303520" y="3767328"/>
+            <a:ext cx="3017520" cy="822960"/>
           </a:xfrm>
           <a:prstGeom prst="rect">
             <a:avLst/>
@@ -4970,136 +4952,58 @@
           <a:bodyPr wrap="square" lIns="0" tIns="0" rIns="0" bIns="0" rtlCol="0" anchor="ctr"/>
           <a:lstStyle/>
           <a:p>
-            <a:pPr indent="0" marL="0">
-              <a:buNone/>
-            </a:pPr>
-            <a:r>
-              <a:rPr lang="en-US" sz="1300" b="1" dirty="0">
-                <a:solidFill>
-                  <a:srgbClr val="F1F5F9"/>
+            <a:pPr marL="0" indent="0">
+              <a:buNone/>
+            </a:pPr>
+            <a:r>
+              <a:rPr lang="en-US" sz="1100" i="1" dirty="0">
+                <a:solidFill>
+                  <a:srgbClr val="64748B"/>
                 </a:solidFill>
                 <a:latin typeface="Calibri" pitchFamily="34" charset="0"/>
                 <a:ea typeface="Calibri" pitchFamily="34" charset="-122"/>
                 <a:cs typeface="Calibri" pitchFamily="34" charset="-120"/>
               </a:rPr>
-              <a:t>Your custom types</a:t>
-            </a:r>
-            <a:endParaRPr lang="en-US" sz="1300" dirty="0"/>
-          </a:p>
-        </p:txBody>
-      </p:sp>
-      <p:sp>
-        <p:nvSpPr>
-          <p:cNvPr id="18" name="Text 16"/>
-          <p:cNvSpPr/>
-          <p:nvPr/>
-        </p:nvSpPr>
-        <p:spPr>
-          <a:xfrm>
-            <a:off x="3200400" y="4032504"/>
-            <a:ext cx="5120640" cy="457200"/>
-          </a:xfrm>
-          <a:prstGeom prst="rect">
-            <a:avLst/>
-          </a:prstGeom>
-          <a:noFill/>
-          <a:ln/>
-        </p:spPr>
-        <p:txBody>
-          <a:bodyPr wrap="square" lIns="0" tIns="0" rIns="0" bIns="0" rtlCol="0" anchor="ctr"/>
-          <a:lstStyle/>
-          <a:p>
-            <a:pPr indent="0" marL="0">
-              <a:buNone/>
-            </a:pPr>
-            <a:r>
-              <a:rPr lang="en-US" sz="1100" dirty="0">
-                <a:solidFill>
-                  <a:srgbClr val="94A3B8"/>
+              <a:t>No runtime cost, no discipline required</a:t>
+            </a:r>
+            <a:endParaRPr lang="en-US" sz="1100" dirty="0"/>
+          </a:p>
+        </p:txBody>
+      </p:sp>
+      <p:sp>
+        <p:nvSpPr>
+          <p:cNvPr id="22" name="Text 20"/>
+          <p:cNvSpPr/>
+          <p:nvPr/>
+        </p:nvSpPr>
+        <p:spPr>
+          <a:xfrm>
+            <a:off x="7772400" y="4754880"/>
+            <a:ext cx="1097280" cy="320040"/>
+          </a:xfrm>
+          <a:prstGeom prst="rect">
+            <a:avLst/>
+          </a:prstGeom>
+          <a:noFill/>
+          <a:ln/>
+        </p:spPr>
+        <p:txBody>
+          <a:bodyPr wrap="square" rtlCol="0" anchor="ctr"/>
+          <a:lstStyle/>
+          <a:p>
+            <a:pPr marL="0" indent="0" algn="r">
+              <a:buNone/>
+            </a:pPr>
+            <a:r>
+              <a:rPr lang="en-US" sz="900" dirty="0">
+                <a:solidFill>
+                  <a:srgbClr val="64748B"/>
                 </a:solidFill>
                 <a:latin typeface="Calibri" pitchFamily="34" charset="0"/>
                 <a:ea typeface="Calibri" pitchFamily="34" charset="-122"/>
                 <a:cs typeface="Calibri" pitchFamily="34" charset="-120"/>
               </a:rPr>
-              <a:t>UserId ≠ DocId — semantic rules encoded as types</a:t>
-            </a:r>
-            <a:endParaRPr lang="en-US" sz="1100" dirty="0"/>
-          </a:p>
-        </p:txBody>
-      </p:sp>
-      <p:sp>
-        <p:nvSpPr>
-          <p:cNvPr id="19" name="Text 17"/>
-          <p:cNvSpPr/>
-          <p:nvPr/>
-        </p:nvSpPr>
-        <p:spPr>
-          <a:xfrm>
-            <a:off x="640080" y="4617720"/>
-            <a:ext cx="7863840" cy="320040"/>
-          </a:xfrm>
-          <a:prstGeom prst="rect">
-            <a:avLst/>
-          </a:prstGeom>
-          <a:noFill/>
-          <a:ln/>
-        </p:spPr>
-        <p:txBody>
-          <a:bodyPr wrap="square" lIns="0" tIns="0" rIns="0" bIns="0" rtlCol="0" anchor="ctr"/>
-          <a:lstStyle/>
-          <a:p>
-            <a:pPr indent="0" marL="0">
-              <a:buNone/>
-            </a:pPr>
-            <a:r>
-              <a:rPr lang="en-US" sz="1200" i="1" dirty="0">
-                <a:solidFill>
-                  <a:srgbClr val="FBBF24"/>
-                </a:solidFill>
-                <a:latin typeface="Calibri" pitchFamily="34" charset="0"/>
-                <a:ea typeface="Calibri" pitchFamily="34" charset="-122"/>
-                <a:cs typeface="Calibri" pitchFamily="34" charset="-120"/>
-              </a:rPr>
-              <a:t>The type system is already there. We're just using more of it.</a:t>
-            </a:r>
-            <a:endParaRPr lang="en-US" sz="1200" dirty="0"/>
-          </a:p>
-        </p:txBody>
-      </p:sp>
-      <p:sp>
-        <p:nvSpPr>
-          <p:cNvPr id="20" name="Text 18"/>
-          <p:cNvSpPr/>
-          <p:nvPr/>
-        </p:nvSpPr>
-        <p:spPr>
-          <a:xfrm>
-            <a:off x="7772400" y="4754880"/>
-            <a:ext cx="1097280" cy="320040"/>
-          </a:xfrm>
-          <a:prstGeom prst="rect">
-            <a:avLst/>
-          </a:prstGeom>
-          <a:noFill/>
-          <a:ln/>
-        </p:spPr>
-        <p:txBody>
-          <a:bodyPr wrap="square" rtlCol="0" anchor="ctr"/>
-          <a:lstStyle/>
-          <a:p>
-            <a:pPr algn="r" indent="0" marL="0">
-              <a:buNone/>
-            </a:pPr>
-            <a:r>
-              <a:rPr lang="en-US" sz="900" dirty="0">
-                <a:solidFill>
-                  <a:srgbClr val="64748B"/>
-                </a:solidFill>
-                <a:latin typeface="Calibri" pitchFamily="34" charset="0"/>
-                <a:ea typeface="Calibri" pitchFamily="34" charset="-122"/>
-                <a:cs typeface="Calibri" pitchFamily="34" charset="-120"/>
-              </a:rPr>
-              <a:t>7 / 7</a:t>
+              <a:t>6 / 7</a:t>
             </a:r>
             <a:endParaRPr lang="en-US" sz="900" dirty="0"/>
           </a:p>
@@ -5115,12 +5019,13 @@
 
 <file path=ppt/slides/slide7.xml><?xml version="1.0" encoding="utf-8"?>
 <p:sld xmlns:a="http://schemas.openxmlformats.org/drawingml/2006/main" xmlns:r="http://schemas.openxmlformats.org/officeDocument/2006/relationships" xmlns:p="http://schemas.openxmlformats.org/presentationml/2006/main">
-  <p:cSld name="Slide 4">
+  <p:cSld name="Slide 6">
     <p:bg>
       <p:bgPr>
         <a:solidFill>
           <a:srgbClr val="1A1D23"/>
         </a:solidFill>
+        <a:effectLst/>
       </p:bgPr>
     </p:bg>
     <p:spTree>
@@ -5139,7 +5044,7 @@
       </p:grpSpPr>
       <p:sp>
         <p:nvSpPr>
-          <p:cNvPr id="2" name="Title"/>
+          <p:cNvPr id="2" name="Text 0"/>
           <p:cNvSpPr/>
           <p:nvPr/>
         </p:nvSpPr>
@@ -5158,7 +5063,7 @@
           <a:bodyPr wrap="square" lIns="0" tIns="0" rIns="0" bIns="0" rtlCol="0" anchor="ctr"/>
           <a:lstStyle/>
           <a:p>
-            <a:pPr indent="0" marL="0">
+            <a:pPr marL="0" indent="0">
               <a:buNone/>
             </a:pPr>
             <a:r>
@@ -5170,7 +5075,7 @@
                 <a:ea typeface="Trebuchet MS" pitchFamily="34" charset="-122"/>
                 <a:cs typeface="Trebuchet MS" pitchFamily="34" charset="-120"/>
               </a:rPr>
-              <a:t>CONST CHOOSES BEHAVIOR</a:t>
+              <a:t>THE PAYOFF</a:t>
             </a:r>
             <a:endParaRPr lang="en-US" sz="2800" dirty="0"/>
           </a:p>
@@ -5178,14 +5083,14 @@
       </p:sp>
       <p:sp>
         <p:nvSpPr>
-          <p:cNvPr id="3" name="Subtitle"/>
-          <p:cNvSpPr/>
-          <p:nvPr/>
-        </p:nvSpPr>
-        <p:spPr>
-          <a:xfrm>
-            <a:off x="502920" y="777240"/>
-            <a:ext cx="8138160" cy="320040"/>
+          <p:cNvPr id="3" name="Text 1"/>
+          <p:cNvSpPr/>
+          <p:nvPr/>
+        </p:nvSpPr>
+        <p:spPr>
+          <a:xfrm>
+            <a:off x="640080" y="1097280"/>
+            <a:ext cx="7863840" cy="411480"/>
           </a:xfrm>
           <a:prstGeom prst="rect">
             <a:avLst/>
@@ -5197,11 +5102,11 @@
           <a:bodyPr wrap="square" lIns="0" tIns="0" rIns="0" bIns="0" rtlCol="0" anchor="ctr"/>
           <a:lstStyle/>
           <a:p>
-            <a:pPr indent="0" marL="0">
-              <a:buNone/>
-            </a:pPr>
-            <a:r>
-              <a:rPr lang="en-US" sz="1200" dirty="0">
+            <a:pPr marL="0" indent="0">
+              <a:buNone/>
+            </a:pPr>
+            <a:r>
+              <a:rPr lang="en-US" sz="1600" dirty="0">
                 <a:solidFill>
                   <a:srgbClr val="94A3B8"/>
                 </a:solidFill>
@@ -5209,140 +5114,22 @@
                 <a:ea typeface="Calibri" pitchFamily="34" charset="-122"/>
                 <a:cs typeface="Calibri" pitchFamily="34" charset="-120"/>
               </a:rPr>
-              <a:t>The type system doesn’t just block writes — it selects different code paths</a:t>
-            </a:r>
-            <a:endParaRPr lang="en-US" sz="1200" dirty="0"/>
-          </a:p>
-        </p:txBody>
-      </p:sp>
-      <p:sp>
-        <p:nvSpPr>
-          <p:cNvPr id="4" name="CodeBg"/>
-          <p:cNvSpPr/>
-          <p:nvPr/>
-        </p:nvSpPr>
-        <p:spPr>
-          <a:xfrm>
-            <a:off x="502920" y="1188720"/>
-            <a:ext cx="8138160" cy="1143000"/>
-          </a:xfrm>
-          <a:prstGeom prst="rect">
-            <a:avLst/>
-          </a:prstGeom>
-          <a:solidFill>
-            <a:srgbClr val="181B20"/>
-          </a:solidFill>
-          <a:ln/>
-        </p:spPr>
-      </p:sp>
-      <p:sp>
-        <p:nvSpPr>
-          <p:cNvPr id="5" name="MatrixCode"/>
-          <p:cNvSpPr/>
-          <p:nvPr/>
-        </p:nvSpPr>
-        <p:spPr>
-          <a:xfrm>
-            <a:off x="640080" y="1280160"/>
-            <a:ext cx="7863840" cy="960120"/>
-          </a:xfrm>
-          <a:prstGeom prst="rect">
-            <a:avLst/>
-          </a:prstGeom>
-          <a:noFill/>
-          <a:ln/>
-        </p:spPr>
-        <p:txBody>
-          <a:bodyPr wrap="square" lIns="0" tIns="0" rIns="0" bIns="0" rtlCol="0" anchor="t"/>
-          <a:lstStyle/>
-          <a:p>
-            <a:pPr indent="0" marL="0">
-              <a:spcAft>
-                <a:spcPts val="200"/>
-              </a:spcAft>
-              <a:buNone/>
-            </a:pPr>
-            <a:r>
-              <a:rPr lang="en-US" sz="950" dirty="0">
-                <a:solidFill>
-                  <a:srgbClr val="D4D4D4"/>
-                </a:solidFill>
-                <a:latin typeface="Consolas" pitchFamily="34" charset="0"/>
-                <a:ea typeface="Consolas" pitchFamily="34" charset="-122"/>
-                <a:cs typeface="Consolas" pitchFamily="34" charset="-120"/>
-              </a:rPr>
-              <a:t>class Matrix {</a:t>
-            </a:r>
-          </a:p>
-          <a:p>
-            <a:pPr indent="0" marL="0">
-              <a:spcAft>
-                <a:spcPts val="200"/>
-              </a:spcAft>
-              <a:buNone/>
-            </a:pPr>
-            <a:r>
-              <a:rPr lang="en-US" sz="950" dirty="0">
-                <a:solidFill>
-                  <a:srgbClr val="D4D4D4"/>
-                </a:solidFill>
-                <a:latin typeface="Consolas" pitchFamily="34" charset="0"/>
-                <a:ea typeface="Consolas" pitchFamily="34" charset="-122"/>
-                <a:cs typeface="Consolas" pitchFamily="34" charset="-120"/>
-              </a:rPr>
-              <a:t xml:space="preserve">    double&amp;       operator()(int r, int c);        // called on Matrix&amp;</a:t>
-            </a:r>
-          </a:p>
-          <a:p>
-            <a:pPr indent="0" marL="0">
-              <a:spcAft>
-                <a:spcPts val="200"/>
-              </a:spcAft>
-              <a:buNone/>
-            </a:pPr>
-            <a:r>
-              <a:rPr lang="en-US" sz="950" dirty="0">
-                <a:solidFill>
-                  <a:srgbClr val="D4D4D4"/>
-                </a:solidFill>
-                <a:latin typeface="Consolas" pitchFamily="34" charset="0"/>
-                <a:ea typeface="Consolas" pitchFamily="34" charset="-122"/>
-                <a:cs typeface="Consolas" pitchFamily="34" charset="-120"/>
-              </a:rPr>
-              <a:t xml:space="preserve">    const double&amp; operator()(int r, int c) const; // called on const Matrix&amp;</a:t>
-            </a:r>
-          </a:p>
-          <a:p>
-            <a:pPr indent="0" marL="0">
-              <a:spcAft>
-                <a:spcPts val="200"/>
-              </a:spcAft>
-              <a:buNone/>
-            </a:pPr>
-            <a:r>
-              <a:rPr lang="en-US" sz="950" dirty="0">
-                <a:solidFill>
-                  <a:srgbClr val="D4D4D4"/>
-                </a:solidFill>
-                <a:latin typeface="Consolas" pitchFamily="34" charset="0"/>
-                <a:ea typeface="Consolas" pitchFamily="34" charset="-122"/>
-                <a:cs typeface="Consolas" pitchFamily="34" charset="-120"/>
-              </a:rPr>
-              <a:t>};</a:t>
-            </a:r>
-          </a:p>
-        </p:txBody>
-      </p:sp>
-      <p:sp>
-        <p:nvSpPr>
-          <p:cNvPr id="6" name="Explanation"/>
-          <p:cNvSpPr/>
-          <p:nvPr/>
-        </p:nvSpPr>
-        <p:spPr>
-          <a:xfrm>
-            <a:off x="502920" y="2468880"/>
-            <a:ext cx="8138160" cy="320040"/>
+              <a:t>If the compiler accepts your code,</a:t>
+            </a:r>
+            <a:endParaRPr lang="en-US" sz="1600" dirty="0"/>
+          </a:p>
+        </p:txBody>
+      </p:sp>
+      <p:sp>
+        <p:nvSpPr>
+          <p:cNvPr id="4" name="Text 2"/>
+          <p:cNvSpPr/>
+          <p:nvPr/>
+        </p:nvSpPr>
+        <p:spPr>
+          <a:xfrm>
+            <a:off x="640080" y="1508760"/>
+            <a:ext cx="7863840" cy="548640"/>
           </a:xfrm>
           <a:prstGeom prst="rect">
             <a:avLst/>
@@ -5354,34 +5141,123 @@
           <a:bodyPr wrap="square" lIns="0" tIns="0" rIns="0" bIns="0" rtlCol="0" anchor="ctr"/>
           <a:lstStyle/>
           <a:p>
-            <a:pPr indent="0" marL="0">
-              <a:buNone/>
-            </a:pPr>
-            <a:r>
-              <a:rPr lang="en-US" sz="1300" b="1" dirty="0">
+            <a:pPr marL="0" indent="0">
+              <a:buNone/>
+            </a:pPr>
+            <a:r>
+              <a:rPr lang="en-US" sz="2800" b="1" dirty="0">
                 <a:solidFill>
                   <a:srgbClr val="F1F5F9"/>
+                </a:solidFill>
+                <a:latin typeface="Trebuchet MS" pitchFamily="34" charset="0"/>
+                <a:ea typeface="Trebuchet MS" pitchFamily="34" charset="-122"/>
+                <a:cs typeface="Trebuchet MS" pitchFamily="34" charset="-120"/>
+              </a:rPr>
+              <a:t>certain bugs are impossible.</a:t>
+            </a:r>
+            <a:endParaRPr lang="en-US" sz="2800" dirty="0"/>
+          </a:p>
+        </p:txBody>
+      </p:sp>
+      <p:sp>
+        <p:nvSpPr>
+          <p:cNvPr id="5" name="Text 3"/>
+          <p:cNvSpPr/>
+          <p:nvPr/>
+        </p:nvSpPr>
+        <p:spPr>
+          <a:xfrm>
+            <a:off x="640080" y="2057400"/>
+            <a:ext cx="7863840" cy="320040"/>
+          </a:xfrm>
+          <a:prstGeom prst="rect">
+            <a:avLst/>
+          </a:prstGeom>
+          <a:noFill/>
+          <a:ln/>
+        </p:spPr>
+        <p:txBody>
+          <a:bodyPr wrap="square" lIns="0" tIns="0" rIns="0" bIns="0" rtlCol="0" anchor="ctr"/>
+          <a:lstStyle/>
+          <a:p>
+            <a:pPr marL="0" indent="0">
+              <a:buNone/>
+            </a:pPr>
+            <a:r>
+              <a:rPr lang="en-US" sz="1200" dirty="0">
+                <a:solidFill>
+                  <a:srgbClr val="64748B"/>
                 </a:solidFill>
                 <a:latin typeface="Calibri" pitchFamily="34" charset="0"/>
                 <a:ea typeface="Calibri" pitchFamily="34" charset="-122"/>
                 <a:cs typeface="Calibri" pitchFamily="34" charset="-120"/>
               </a:rPr>
-              <a:t>Same name, same arguments. The compiler picks which one to call:</a:t>
-            </a:r>
-            <a:endParaRPr lang="en-US" sz="1300" dirty="0"/>
-          </a:p>
-        </p:txBody>
-      </p:sp>
-      <p:sp>
-        <p:nvSpPr>
-          <p:cNvPr id="7" name="LeftCallBg"/>
-          <p:cNvSpPr/>
-          <p:nvPr/>
-        </p:nvSpPr>
-        <p:spPr>
-          <a:xfrm>
-            <a:off x="502920" y="2834640"/>
-            <a:ext cx="3931920" cy="685800"/>
+              <a:t>Not "unlikely." Not "tested for." </a:t>
+            </a:r>
+            <a:r>
+              <a:rPr lang="en-US" sz="1200" b="1" dirty="0">
+                <a:solidFill>
+                  <a:srgbClr val="34D399"/>
+                </a:solidFill>
+                <a:latin typeface="Calibri" pitchFamily="34" charset="0"/>
+                <a:ea typeface="Calibri" pitchFamily="34" charset="-122"/>
+                <a:cs typeface="Calibri" pitchFamily="34" charset="-120"/>
+              </a:rPr>
+              <a:t>Impossible.</a:t>
+            </a:r>
+            <a:endParaRPr lang="en-US" sz="1200" dirty="0"/>
+          </a:p>
+        </p:txBody>
+      </p:sp>
+      <p:sp>
+        <p:nvSpPr>
+          <p:cNvPr id="6" name="Text 4"/>
+          <p:cNvSpPr/>
+          <p:nvPr/>
+        </p:nvSpPr>
+        <p:spPr>
+          <a:xfrm>
+            <a:off x="640080" y="2606040"/>
+            <a:ext cx="7863840" cy="320040"/>
+          </a:xfrm>
+          <a:prstGeom prst="rect">
+            <a:avLst/>
+          </a:prstGeom>
+          <a:noFill/>
+          <a:ln/>
+        </p:spPr>
+        <p:txBody>
+          <a:bodyPr wrap="square" lIns="0" tIns="0" rIns="0" bIns="0" rtlCol="0" anchor="ctr"/>
+          <a:lstStyle/>
+          <a:p>
+            <a:pPr marL="0" indent="0">
+              <a:buNone/>
+            </a:pPr>
+            <a:r>
+              <a:rPr lang="en-US" sz="1200" dirty="0">
+                <a:solidFill>
+                  <a:srgbClr val="94A3B8"/>
+                </a:solidFill>
+                <a:latin typeface="Calibri" pitchFamily="34" charset="0"/>
+                <a:ea typeface="Calibri" pitchFamily="34" charset="-122"/>
+                <a:cs typeface="Calibri" pitchFamily="34" charset="-120"/>
+              </a:rPr>
+              <a:t>The compiler already enforces:</a:t>
+            </a:r>
+            <a:endParaRPr lang="en-US" sz="1200" dirty="0"/>
+          </a:p>
+        </p:txBody>
+      </p:sp>
+      <p:sp>
+        <p:nvSpPr>
+          <p:cNvPr id="7" name="Shape 5"/>
+          <p:cNvSpPr/>
+          <p:nvPr/>
+        </p:nvSpPr>
+        <p:spPr>
+          <a:xfrm>
+            <a:off x="640080" y="2971800"/>
+            <a:ext cx="7863840" cy="457200"/>
           </a:xfrm>
           <a:prstGeom prst="rect">
             <a:avLst/>
@@ -5391,77 +5267,51 @@
           </a:solidFill>
           <a:ln/>
         </p:spPr>
-      </p:sp>
-      <p:sp>
-        <p:nvSpPr>
-          <p:cNvPr id="8" name="LeftCallCode"/>
-          <p:cNvSpPr/>
-          <p:nvPr/>
-        </p:nvSpPr>
-        <p:spPr>
-          <a:xfrm>
-            <a:off x="640080" y="2926080"/>
-            <a:ext cx="3657600" cy="502920"/>
-          </a:xfrm>
-          <a:prstGeom prst="rect">
-            <a:avLst/>
-          </a:prstGeom>
-          <a:noFill/>
-          <a:ln/>
-        </p:spPr>
-        <p:txBody>
-          <a:bodyPr wrap="square" lIns="0" tIns="0" rIns="0" bIns="0" rtlCol="0" anchor="t"/>
-          <a:lstStyle/>
-          <a:p>
-            <a:pPr indent="0" marL="0">
-              <a:spcAft>
-                <a:spcPts val="200"/>
-              </a:spcAft>
-              <a:buNone/>
-            </a:pPr>
-            <a:r>
-              <a:rPr lang="en-US" sz="950" dirty="0">
-                <a:solidFill>
-                  <a:srgbClr val="D4D4D4"/>
-                </a:solidFill>
-                <a:latin typeface="Consolas" pitchFamily="34" charset="0"/>
-                <a:ea typeface="Consolas" pitchFamily="34" charset="-122"/>
-                <a:cs typeface="Consolas" pitchFamily="34" charset="-120"/>
-              </a:rPr>
-              <a:t>Matrix m(3, 3);</a:t>
-            </a:r>
-          </a:p>
-          <a:p>
-            <a:pPr indent="0" marL="0">
-              <a:spcAft>
-                <a:spcPts val="200"/>
-              </a:spcAft>
-              <a:buNone/>
-            </a:pPr>
-            <a:r>
-              <a:rPr lang="en-US" sz="950" dirty="0">
-                <a:solidFill>
-                  <a:srgbClr val="D4D4D4"/>
-                </a:solidFill>
-                <a:latin typeface="Consolas" pitchFamily="34" charset="0"/>
-                <a:ea typeface="Consolas" pitchFamily="34" charset="-122"/>
-                <a:cs typeface="Consolas" pitchFamily="34" charset="-120"/>
-              </a:rPr>
-              <a:t>m(0, 0) = 5.0;  // returns double&amp;</a:t>
-            </a:r>
-          </a:p>
-        </p:txBody>
-      </p:sp>
-      <p:sp>
-        <p:nvSpPr>
-          <p:cNvPr id="9" name="LeftAnnotation"/>
-          <p:cNvSpPr/>
-          <p:nvPr/>
-        </p:nvSpPr>
-        <p:spPr>
-          <a:xfrm>
-            <a:off x="502920" y="3566160"/>
-            <a:ext cx="3931920" cy="274320"/>
+        <p:txBody>
+          <a:bodyPr/>
+          <a:lstStyle/>
+          <a:p>
+            <a:endParaRPr lang="en-US"/>
+          </a:p>
+        </p:txBody>
+      </p:sp>
+      <p:sp>
+        <p:nvSpPr>
+          <p:cNvPr id="8" name="Shape 6"/>
+          <p:cNvSpPr/>
+          <p:nvPr/>
+        </p:nvSpPr>
+        <p:spPr>
+          <a:xfrm>
+            <a:off x="640080" y="2971800"/>
+            <a:ext cx="54864" cy="457200"/>
+          </a:xfrm>
+          <a:prstGeom prst="rect">
+            <a:avLst/>
+          </a:prstGeom>
+          <a:solidFill>
+            <a:srgbClr val="60A5FA"/>
+          </a:solidFill>
+          <a:ln/>
+        </p:spPr>
+        <p:txBody>
+          <a:bodyPr/>
+          <a:lstStyle/>
+          <a:p>
+            <a:endParaRPr lang="en-US"/>
+          </a:p>
+        </p:txBody>
+      </p:sp>
+      <p:sp>
+        <p:nvSpPr>
+          <p:cNvPr id="9" name="Text 7"/>
+          <p:cNvSpPr/>
+          <p:nvPr/>
+        </p:nvSpPr>
+        <p:spPr>
+          <a:xfrm>
+            <a:off x="914400" y="2971800"/>
+            <a:ext cx="2286000" cy="457200"/>
           </a:xfrm>
           <a:prstGeom prst="rect">
             <a:avLst/>
@@ -5473,34 +5323,73 @@
           <a:bodyPr wrap="square" lIns="0" tIns="0" rIns="0" bIns="0" rtlCol="0" anchor="ctr"/>
           <a:lstStyle/>
           <a:p>
-            <a:pPr indent="0" marL="0">
-              <a:buNone/>
-            </a:pPr>
-            <a:r>
-              <a:rPr lang="en-US" sz="1000" i="1" dirty="0">
-                <a:solidFill>
-                  <a:srgbClr val="4ADE80"/>
+            <a:pPr marL="0" indent="0">
+              <a:buNone/>
+            </a:pPr>
+            <a:r>
+              <a:rPr lang="en-US" sz="1300" b="1" dirty="0">
+                <a:solidFill>
+                  <a:srgbClr val="F1F5F9"/>
                 </a:solidFill>
                 <a:latin typeface="Calibri" pitchFamily="34" charset="0"/>
                 <a:ea typeface="Calibri" pitchFamily="34" charset="-122"/>
                 <a:cs typeface="Calibri" pitchFamily="34" charset="-120"/>
               </a:rPr>
-              <a:t>Mutable reference → can write</a:t>
-            </a:r>
-            <a:endParaRPr lang="en-US" sz="1000" dirty="0"/>
-          </a:p>
-        </p:txBody>
-      </p:sp>
-      <p:sp>
-        <p:nvSpPr>
-          <p:cNvPr id="10" name="RightCallBg"/>
-          <p:cNvSpPr/>
-          <p:nvPr/>
-        </p:nvSpPr>
-        <p:spPr>
-          <a:xfrm>
-            <a:off x="4709160" y="2834640"/>
-            <a:ext cx="3931920" cy="685800"/>
+              <a:t>Built-in types</a:t>
+            </a:r>
+            <a:endParaRPr lang="en-US" sz="1300" dirty="0"/>
+          </a:p>
+        </p:txBody>
+      </p:sp>
+      <p:sp>
+        <p:nvSpPr>
+          <p:cNvPr id="10" name="Text 8"/>
+          <p:cNvSpPr/>
+          <p:nvPr/>
+        </p:nvSpPr>
+        <p:spPr>
+          <a:xfrm>
+            <a:off x="3200400" y="2971800"/>
+            <a:ext cx="5120640" cy="457200"/>
+          </a:xfrm>
+          <a:prstGeom prst="rect">
+            <a:avLst/>
+          </a:prstGeom>
+          <a:noFill/>
+          <a:ln/>
+        </p:spPr>
+        <p:txBody>
+          <a:bodyPr wrap="square" lIns="0" tIns="0" rIns="0" bIns="0" rtlCol="0" anchor="ctr"/>
+          <a:lstStyle/>
+          <a:p>
+            <a:pPr marL="0" indent="0">
+              <a:buNone/>
+            </a:pPr>
+            <a:r>
+              <a:rPr lang="en-US" sz="1100" dirty="0">
+                <a:solidFill>
+                  <a:srgbClr val="94A3B8"/>
+                </a:solidFill>
+                <a:latin typeface="Calibri" pitchFamily="34" charset="0"/>
+                <a:ea typeface="Calibri" pitchFamily="34" charset="-122"/>
+                <a:cs typeface="Calibri" pitchFamily="34" charset="-120"/>
+              </a:rPr>
+              <a:t>string ≠ int, int* ≠ char*</a:t>
+            </a:r>
+            <a:endParaRPr lang="en-US" sz="1100" dirty="0"/>
+          </a:p>
+        </p:txBody>
+      </p:sp>
+      <p:sp>
+        <p:nvSpPr>
+          <p:cNvPr id="11" name="Shape 9"/>
+          <p:cNvSpPr/>
+          <p:nvPr/>
+        </p:nvSpPr>
+        <p:spPr>
+          <a:xfrm>
+            <a:off x="640080" y="3502152"/>
+            <a:ext cx="7863840" cy="457200"/>
           </a:xfrm>
           <a:prstGeom prst="rect">
             <a:avLst/>
@@ -5510,77 +5399,51 @@
           </a:solidFill>
           <a:ln/>
         </p:spPr>
-      </p:sp>
-      <p:sp>
-        <p:nvSpPr>
-          <p:cNvPr id="11" name="RightCallCode"/>
-          <p:cNvSpPr/>
-          <p:nvPr/>
-        </p:nvSpPr>
-        <p:spPr>
-          <a:xfrm>
-            <a:off x="4846320" y="2926080"/>
-            <a:ext cx="3657600" cy="502920"/>
-          </a:xfrm>
-          <a:prstGeom prst="rect">
-            <a:avLst/>
-          </a:prstGeom>
-          <a:noFill/>
-          <a:ln/>
-        </p:spPr>
-        <p:txBody>
-          <a:bodyPr wrap="square" lIns="0" tIns="0" rIns="0" bIns="0" rtlCol="0" anchor="t"/>
-          <a:lstStyle/>
-          <a:p>
-            <a:pPr indent="0" marL="0">
-              <a:spcAft>
-                <a:spcPts val="200"/>
-              </a:spcAft>
-              <a:buNone/>
-            </a:pPr>
-            <a:r>
-              <a:rPr lang="en-US" sz="950" dirty="0">
-                <a:solidFill>
-                  <a:srgbClr val="D4D4D4"/>
-                </a:solidFill>
-                <a:latin typeface="Consolas" pitchFamily="34" charset="0"/>
-                <a:ea typeface="Consolas" pitchFamily="34" charset="-122"/>
-                <a:cs typeface="Consolas" pitchFamily="34" charset="-120"/>
-              </a:rPr>
-              <a:t>const Matrix&amp; cm = m;</a:t>
-            </a:r>
-          </a:p>
-          <a:p>
-            <a:pPr indent="0" marL="0">
-              <a:spcAft>
-                <a:spcPts val="200"/>
-              </a:spcAft>
-              <a:buNone/>
-            </a:pPr>
-            <a:r>
-              <a:rPr lang="en-US" sz="950" dirty="0">
-                <a:solidFill>
-                  <a:srgbClr val="D4D4D4"/>
-                </a:solidFill>
-                <a:latin typeface="Consolas" pitchFamily="34" charset="0"/>
-                <a:ea typeface="Consolas" pitchFamily="34" charset="-122"/>
-                <a:cs typeface="Consolas" pitchFamily="34" charset="-120"/>
-              </a:rPr>
-              <a:t>double v = cm(0, 0); // returns const double&amp;</a:t>
-            </a:r>
-          </a:p>
-        </p:txBody>
-      </p:sp>
-      <p:sp>
-        <p:nvSpPr>
-          <p:cNvPr id="12" name="RightAnnotation"/>
-          <p:cNvSpPr/>
-          <p:nvPr/>
-        </p:nvSpPr>
-        <p:spPr>
-          <a:xfrm>
-            <a:off x="4709160" y="3566160"/>
-            <a:ext cx="3931920" cy="274320"/>
+        <p:txBody>
+          <a:bodyPr/>
+          <a:lstStyle/>
+          <a:p>
+            <a:endParaRPr lang="en-US"/>
+          </a:p>
+        </p:txBody>
+      </p:sp>
+      <p:sp>
+        <p:nvSpPr>
+          <p:cNvPr id="12" name="Shape 10"/>
+          <p:cNvSpPr/>
+          <p:nvPr/>
+        </p:nvSpPr>
+        <p:spPr>
+          <a:xfrm>
+            <a:off x="640080" y="3502152"/>
+            <a:ext cx="54864" cy="457200"/>
+          </a:xfrm>
+          <a:prstGeom prst="rect">
+            <a:avLst/>
+          </a:prstGeom>
+          <a:solidFill>
+            <a:srgbClr val="10B981"/>
+          </a:solidFill>
+          <a:ln/>
+        </p:spPr>
+        <p:txBody>
+          <a:bodyPr/>
+          <a:lstStyle/>
+          <a:p>
+            <a:endParaRPr lang="en-US"/>
+          </a:p>
+        </p:txBody>
+      </p:sp>
+      <p:sp>
+        <p:nvSpPr>
+          <p:cNvPr id="13" name="Text 11"/>
+          <p:cNvSpPr/>
+          <p:nvPr/>
+        </p:nvSpPr>
+        <p:spPr>
+          <a:xfrm>
+            <a:off x="914400" y="3502152"/>
+            <a:ext cx="2286000" cy="457200"/>
           </a:xfrm>
           <a:prstGeom prst="rect">
             <a:avLst/>
@@ -5592,34 +5455,73 @@
           <a:bodyPr wrap="square" lIns="0" tIns="0" rIns="0" bIns="0" rtlCol="0" anchor="ctr"/>
           <a:lstStyle/>
           <a:p>
-            <a:pPr indent="0" marL="0">
-              <a:buNone/>
-            </a:pPr>
-            <a:r>
-              <a:rPr lang="en-US" sz="1000" i="1" dirty="0">
-                <a:solidFill>
-                  <a:srgbClr val="60A5FA"/>
+            <a:pPr marL="0" indent="0">
+              <a:buNone/>
+            </a:pPr>
+            <a:r>
+              <a:rPr lang="en-US" sz="1300" b="1" dirty="0">
+                <a:solidFill>
+                  <a:srgbClr val="F1F5F9"/>
                 </a:solidFill>
                 <a:latin typeface="Calibri" pitchFamily="34" charset="0"/>
                 <a:ea typeface="Calibri" pitchFamily="34" charset="-122"/>
                 <a:cs typeface="Calibri" pitchFamily="34" charset="-120"/>
               </a:rPr>
-              <a:t>Read-only reference → can only read</a:t>
-            </a:r>
-            <a:endParaRPr lang="en-US" sz="1000" dirty="0"/>
-          </a:p>
-        </p:txBody>
-      </p:sp>
-      <p:sp>
-        <p:nvSpPr>
-          <p:cNvPr id="13" name="CalloutBg"/>
-          <p:cNvSpPr/>
-          <p:nvPr/>
-        </p:nvSpPr>
-        <p:spPr>
-          <a:xfrm>
-            <a:off x="502920" y="3977640"/>
-            <a:ext cx="8138160" cy="640080"/>
+              <a:t>const correctness</a:t>
+            </a:r>
+            <a:endParaRPr lang="en-US" sz="1300" dirty="0"/>
+          </a:p>
+        </p:txBody>
+      </p:sp>
+      <p:sp>
+        <p:nvSpPr>
+          <p:cNvPr id="14" name="Text 12"/>
+          <p:cNvSpPr/>
+          <p:nvPr/>
+        </p:nvSpPr>
+        <p:spPr>
+          <a:xfrm>
+            <a:off x="3200400" y="3502152"/>
+            <a:ext cx="5120640" cy="457200"/>
+          </a:xfrm>
+          <a:prstGeom prst="rect">
+            <a:avLst/>
+          </a:prstGeom>
+          <a:noFill/>
+          <a:ln/>
+        </p:spPr>
+        <p:txBody>
+          <a:bodyPr wrap="square" lIns="0" tIns="0" rIns="0" bIns="0" rtlCol="0" anchor="ctr"/>
+          <a:lstStyle/>
+          <a:p>
+            <a:pPr marL="0" indent="0">
+              <a:buNone/>
+            </a:pPr>
+            <a:r>
+              <a:rPr lang="en-US" sz="1100" dirty="0">
+                <a:solidFill>
+                  <a:srgbClr val="94A3B8"/>
+                </a:solidFill>
+                <a:latin typeface="Calibri" pitchFamily="34" charset="0"/>
+                <a:ea typeface="Calibri" pitchFamily="34" charset="-122"/>
+                <a:cs typeface="Calibri" pitchFamily="34" charset="-120"/>
+              </a:rPr>
+              <a:t>Read-only contracts — mutation rejected at compile time</a:t>
+            </a:r>
+            <a:endParaRPr lang="en-US" sz="1100" dirty="0"/>
+          </a:p>
+        </p:txBody>
+      </p:sp>
+      <p:sp>
+        <p:nvSpPr>
+          <p:cNvPr id="15" name="Shape 13"/>
+          <p:cNvSpPr/>
+          <p:nvPr/>
+        </p:nvSpPr>
+        <p:spPr>
+          <a:xfrm>
+            <a:off x="640080" y="4032504"/>
+            <a:ext cx="7863840" cy="457200"/>
           </a:xfrm>
           <a:prstGeom prst="rect">
             <a:avLst/>
@@ -5629,37 +5531,51 @@
           </a:solidFill>
           <a:ln/>
         </p:spPr>
-      </p:sp>
-      <p:sp>
-        <p:nvSpPr>
-          <p:cNvPr id="14" name="AccentBar"/>
-          <p:cNvSpPr/>
-          <p:nvPr/>
-        </p:nvSpPr>
-        <p:spPr>
-          <a:xfrm>
-            <a:off x="502920" y="3977640"/>
-            <a:ext cx="45720" cy="640080"/>
+        <p:txBody>
+          <a:bodyPr/>
+          <a:lstStyle/>
+          <a:p>
+            <a:endParaRPr lang="en-US"/>
+          </a:p>
+        </p:txBody>
+      </p:sp>
+      <p:sp>
+        <p:nvSpPr>
+          <p:cNvPr id="16" name="Shape 14"/>
+          <p:cNvSpPr/>
+          <p:nvPr/>
+        </p:nvSpPr>
+        <p:spPr>
+          <a:xfrm>
+            <a:off x="640080" y="4032504"/>
+            <a:ext cx="54864" cy="457200"/>
           </a:xfrm>
           <a:prstGeom prst="rect">
             <a:avLst/>
           </a:prstGeom>
           <a:solidFill>
-            <a:srgbClr val="60A5FA"/>
+            <a:srgbClr val="FBBF24"/>
           </a:solidFill>
           <a:ln/>
         </p:spPr>
-      </p:sp>
-      <p:sp>
-        <p:nvSpPr>
-          <p:cNvPr id="15" name="CalloutText"/>
-          <p:cNvSpPr/>
-          <p:nvPr/>
-        </p:nvSpPr>
-        <p:spPr>
-          <a:xfrm>
-            <a:off x="685800" y="4023360"/>
-            <a:ext cx="7818120" cy="548640"/>
+        <p:txBody>
+          <a:bodyPr/>
+          <a:lstStyle/>
+          <a:p>
+            <a:endParaRPr lang="en-US"/>
+          </a:p>
+        </p:txBody>
+      </p:sp>
+      <p:sp>
+        <p:nvSpPr>
+          <p:cNvPr id="17" name="Text 15"/>
+          <p:cNvSpPr/>
+          <p:nvPr/>
+        </p:nvSpPr>
+        <p:spPr>
+          <a:xfrm>
+            <a:off x="914400" y="4032504"/>
+            <a:ext cx="2286000" cy="457200"/>
           </a:xfrm>
           <a:prstGeom prst="rect">
             <a:avLst/>
@@ -5671,24 +5587,46 @@
           <a:bodyPr wrap="square" lIns="0" tIns="0" rIns="0" bIns="0" rtlCol="0" anchor="ctr"/>
           <a:lstStyle/>
           <a:p>
-            <a:pPr indent="0" marL="0">
-              <a:buNone/>
-            </a:pPr>
-            <a:r>
-              <a:rPr lang="en-US" sz="1200" b="1" dirty="0">
-                <a:solidFill>
-                  <a:srgbClr val="60A5FA"/>
+            <a:pPr marL="0" indent="0">
+              <a:buNone/>
+            </a:pPr>
+            <a:r>
+              <a:rPr lang="en-US" sz="1300" b="1" dirty="0">
+                <a:solidFill>
+                  <a:srgbClr val="F1F5F9"/>
                 </a:solidFill>
                 <a:latin typeface="Calibri" pitchFamily="34" charset="0"/>
                 <a:ea typeface="Calibri" pitchFamily="34" charset="-122"/>
                 <a:cs typeface="Calibri" pitchFamily="34" charset="-120"/>
               </a:rPr>
-              <a:t xml:space="preserve">This is the type system choosing behavior, not just blocking a write. </a:t>
-            </a:r>
-            <a:endParaRPr lang="en-US" sz="1200" dirty="0"/>
-          </a:p>
-          <a:p>
-            <a:pPr indent="0" marL="0">
+              <a:t>Your custom types</a:t>
+            </a:r>
+            <a:endParaRPr lang="en-US" sz="1300" dirty="0"/>
+          </a:p>
+        </p:txBody>
+      </p:sp>
+      <p:sp>
+        <p:nvSpPr>
+          <p:cNvPr id="18" name="Text 16"/>
+          <p:cNvSpPr/>
+          <p:nvPr/>
+        </p:nvSpPr>
+        <p:spPr>
+          <a:xfrm>
+            <a:off x="3200400" y="4032504"/>
+            <a:ext cx="5120640" cy="457200"/>
+          </a:xfrm>
+          <a:prstGeom prst="rect">
+            <a:avLst/>
+          </a:prstGeom>
+          <a:noFill/>
+          <a:ln/>
+        </p:spPr>
+        <p:txBody>
+          <a:bodyPr wrap="square" lIns="0" tIns="0" rIns="0" bIns="0" rtlCol="0" anchor="ctr"/>
+          <a:lstStyle/>
+          <a:p>
+            <a:pPr marL="0" indent="0">
               <a:buNone/>
             </a:pPr>
             <a:r>
@@ -5700,7 +5638,7 @@
                 <a:ea typeface="Calibri" pitchFamily="34" charset="-122"/>
                 <a:cs typeface="Calibri" pitchFamily="34" charset="-120"/>
               </a:rPr>
-              <a:t>And it cascades: if get_name() isn’t marked const, it vanishes from every function that takes const Person&amp;. One missing qualifier propagates through the entire call graph.</a:t>
+              <a:t>UserId ≠ DocId — semantic rules encoded as types</a:t>
             </a:r>
             <a:endParaRPr lang="en-US" sz="1100" dirty="0"/>
           </a:p>
@@ -5708,38 +5646,77 @@
       </p:sp>
       <p:sp>
         <p:nvSpPr>
-          <p:cNvPr id="16" name="SlideNum"/>
-          <p:cNvSpPr/>
-          <p:nvPr/>
-        </p:nvSpPr>
-        <p:spPr>
-          <a:xfrm>
-            <a:off x="7772400" y="4754880"/>
-            <a:ext cx="1097280" cy="320040"/>
-          </a:xfrm>
-          <a:prstGeom prst="rect">
-            <a:avLst/>
-          </a:prstGeom>
-          <a:noFill/>
-          <a:ln/>
-        </p:spPr>
-        <p:txBody>
-          <a:bodyPr wrap="square" rtlCol="0" anchor="ctr"/>
-          <a:lstStyle/>
-          <a:p>
-            <a:pPr algn="r" indent="0" marL="0">
-              <a:buNone/>
-            </a:pPr>
-            <a:r>
-              <a:rPr lang="en-US" sz="900" dirty="0">
-                <a:solidFill>
-                  <a:srgbClr val="64748B"/>
+          <p:cNvPr id="19" name="Text 17"/>
+          <p:cNvSpPr/>
+          <p:nvPr/>
+        </p:nvSpPr>
+        <p:spPr>
+          <a:xfrm>
+            <a:off x="640080" y="4617720"/>
+            <a:ext cx="7863840" cy="320040"/>
+          </a:xfrm>
+          <a:prstGeom prst="rect">
+            <a:avLst/>
+          </a:prstGeom>
+          <a:noFill/>
+          <a:ln/>
+        </p:spPr>
+        <p:txBody>
+          <a:bodyPr wrap="square" lIns="0" tIns="0" rIns="0" bIns="0" rtlCol="0" anchor="ctr"/>
+          <a:lstStyle/>
+          <a:p>
+            <a:pPr marL="0" indent="0">
+              <a:buNone/>
+            </a:pPr>
+            <a:r>
+              <a:rPr lang="en-US" sz="1200" i="1" dirty="0">
+                <a:solidFill>
+                  <a:srgbClr val="FBBF24"/>
                 </a:solidFill>
                 <a:latin typeface="Calibri" pitchFamily="34" charset="0"/>
                 <a:ea typeface="Calibri" pitchFamily="34" charset="-122"/>
                 <a:cs typeface="Calibri" pitchFamily="34" charset="-120"/>
               </a:rPr>
-              <a:t>4 / 7</a:t>
+              <a:t>The type system is already there. We're just using more of it.</a:t>
+            </a:r>
+            <a:endParaRPr lang="en-US" sz="1200" dirty="0"/>
+          </a:p>
+        </p:txBody>
+      </p:sp>
+      <p:sp>
+        <p:nvSpPr>
+          <p:cNvPr id="20" name="Text 18"/>
+          <p:cNvSpPr/>
+          <p:nvPr/>
+        </p:nvSpPr>
+        <p:spPr>
+          <a:xfrm>
+            <a:off x="7772400" y="4754880"/>
+            <a:ext cx="1097280" cy="320040"/>
+          </a:xfrm>
+          <a:prstGeom prst="rect">
+            <a:avLst/>
+          </a:prstGeom>
+          <a:noFill/>
+          <a:ln/>
+        </p:spPr>
+        <p:txBody>
+          <a:bodyPr wrap="square" rtlCol="0" anchor="ctr"/>
+          <a:lstStyle/>
+          <a:p>
+            <a:pPr marL="0" indent="0" algn="r">
+              <a:buNone/>
+            </a:pPr>
+            <a:r>
+              <a:rPr lang="en-US" sz="900" dirty="0">
+                <a:solidFill>
+                  <a:srgbClr val="64748B"/>
+                </a:solidFill>
+                <a:latin typeface="Calibri" pitchFamily="34" charset="0"/>
+                <a:ea typeface="Calibri" pitchFamily="34" charset="-122"/>
+                <a:cs typeface="Calibri" pitchFamily="34" charset="-120"/>
+              </a:rPr>
+              <a:t>7 / 7</a:t>
             </a:r>
             <a:endParaRPr lang="en-US" sz="900" dirty="0"/>
           </a:p>
@@ -6046,4 +6023,319 @@
     </a:ext>
   </a:extLst>
 </a:theme>
+</file>
+
+<file path=ppt/theme/theme2.xml><?xml version="1.0" encoding="utf-8"?>
+<a:theme xmlns:a="http://schemas.openxmlformats.org/drawingml/2006/main" name="Office Theme">
+  <a:themeElements>
+    <a:clrScheme name="Office">
+      <a:dk1>
+        <a:sysClr val="windowText" lastClr="000000"/>
+      </a:dk1>
+      <a:lt1>
+        <a:sysClr val="window" lastClr="FFFFFF"/>
+      </a:lt1>
+      <a:dk2>
+        <a:srgbClr val="0E2841"/>
+      </a:dk2>
+      <a:lt2>
+        <a:srgbClr val="E8E8E8"/>
+      </a:lt2>
+      <a:accent1>
+        <a:srgbClr val="156082"/>
+      </a:accent1>
+      <a:accent2>
+        <a:srgbClr val="E97132"/>
+      </a:accent2>
+      <a:accent3>
+        <a:srgbClr val="196B24"/>
+      </a:accent3>
+      <a:accent4>
+        <a:srgbClr val="0F9ED5"/>
+      </a:accent4>
+      <a:accent5>
+        <a:srgbClr val="A02B93"/>
+      </a:accent5>
+      <a:accent6>
+        <a:srgbClr val="4EA72E"/>
+      </a:accent6>
+      <a:hlink>
+        <a:srgbClr val="467886"/>
+      </a:hlink>
+      <a:folHlink>
+        <a:srgbClr val="96607D"/>
+      </a:folHlink>
+    </a:clrScheme>
+    <a:fontScheme name="Office">
+      <a:majorFont>
+        <a:latin typeface="Aptos Display" panose="02110004020202020204"/>
+        <a:ea typeface=""/>
+        <a:cs typeface=""/>
+        <a:font script="Jpan" typeface="游ゴシック Light"/>
+        <a:font script="Hang" typeface="맑은 고딕"/>
+        <a:font script="Hans" typeface="等线 Light"/>
+        <a:font script="Hant" typeface="新細明體"/>
+        <a:font script="Arab" typeface="Times New Roman"/>
+        <a:font script="Hebr" typeface="Times New Roman"/>
+        <a:font script="Thai" typeface="Angsana New"/>
+        <a:font script="Ethi" typeface="Nyala"/>
+        <a:font script="Beng" typeface="Vrinda"/>
+        <a:font script="Gujr" typeface="Shruti"/>
+        <a:font script="Khmr" typeface="MoolBoran"/>
+        <a:font script="Knda" typeface="Tunga"/>
+        <a:font script="Guru" typeface="Raavi"/>
+        <a:font script="Cans" typeface="Euphemia"/>
+        <a:font script="Cher" typeface="Plantagenet Cherokee"/>
+        <a:font script="Yiii" typeface="Microsoft Yi Baiti"/>
+        <a:font script="Tibt" typeface="Microsoft Himalaya"/>
+        <a:font script="Thaa" typeface="MV Boli"/>
+        <a:font script="Deva" typeface="Mangal"/>
+        <a:font script="Telu" typeface="Gautami"/>
+        <a:font script="Taml" typeface="Latha"/>
+        <a:font script="Syrc" typeface="Estrangelo Edessa"/>
+        <a:font script="Orya" typeface="Kalinga"/>
+        <a:font script="Mlym" typeface="Kartika"/>
+        <a:font script="Laoo" typeface="DokChampa"/>
+        <a:font script="Sinh" typeface="Iskoola Pota"/>
+        <a:font script="Mong" typeface="Mongolian Baiti"/>
+        <a:font script="Viet" typeface="Times New Roman"/>
+        <a:font script="Uigh" typeface="Microsoft Uighur"/>
+        <a:font script="Geor" typeface="Sylfaen"/>
+        <a:font script="Armn" typeface="Arial"/>
+        <a:font script="Bugi" typeface="Leelawadee UI"/>
+        <a:font script="Bopo" typeface="Microsoft JhengHei"/>
+        <a:font script="Java" typeface="Javanese Text"/>
+        <a:font script="Lisu" typeface="Segoe UI"/>
+        <a:font script="Mymr" typeface="Myanmar Text"/>
+        <a:font script="Nkoo" typeface="Ebrima"/>
+        <a:font script="Olck" typeface="Nirmala UI"/>
+        <a:font script="Osma" typeface="Ebrima"/>
+        <a:font script="Phag" typeface="Phagspa"/>
+        <a:font script="Syrn" typeface="Estrangelo Edessa"/>
+        <a:font script="Syrj" typeface="Estrangelo Edessa"/>
+        <a:font script="Syre" typeface="Estrangelo Edessa"/>
+        <a:font script="Sora" typeface="Nirmala UI"/>
+        <a:font script="Tale" typeface="Microsoft Tai Le"/>
+        <a:font script="Talu" typeface="Microsoft New Tai Lue"/>
+        <a:font script="Tfng" typeface="Ebrima"/>
+      </a:majorFont>
+      <a:minorFont>
+        <a:latin typeface="Aptos" panose="02110004020202020204"/>
+        <a:ea typeface=""/>
+        <a:cs typeface=""/>
+        <a:font script="Jpan" typeface="游ゴシック"/>
+        <a:font script="Hang" typeface="맑은 고딕"/>
+        <a:font script="Hans" typeface="等线"/>
+        <a:font script="Hant" typeface="新細明體"/>
+        <a:font script="Arab" typeface="Arial"/>
+        <a:font script="Hebr" typeface="Arial"/>
+        <a:font script="Thai" typeface="Cordia New"/>
+        <a:font script="Ethi" typeface="Nyala"/>
+        <a:font script="Beng" typeface="Vrinda"/>
+        <a:font script="Gujr" typeface="Shruti"/>
+        <a:font script="Khmr" typeface="DaunPenh"/>
+        <a:font script="Knda" typeface="Tunga"/>
+        <a:font script="Guru" typeface="Raavi"/>
+        <a:font script="Cans" typeface="Euphemia"/>
+        <a:font script="Cher" typeface="Plantagenet Cherokee"/>
+        <a:font script="Yiii" typeface="Microsoft Yi Baiti"/>
+        <a:font script="Tibt" typeface="Microsoft Himalaya"/>
+        <a:font script="Thaa" typeface="MV Boli"/>
+        <a:font script="Deva" typeface="Mangal"/>
+        <a:font script="Telu" typeface="Gautami"/>
+        <a:font script="Taml" typeface="Latha"/>
+        <a:font script="Syrc" typeface="Estrangelo Edessa"/>
+        <a:font script="Orya" typeface="Kalinga"/>
+        <a:font script="Mlym" typeface="Kartika"/>
+        <a:font script="Laoo" typeface="DokChampa"/>
+        <a:font script="Sinh" typeface="Iskoola Pota"/>
+        <a:font script="Mong" typeface="Mongolian Baiti"/>
+        <a:font script="Viet" typeface="Arial"/>
+        <a:font script="Uigh" typeface="Microsoft Uighur"/>
+        <a:font script="Geor" typeface="Sylfaen"/>
+        <a:font script="Armn" typeface="Arial"/>
+        <a:font script="Bugi" typeface="Leelawadee UI"/>
+        <a:font script="Bopo" typeface="Microsoft JhengHei"/>
+        <a:font script="Java" typeface="Javanese Text"/>
+        <a:font script="Lisu" typeface="Segoe UI"/>
+        <a:font script="Mymr" typeface="Myanmar Text"/>
+        <a:font script="Nkoo" typeface="Ebrima"/>
+        <a:font script="Olck" typeface="Nirmala UI"/>
+        <a:font script="Osma" typeface="Ebrima"/>
+        <a:font script="Phag" typeface="Phagspa"/>
+        <a:font script="Syrn" typeface="Estrangelo Edessa"/>
+        <a:font script="Syrj" typeface="Estrangelo Edessa"/>
+        <a:font script="Syre" typeface="Estrangelo Edessa"/>
+        <a:font script="Sora" typeface="Nirmala UI"/>
+        <a:font script="Tale" typeface="Microsoft Tai Le"/>
+        <a:font script="Talu" typeface="Microsoft New Tai Lue"/>
+        <a:font script="Tfng" typeface="Ebrima"/>
+      </a:minorFont>
+    </a:fontScheme>
+    <a:fmtScheme name="Office">
+      <a:fillStyleLst>
+        <a:solidFill>
+          <a:schemeClr val="phClr"/>
+        </a:solidFill>
+        <a:gradFill rotWithShape="1">
+          <a:gsLst>
+            <a:gs pos="0">
+              <a:schemeClr val="phClr">
+                <a:lumMod val="110000"/>
+                <a:satMod val="105000"/>
+                <a:tint val="67000"/>
+              </a:schemeClr>
+            </a:gs>
+            <a:gs pos="50000">
+              <a:schemeClr val="phClr">
+                <a:lumMod val="105000"/>
+                <a:satMod val="103000"/>
+                <a:tint val="73000"/>
+              </a:schemeClr>
+            </a:gs>
+            <a:gs pos="100000">
+              <a:schemeClr val="phClr">
+                <a:lumMod val="105000"/>
+                <a:satMod val="109000"/>
+                <a:tint val="81000"/>
+              </a:schemeClr>
+            </a:gs>
+          </a:gsLst>
+          <a:lin ang="5400000" scaled="0"/>
+        </a:gradFill>
+        <a:gradFill rotWithShape="1">
+          <a:gsLst>
+            <a:gs pos="0">
+              <a:schemeClr val="phClr">
+                <a:satMod val="103000"/>
+                <a:lumMod val="102000"/>
+                <a:tint val="94000"/>
+              </a:schemeClr>
+            </a:gs>
+            <a:gs pos="50000">
+              <a:schemeClr val="phClr">
+                <a:satMod val="110000"/>
+                <a:lumMod val="100000"/>
+                <a:shade val="100000"/>
+              </a:schemeClr>
+            </a:gs>
+            <a:gs pos="100000">
+              <a:schemeClr val="phClr">
+                <a:lumMod val="99000"/>
+                <a:satMod val="120000"/>
+                <a:shade val="78000"/>
+              </a:schemeClr>
+            </a:gs>
+          </a:gsLst>
+          <a:lin ang="5400000" scaled="0"/>
+        </a:gradFill>
+      </a:fillStyleLst>
+      <a:lnStyleLst>
+        <a:ln w="12700" cap="flat" cmpd="sng" algn="ctr">
+          <a:solidFill>
+            <a:schemeClr val="phClr"/>
+          </a:solidFill>
+          <a:prstDash val="solid"/>
+          <a:miter lim="800000"/>
+        </a:ln>
+        <a:ln w="19050" cap="flat" cmpd="sng" algn="ctr">
+          <a:solidFill>
+            <a:schemeClr val="phClr"/>
+          </a:solidFill>
+          <a:prstDash val="solid"/>
+          <a:miter lim="800000"/>
+        </a:ln>
+        <a:ln w="25400" cap="flat" cmpd="sng" algn="ctr">
+          <a:solidFill>
+            <a:schemeClr val="phClr"/>
+          </a:solidFill>
+          <a:prstDash val="solid"/>
+          <a:miter lim="800000"/>
+        </a:ln>
+      </a:lnStyleLst>
+      <a:effectStyleLst>
+        <a:effectStyle>
+          <a:effectLst/>
+        </a:effectStyle>
+        <a:effectStyle>
+          <a:effectLst/>
+        </a:effectStyle>
+        <a:effectStyle>
+          <a:effectLst>
+            <a:outerShdw blurRad="57150" dist="19050" dir="5400000" algn="ctr" rotWithShape="0">
+              <a:srgbClr val="000000">
+                <a:alpha val="63000"/>
+              </a:srgbClr>
+            </a:outerShdw>
+          </a:effectLst>
+        </a:effectStyle>
+      </a:effectStyleLst>
+      <a:bgFillStyleLst>
+        <a:solidFill>
+          <a:schemeClr val="phClr"/>
+        </a:solidFill>
+        <a:solidFill>
+          <a:schemeClr val="phClr">
+            <a:tint val="95000"/>
+            <a:satMod val="170000"/>
+          </a:schemeClr>
+        </a:solidFill>
+        <a:gradFill rotWithShape="1">
+          <a:gsLst>
+            <a:gs pos="0">
+              <a:schemeClr val="phClr">
+                <a:tint val="93000"/>
+                <a:satMod val="150000"/>
+                <a:shade val="98000"/>
+                <a:lumMod val="102000"/>
+              </a:schemeClr>
+            </a:gs>
+            <a:gs pos="50000">
+              <a:schemeClr val="phClr">
+                <a:tint val="98000"/>
+                <a:satMod val="130000"/>
+                <a:shade val="90000"/>
+                <a:lumMod val="103000"/>
+              </a:schemeClr>
+            </a:gs>
+            <a:gs pos="100000">
+              <a:schemeClr val="phClr">
+                <a:shade val="63000"/>
+                <a:satMod val="120000"/>
+              </a:schemeClr>
+            </a:gs>
+          </a:gsLst>
+          <a:lin ang="5400000" scaled="0"/>
+        </a:gradFill>
+      </a:bgFillStyleLst>
+    </a:fmtScheme>
+  </a:themeElements>
+  <a:objectDefaults>
+    <a:lnDef>
+      <a:spPr/>
+      <a:bodyPr/>
+      <a:lstStyle/>
+      <a:style>
+        <a:lnRef idx="2">
+          <a:schemeClr val="accent1"/>
+        </a:lnRef>
+        <a:fillRef idx="0">
+          <a:schemeClr val="accent1"/>
+        </a:fillRef>
+        <a:effectRef idx="1">
+          <a:schemeClr val="accent1"/>
+        </a:effectRef>
+        <a:fontRef idx="minor">
+          <a:schemeClr val="tx1"/>
+        </a:fontRef>
+      </a:style>
+    </a:lnDef>
+  </a:objectDefaults>
+  <a:extraClrSchemeLst/>
+  <a:extLst>
+    <a:ext uri="{05A4C25C-085E-4340-85A3-A5531E510DB2}">
+      <thm15:themeFamily xmlns:thm15="http://schemas.microsoft.com/office/thememl/2012/main" name="Office Theme" id="{2E142A2C-CD16-42D6-873A-C26D2A0506FA}" vid="{1BDDFF52-6CD6-40A5-AB3C-68EB2F1E4D0A}"/>
+    </a:ext>
+  </a:extLst>
+</a:theme>
 </file>